--- a/presentacion/Sustentación Tarea 3 Big Data UNAD.pptx
+++ b/presentacion/Sustentación Tarea 3 Big Data UNAD.pptx
@@ -7630,18 +7630,7 @@
             <a:spAutoFit/>
           </a:bodyPr>
           <a:lstStyle/>
-          <a:p>
-            <a:pPr algn="l"/>
-            <a:r>
-              <a:rPr b="1" sz="1050" i="0" u="none">
-                <a:solidFill>
-                  <a:srgbClr val="D87014"/>
-                </a:solidFill>
-                <a:latin typeface="DM Sans"/>
-              </a:rPr>
-              <a:t>OBSERVABILIDAD Y TELEMETRÍA DE CLÚSTER</a:t>
-            </a:r>
-          </a:p>
+          <a:p/>
         </p:txBody>
       </p:sp>
       <p:sp>
@@ -7665,18 +7654,7 @@
             <a:spAutoFit/>
           </a:bodyPr>
           <a:lstStyle/>
-          <a:p>
-            <a:pPr algn="l"/>
-            <a:r>
-              <a:rPr b="1" sz="1800" i="0" u="none">
-                <a:solidFill>
-                  <a:srgbClr val="FFFFFF"/>
-                </a:solidFill>
-                <a:latin typeface="Space Grotesk"/>
-              </a:rPr>
-              <a:t>Auditoría en Tiempo Real mediante Spark Web UI (Puerto 4040)</a:t>
-            </a:r>
-          </a:p>
+          <a:p/>
         </p:txBody>
       </p:sp>
       <p:sp>
@@ -7700,18 +7678,7 @@
             <a:spAutoFit/>
           </a:bodyPr>
           <a:lstStyle/>
-          <a:p>
-            <a:pPr algn="l"/>
-            <a:r>
-              <a:rPr b="0" sz="1350" i="0" u="none">
-                <a:solidFill>
-                  <a:srgbClr val="CBD5E1"/>
-                </a:solidFill>
-                <a:latin typeface="DM Sans"/>
-              </a:rPr>
-              <a:t>Inspección de Jobs activos, DAG de Stages por micro-batch, entorno y consumo RAM en Executors.</a:t>
-            </a:r>
-          </a:p>
+          <a:p/>
         </p:txBody>
       </p:sp>
       <p:sp>
@@ -7735,18 +7702,7 @@
             <a:spAutoFit/>
           </a:bodyPr>
           <a:lstStyle/>
-          <a:p>
-            <a:pPr algn="r"/>
-            <a:r>
-              <a:rPr b="1" sz="2700" i="0" u="none">
-                <a:solidFill>
-                  <a:srgbClr val="D87014"/>
-                </a:solidFill>
-                <a:latin typeface="DM Sans"/>
-              </a:rPr>
-              <a:t>:4040</a:t>
-            </a:r>
-          </a:p>
+          <a:p/>
         </p:txBody>
       </p:sp>
       <p:sp>
@@ -7770,20 +7726,33 @@
             <a:spAutoFit/>
           </a:bodyPr>
           <a:lstStyle/>
-          <a:p>
-            <a:pPr algn="r"/>
-            <a:r>
-              <a:rPr b="0" sz="1200" i="0" u="none">
-                <a:solidFill>
-                  <a:srgbClr val="FFFFFF"/>
-                </a:solidFill>
-                <a:latin typeface="DM Sans"/>
-              </a:rPr>
-              <a:t>Spark UI</a:t>
-            </a:r>
-          </a:p>
-        </p:txBody>
-      </p:sp>
+          <a:p/>
+        </p:txBody>
+      </p:sp>
+      <p:pic>
+        <p:nvPicPr>
+          <p:cNvPr id="22" name="Picture 21" descr="figura5_streaming_kafka_spark.png"/>
+          <p:cNvPicPr>
+            <a:picLocks noChangeAspect="1"/>
+          </p:cNvPicPr>
+          <p:nvPr/>
+        </p:nvPicPr>
+        <p:blipFill>
+          <a:blip r:embed="rId2"/>
+          <a:stretch>
+            <a:fillRect/>
+          </a:stretch>
+        </p:blipFill>
+        <p:spPr>
+          <a:xfrm>
+            <a:off x="612648" y="3291840"/>
+            <a:ext cx="10972800" cy="3291840"/>
+          </a:xfrm>
+          <a:prstGeom prst="rect">
+            <a:avLst/>
+          </a:prstGeom>
+        </p:spPr>
+      </p:pic>
     </p:spTree>
   </p:cSld>
   <p:clrMapOvr>

--- a/presentacion/Sustentación Tarea 3 Big Data UNAD.pptx
+++ b/presentacion/Sustentación Tarea 3 Big Data UNAD.pptx
@@ -1,127 +1,119 @@
 
 <file path=ppt/presentation.xml><?xml version="1.0" encoding="utf-8"?>
-<ns0:presentation xmlns:ns0="http://schemas.openxmlformats.org/presentationml/2006/main" xmlns:ns1="http://schemas.openxmlformats.org/officeDocument/2006/relationships" xmlns:ns2="http://schemas.openxmlformats.org/drawingml/2006/main" saveSubsetFonts="1" autoCompressPictures="0" embedTrueTypeFonts="1">
-  <ns0:sldMasterIdLst>
-    <ns0:sldMasterId id="2147483648" ns1:id="rId1"/>
-  </ns0:sldMasterIdLst>
-  <ns0:sldIdLst>
-    <ns0:sldId id="256" ns1:id="rId7"/>
-    <ns0:sldId id="257" ns1:id="rId8"/>
-    <ns0:sldId id="258" ns1:id="rId9"/>
-    <ns0:sldId id="259" ns1:id="rId10"/>
-    <ns0:sldId id="260" ns1:id="rId11"/>
-    <ns0:sldId id="261" ns1:id="rId12"/>
-    <ns0:sldId id="262" ns1:id="rId13"/>
-  </ns0:sldIdLst>
-  <ns0:sldSz cx="12192000" cy="6858000" type="screen4x3"/>
-  <ns0:notesSz cx="6858000" cy="9144000"/>
-  <ns0:embeddedFontLst>
-    <ns0:embeddedFont>
-      <ns0:font typeface="DM Sans"/>
-      <ns0:bold ns1:id="rIdFont14"/>
-      <ns0:regular ns1:id="rIdFont15"/>
-    </ns0:embeddedFont>
-    <ns0:embeddedFont>
-      <ns0:font typeface="Space Grotesk"/>
-      <ns0:bold ns1:id="rIdFont16"/>
-    </ns0:embeddedFont>
-  </ns0:embeddedFontLst>
-  <ns0:defaultTextStyle>
-    <ns2:defPPr>
-      <ns2:defRPr lang="en-US"/>
-    </ns2:defPPr>
-    <ns2:lvl1pPr marL="0" algn="l" defTabSz="457200" rtl="0" eaLnBrk="1" latinLnBrk="0" hangingPunct="1">
-      <ns2:defRPr sz="1800" kern="1200">
-        <ns2:solidFill>
-          <ns2:schemeClr val="tx1"/>
-        </ns2:solidFill>
-        <ns2:latin typeface="+mn-lt"/>
-        <ns2:ea typeface="+mn-ea"/>
-        <ns2:cs typeface="+mn-cs"/>
-      </ns2:defRPr>
-    </ns2:lvl1pPr>
-    <ns2:lvl2pPr marL="457200" algn="l" defTabSz="457200" rtl="0" eaLnBrk="1" latinLnBrk="0" hangingPunct="1">
-      <ns2:defRPr sz="1800" kern="1200">
-        <ns2:solidFill>
-          <ns2:schemeClr val="tx1"/>
-        </ns2:solidFill>
-        <ns2:latin typeface="+mn-lt"/>
-        <ns2:ea typeface="+mn-ea"/>
-        <ns2:cs typeface="+mn-cs"/>
-      </ns2:defRPr>
-    </ns2:lvl2pPr>
-    <ns2:lvl3pPr marL="914400" algn="l" defTabSz="457200" rtl="0" eaLnBrk="1" latinLnBrk="0" hangingPunct="1">
-      <ns2:defRPr sz="1800" kern="1200">
-        <ns2:solidFill>
-          <ns2:schemeClr val="tx1"/>
-        </ns2:solidFill>
-        <ns2:latin typeface="+mn-lt"/>
-        <ns2:ea typeface="+mn-ea"/>
-        <ns2:cs typeface="+mn-cs"/>
-      </ns2:defRPr>
-    </ns2:lvl3pPr>
-    <ns2:lvl4pPr marL="1371600" algn="l" defTabSz="457200" rtl="0" eaLnBrk="1" latinLnBrk="0" hangingPunct="1">
-      <ns2:defRPr sz="1800" kern="1200">
-        <ns2:solidFill>
-          <ns2:schemeClr val="tx1"/>
-        </ns2:solidFill>
-        <ns2:latin typeface="+mn-lt"/>
-        <ns2:ea typeface="+mn-ea"/>
-        <ns2:cs typeface="+mn-cs"/>
-      </ns2:defRPr>
-    </ns2:lvl4pPr>
-    <ns2:lvl5pPr marL="1828800" algn="l" defTabSz="457200" rtl="0" eaLnBrk="1" latinLnBrk="0" hangingPunct="1">
-      <ns2:defRPr sz="1800" kern="1200">
-        <ns2:solidFill>
-          <ns2:schemeClr val="tx1"/>
-        </ns2:solidFill>
-        <ns2:latin typeface="+mn-lt"/>
-        <ns2:ea typeface="+mn-ea"/>
-        <ns2:cs typeface="+mn-cs"/>
-      </ns2:defRPr>
-    </ns2:lvl5pPr>
-    <ns2:lvl6pPr marL="2286000" algn="l" defTabSz="457200" rtl="0" eaLnBrk="1" latinLnBrk="0" hangingPunct="1">
-      <ns2:defRPr sz="1800" kern="1200">
-        <ns2:solidFill>
-          <ns2:schemeClr val="tx1"/>
-        </ns2:solidFill>
-        <ns2:latin typeface="+mn-lt"/>
-        <ns2:ea typeface="+mn-ea"/>
-        <ns2:cs typeface="+mn-cs"/>
-      </ns2:defRPr>
-    </ns2:lvl6pPr>
-    <ns2:lvl7pPr marL="2743200" algn="l" defTabSz="457200" rtl="0" eaLnBrk="1" latinLnBrk="0" hangingPunct="1">
-      <ns2:defRPr sz="1800" kern="1200">
-        <ns2:solidFill>
-          <ns2:schemeClr val="tx1"/>
-        </ns2:solidFill>
-        <ns2:latin typeface="+mn-lt"/>
-        <ns2:ea typeface="+mn-ea"/>
-        <ns2:cs typeface="+mn-cs"/>
-      </ns2:defRPr>
-    </ns2:lvl7pPr>
-    <ns2:lvl8pPr marL="3200400" algn="l" defTabSz="457200" rtl="0" eaLnBrk="1" latinLnBrk="0" hangingPunct="1">
-      <ns2:defRPr sz="1800" kern="1200">
-        <ns2:solidFill>
-          <ns2:schemeClr val="tx1"/>
-        </ns2:solidFill>
-        <ns2:latin typeface="+mn-lt"/>
-        <ns2:ea typeface="+mn-ea"/>
-        <ns2:cs typeface="+mn-cs"/>
-      </ns2:defRPr>
-    </ns2:lvl8pPr>
-    <ns2:lvl9pPr marL="3657600" algn="l" defTabSz="457200" rtl="0" eaLnBrk="1" latinLnBrk="0" hangingPunct="1">
-      <ns2:defRPr sz="1800" kern="1200">
-        <ns2:solidFill>
-          <ns2:schemeClr val="tx1"/>
-        </ns2:solidFill>
-        <ns2:latin typeface="+mn-lt"/>
-        <ns2:ea typeface="+mn-ea"/>
-        <ns2:cs typeface="+mn-cs"/>
-      </ns2:defRPr>
-    </ns2:lvl9pPr>
-  </ns0:defaultTextStyle>
-</ns0:presentation>
+<p:presentation xmlns:a="http://schemas.openxmlformats.org/drawingml/2006/main" xmlns:r="http://schemas.openxmlformats.org/officeDocument/2006/relationships" xmlns:p="http://schemas.openxmlformats.org/presentationml/2006/main" saveSubsetFonts="1" autoCompressPictures="0">
+  <p:sldMasterIdLst>
+    <p:sldMasterId id="2147483648" r:id="rId1"/>
+  </p:sldMasterIdLst>
+  <p:sldIdLst>
+    <p:sldId id="256" r:id="rId7"/>
+    <p:sldId id="257" r:id="rId8"/>
+    <p:sldId id="258" r:id="rId9"/>
+    <p:sldId id="259" r:id="rId10"/>
+    <p:sldId id="260" r:id="rId11"/>
+    <p:sldId id="261" r:id="rId12"/>
+    <p:sldId id="262" r:id="rId13"/>
+    <p:sldId id="263" r:id="rId14"/>
+    <p:sldId id="264" r:id="rId15"/>
+    <p:sldId id="265" r:id="rId16"/>
+  </p:sldIdLst>
+  <p:sldSz cx="12191695" cy="6858000" type="screen4x3"/>
+  <p:notesSz cx="6858000" cy="9144000"/>
+  <p:defaultTextStyle>
+    <a:defPPr>
+      <a:defRPr lang="en-US"/>
+    </a:defPPr>
+    <a:lvl1pPr marL="0" algn="l" defTabSz="457200" rtl="0" eaLnBrk="1" latinLnBrk="0" hangingPunct="1">
+      <a:defRPr sz="1800" kern="1200">
+        <a:solidFill>
+          <a:schemeClr val="tx1"/>
+        </a:solidFill>
+        <a:latin typeface="+mn-lt"/>
+        <a:ea typeface="+mn-ea"/>
+        <a:cs typeface="+mn-cs"/>
+      </a:defRPr>
+    </a:lvl1pPr>
+    <a:lvl2pPr marL="457200" algn="l" defTabSz="457200" rtl="0" eaLnBrk="1" latinLnBrk="0" hangingPunct="1">
+      <a:defRPr sz="1800" kern="1200">
+        <a:solidFill>
+          <a:schemeClr val="tx1"/>
+        </a:solidFill>
+        <a:latin typeface="+mn-lt"/>
+        <a:ea typeface="+mn-ea"/>
+        <a:cs typeface="+mn-cs"/>
+      </a:defRPr>
+    </a:lvl2pPr>
+    <a:lvl3pPr marL="914400" algn="l" defTabSz="457200" rtl="0" eaLnBrk="1" latinLnBrk="0" hangingPunct="1">
+      <a:defRPr sz="1800" kern="1200">
+        <a:solidFill>
+          <a:schemeClr val="tx1"/>
+        </a:solidFill>
+        <a:latin typeface="+mn-lt"/>
+        <a:ea typeface="+mn-ea"/>
+        <a:cs typeface="+mn-cs"/>
+      </a:defRPr>
+    </a:lvl3pPr>
+    <a:lvl4pPr marL="1371600" algn="l" defTabSz="457200" rtl="0" eaLnBrk="1" latinLnBrk="0" hangingPunct="1">
+      <a:defRPr sz="1800" kern="1200">
+        <a:solidFill>
+          <a:schemeClr val="tx1"/>
+        </a:solidFill>
+        <a:latin typeface="+mn-lt"/>
+        <a:ea typeface="+mn-ea"/>
+        <a:cs typeface="+mn-cs"/>
+      </a:defRPr>
+    </a:lvl4pPr>
+    <a:lvl5pPr marL="1828800" algn="l" defTabSz="457200" rtl="0" eaLnBrk="1" latinLnBrk="0" hangingPunct="1">
+      <a:defRPr sz="1800" kern="1200">
+        <a:solidFill>
+          <a:schemeClr val="tx1"/>
+        </a:solidFill>
+        <a:latin typeface="+mn-lt"/>
+        <a:ea typeface="+mn-ea"/>
+        <a:cs typeface="+mn-cs"/>
+      </a:defRPr>
+    </a:lvl5pPr>
+    <a:lvl6pPr marL="2286000" algn="l" defTabSz="457200" rtl="0" eaLnBrk="1" latinLnBrk="0" hangingPunct="1">
+      <a:defRPr sz="1800" kern="1200">
+        <a:solidFill>
+          <a:schemeClr val="tx1"/>
+        </a:solidFill>
+        <a:latin typeface="+mn-lt"/>
+        <a:ea typeface="+mn-ea"/>
+        <a:cs typeface="+mn-cs"/>
+      </a:defRPr>
+    </a:lvl6pPr>
+    <a:lvl7pPr marL="2743200" algn="l" defTabSz="457200" rtl="0" eaLnBrk="1" latinLnBrk="0" hangingPunct="1">
+      <a:defRPr sz="1800" kern="1200">
+        <a:solidFill>
+          <a:schemeClr val="tx1"/>
+        </a:solidFill>
+        <a:latin typeface="+mn-lt"/>
+        <a:ea typeface="+mn-ea"/>
+        <a:cs typeface="+mn-cs"/>
+      </a:defRPr>
+    </a:lvl7pPr>
+    <a:lvl8pPr marL="3200400" algn="l" defTabSz="457200" rtl="0" eaLnBrk="1" latinLnBrk="0" hangingPunct="1">
+      <a:defRPr sz="1800" kern="1200">
+        <a:solidFill>
+          <a:schemeClr val="tx1"/>
+        </a:solidFill>
+        <a:latin typeface="+mn-lt"/>
+        <a:ea typeface="+mn-ea"/>
+        <a:cs typeface="+mn-cs"/>
+      </a:defRPr>
+    </a:lvl8pPr>
+    <a:lvl9pPr marL="3657600" algn="l" defTabSz="457200" rtl="0" eaLnBrk="1" latinLnBrk="0" hangingPunct="1">
+      <a:defRPr sz="1800" kern="1200">
+        <a:solidFill>
+          <a:schemeClr val="tx1"/>
+        </a:solidFill>
+        <a:latin typeface="+mn-lt"/>
+        <a:ea typeface="+mn-ea"/>
+        <a:cs typeface="+mn-cs"/>
+      </a:defRPr>
+    </a:lvl9pPr>
+  </p:defaultTextStyle>
+</p:presentation>
 </file>
 
 <file path=ppt/slideLayouts/slideLayout1.xml><?xml version="1.0" encoding="utf-8"?>
@@ -3098,14 +3090,6 @@
 <file path=ppt/slides/slide1.xml><?xml version="1.0" encoding="utf-8"?>
 <p:sld xmlns:a="http://schemas.openxmlformats.org/drawingml/2006/main" xmlns:p="http://schemas.openxmlformats.org/presentationml/2006/main" xmlns:r="http://schemas.openxmlformats.org/officeDocument/2006/relationships">
   <p:cSld>
-    <p:bg>
-      <p:bgPr>
-        <a:solidFill>
-          <a:srgbClr val="002855"/>
-        </a:solidFill>
-        <a:effectLst/>
-      </p:bgPr>
-    </p:bg>
     <p:spTree>
       <p:nvGrpSpPr>
         <p:cNvPr id="1" name=""/>
@@ -3121,17 +3105,18 @@
         </p:nvSpPr>
         <p:spPr>
           <a:xfrm>
-            <a:off x="685800" y="5419725"/>
-            <a:ext cx="10820400" cy="904875"/>
+            <a:off x="0" y="0"/>
+            <a:ext cx="12191695" cy="6858000"/>
           </a:xfrm>
           <a:prstGeom prst="rect">
             <a:avLst/>
           </a:prstGeom>
-          <a:noFill/>
+          <a:solidFill>
+            <a:srgbClr val="00204A"/>
+          </a:solidFill>
           <a:ln>
             <a:noFill/>
           </a:ln>
-          <a:effectLst/>
         </p:spPr>
         <p:style>
           <a:lnRef idx="1">
@@ -3157,25 +3142,93 @@
       </p:sp>
       <p:sp>
         <p:nvSpPr>
-          <p:cNvPr id="3" name="Rectangle 2"/>
-          <p:cNvSpPr/>
-          <p:nvPr/>
-        </p:nvSpPr>
-        <p:spPr>
-          <a:xfrm>
-            <a:off x="685800" y="1724025"/>
-            <a:ext cx="685800" cy="57150"/>
+          <p:cNvPr id="3" name="TextBox 2"/>
+          <p:cNvSpPr txBox="1"/>
+          <p:nvPr/>
+        </p:nvSpPr>
+        <p:spPr>
+          <a:xfrm>
+            <a:off x="685800" y="502920"/>
+            <a:ext cx="7772400" cy="274320"/>
           </a:xfrm>
           <a:prstGeom prst="rect">
             <a:avLst/>
           </a:prstGeom>
+          <a:noFill/>
+        </p:spPr>
+        <p:txBody>
+          <a:bodyPr wrap="none">
+            <a:spAutoFit/>
+          </a:bodyPr>
+          <a:lstStyle/>
+          <a:p>
+            <a:r>
+              <a:rPr sz="1100" b="1">
+                <a:solidFill>
+                  <a:srgbClr val="F2A900"/>
+                </a:solidFill>
+                <a:latin typeface="Segoe UI"/>
+              </a:rPr>
+              <a:t>UNAD · ECBTI · CURSO BIG DATA (202016911) · OCTUBRE 2026</a:t>
+            </a:r>
+          </a:p>
+        </p:txBody>
+      </p:sp>
+      <p:sp>
+        <p:nvSpPr>
+          <p:cNvPr id="4" name="TextBox 3"/>
+          <p:cNvSpPr txBox="1"/>
+          <p:nvPr/>
+        </p:nvSpPr>
+        <p:spPr>
+          <a:xfrm>
+            <a:off x="9144000" y="502920"/>
+            <a:ext cx="2359152" cy="274320"/>
+          </a:xfrm>
+          <a:prstGeom prst="rect">
+            <a:avLst/>
+          </a:prstGeom>
+          <a:noFill/>
+        </p:spPr>
+        <p:txBody>
+          <a:bodyPr wrap="none">
+            <a:spAutoFit/>
+          </a:bodyPr>
+          <a:lstStyle/>
+          <a:p>
+            <a:pPr algn="r"/>
+            <a:r>
+              <a:rPr sz="1150" b="1">
+                <a:solidFill>
+                  <a:srgbClr val="FFFFFF"/>
+                </a:solidFill>
+                <a:latin typeface="Segoe UI"/>
+              </a:rPr>
+              <a:t>Tarea 3 · Grupo 16</a:t>
+            </a:r>
+          </a:p>
+        </p:txBody>
+      </p:sp>
+      <p:sp>
+        <p:nvSpPr>
+          <p:cNvPr id="5" name="Rectangle 4"/>
+          <p:cNvSpPr/>
+          <p:nvPr/>
+        </p:nvSpPr>
+        <p:spPr>
+          <a:xfrm>
+            <a:off x="685800" y="1600200"/>
+            <a:ext cx="777240" cy="73152"/>
+          </a:xfrm>
+          <a:prstGeom prst="rect">
+            <a:avLst/>
+          </a:prstGeom>
           <a:solidFill>
-            <a:srgbClr val="D87014"/>
+            <a:srgbClr val="E87722"/>
           </a:solidFill>
           <a:ln>
             <a:noFill/>
           </a:ln>
-          <a:effectLst/>
         </p:spPr>
         <p:style>
           <a:lnRef idx="1">
@@ -3201,25 +3254,97 @@
       </p:sp>
       <p:sp>
         <p:nvSpPr>
-          <p:cNvPr id="4" name="Rectangle 3"/>
-          <p:cNvSpPr/>
-          <p:nvPr/>
-        </p:nvSpPr>
-        <p:spPr>
-          <a:xfrm>
-            <a:off x="685800" y="5419725"/>
-            <a:ext cx="10820400" cy="9525"/>
+          <p:cNvPr id="6" name="TextBox 5"/>
+          <p:cNvSpPr txBox="1"/>
+          <p:nvPr/>
+        </p:nvSpPr>
+        <p:spPr>
+          <a:xfrm>
+            <a:off x="685800" y="1874519"/>
+            <a:ext cx="10789920" cy="1645920"/>
           </a:xfrm>
           <a:prstGeom prst="rect">
             <a:avLst/>
           </a:prstGeom>
+          <a:noFill/>
+        </p:spPr>
+        <p:txBody>
+          <a:bodyPr wrap="square">
+            <a:spAutoFit/>
+          </a:bodyPr>
+          <a:lstStyle/>
+          <a:p>
+            <a:r>
+              <a:rPr sz="2900" b="1">
+                <a:solidFill>
+                  <a:srgbClr val="FFFFFF"/>
+                </a:solidFill>
+                <a:latin typeface="Segoe UI"/>
+              </a:rPr>
+              <a:t>Plataforma Integral de Analítica Ambiental Big Data:
+Procesamiento Batch y Streaming con Apache Spark y Apache Kafka</a:t>
+            </a:r>
+          </a:p>
+        </p:txBody>
+      </p:sp>
+      <p:sp>
+        <p:nvSpPr>
+          <p:cNvPr id="7" name="TextBox 6"/>
+          <p:cNvSpPr txBox="1"/>
+          <p:nvPr/>
+        </p:nvSpPr>
+        <p:spPr>
+          <a:xfrm>
+            <a:off x="685800" y="3886200"/>
+            <a:ext cx="9601200" cy="640080"/>
+          </a:xfrm>
+          <a:prstGeom prst="rect">
+            <a:avLst/>
+          </a:prstGeom>
+          <a:noFill/>
+        </p:spPr>
+        <p:txBody>
+          <a:bodyPr wrap="square">
+            <a:spAutoFit/>
+          </a:bodyPr>
+          <a:lstStyle/>
+          <a:p>
+            <a:r>
+              <a:rPr sz="1500">
+                <a:solidFill>
+                  <a:srgbClr val="CBD5E1"/>
+                </a:solidFill>
+                <a:latin typeface="Segoe UI"/>
+              </a:rPr>
+              <a:t>Arquitectura distribuida en memoria y flujo de eventos en tiempo real para el monitoreo de calidad del aire y correlación meteorológica en Colombia (SISAIRE – 60.000 registros)</a:t>
+            </a:r>
+          </a:p>
+        </p:txBody>
+      </p:sp>
+      <p:sp>
+        <p:nvSpPr>
+          <p:cNvPr id="8" name="Rounded Rectangle 7"/>
+          <p:cNvSpPr/>
+          <p:nvPr/>
+        </p:nvSpPr>
+        <p:spPr>
+          <a:xfrm>
+            <a:off x="685800" y="5166360"/>
+            <a:ext cx="10817352" cy="1143000"/>
+          </a:xfrm>
+          <a:prstGeom prst="roundRect">
+            <a:avLst>
+              <a:gd name="adj" fmla="val 3000"/>
+            </a:avLst>
+          </a:prstGeom>
           <a:solidFill>
-            <a:srgbClr val="1E3A8A"/>
+            <a:srgbClr val="062C5E"/>
           </a:solidFill>
-          <a:ln>
-            <a:noFill/>
+          <a:ln w="12700">
+            <a:solidFill>
+              <a:srgbClr val="1E4976"/>
+            </a:solidFill>
           </a:ln>
-          <a:effectLst/>
         </p:spPr>
         <p:style>
           <a:lnRef idx="1">
@@ -3245,14 +3370,14 @@
       </p:sp>
       <p:sp>
         <p:nvSpPr>
-          <p:cNvPr id="5" name="TextBox 4"/>
+          <p:cNvPr id="9" name="TextBox 8"/>
           <p:cNvSpPr txBox="1"/>
           <p:nvPr/>
         </p:nvSpPr>
         <p:spPr>
           <a:xfrm>
-            <a:off x="685800" y="533400"/>
-            <a:ext cx="6572250" cy="200025"/>
+            <a:off x="868680" y="5303520"/>
+            <a:ext cx="3657600" cy="868680"/>
           </a:xfrm>
           <a:prstGeom prst="rect">
             <a:avLst/>
@@ -3260,21 +3385,330 @@
           <a:noFill/>
         </p:spPr>
         <p:txBody>
-          <a:bodyPr wrap="none" lIns="0" rIns="0" tIns="0" bIns="0" anchor="t">
+          <a:bodyPr wrap="square">
             <a:spAutoFit/>
           </a:bodyPr>
           <a:lstStyle/>
           <a:p>
-            <a:pPr algn="l"/>
-            <a:r>
-              <a:rPr b="1" sz="1200" i="0" u="none">
-                <a:solidFill>
-                  <a:srgbClr val="D87014"/>
-                </a:solidFill>
-                <a:latin typeface="DM Sans"/>
-              </a:rPr>
-              <a:t>UNAD · ECBTI · CURSO BIG DATA (202016911) · OCTUBRE 2026</a:t>
-            </a:r>
+            <a:r>
+              <a:rPr sz="950" b="1">
+                <a:solidFill>
+                  <a:srgbClr val="F2A900"/>
+                </a:solidFill>
+                <a:latin typeface="Segoe UI"/>
+              </a:rPr>
+              <a:t>ESTUDIANTE</a:t>
+            </a:r>
+          </a:p>
+          <a:p>
+            <a:r>
+              <a:rPr sz="1350" b="1">
+                <a:solidFill>
+                  <a:srgbClr val="FFFFFF"/>
+                </a:solidFill>
+                <a:latin typeface="Segoe UI"/>
+              </a:rPr>
+              <a:t>Paulo Andrés De los Reyes González</a:t>
+            </a:r>
+          </a:p>
+          <a:p>
+            <a:r>
+              <a:rPr sz="1050">
+                <a:solidFill>
+                  <a:srgbClr val="94A3B8"/>
+                </a:solidFill>
+                <a:latin typeface="Segoe UI"/>
+              </a:rPr>
+              <a:t>C.C. 1143451533 · Grupo 16</a:t>
+            </a:r>
+          </a:p>
+        </p:txBody>
+      </p:sp>
+      <p:sp>
+        <p:nvSpPr>
+          <p:cNvPr id="10" name="TextBox 9"/>
+          <p:cNvSpPr txBox="1"/>
+          <p:nvPr/>
+        </p:nvSpPr>
+        <p:spPr>
+          <a:xfrm>
+            <a:off x="4617720" y="5303520"/>
+            <a:ext cx="3931920" cy="868680"/>
+          </a:xfrm>
+          <a:prstGeom prst="rect">
+            <a:avLst/>
+          </a:prstGeom>
+          <a:noFill/>
+        </p:spPr>
+        <p:txBody>
+          <a:bodyPr wrap="square">
+            <a:spAutoFit/>
+          </a:bodyPr>
+          <a:lstStyle/>
+          <a:p>
+            <a:r>
+              <a:rPr sz="950" b="1">
+                <a:solidFill>
+                  <a:srgbClr val="F2A900"/>
+                </a:solidFill>
+                <a:latin typeface="Segoe UI"/>
+              </a:rPr>
+              <a:t>PROGRAMA ACADÉMICO</a:t>
+            </a:r>
+          </a:p>
+          <a:p>
+            <a:r>
+              <a:rPr sz="1350" b="1">
+                <a:solidFill>
+                  <a:srgbClr val="FFFFFF"/>
+                </a:solidFill>
+                <a:latin typeface="Segoe UI"/>
+              </a:rPr>
+              <a:t>Ingeniería de Sistemas</a:t>
+            </a:r>
+          </a:p>
+          <a:p>
+            <a:r>
+              <a:rPr sz="1050">
+                <a:solidFill>
+                  <a:srgbClr val="94A3B8"/>
+                </a:solidFill>
+                <a:latin typeface="Segoe UI"/>
+              </a:rPr>
+              <a:t>Escuela de Ciencias Básicas, Tecnología e Ingeniería (ECBTI)</a:t>
+            </a:r>
+          </a:p>
+        </p:txBody>
+      </p:sp>
+      <p:sp>
+        <p:nvSpPr>
+          <p:cNvPr id="11" name="TextBox 10"/>
+          <p:cNvSpPr txBox="1"/>
+          <p:nvPr/>
+        </p:nvSpPr>
+        <p:spPr>
+          <a:xfrm>
+            <a:off x="8641080" y="5303520"/>
+            <a:ext cx="2743200" cy="868680"/>
+          </a:xfrm>
+          <a:prstGeom prst="rect">
+            <a:avLst/>
+          </a:prstGeom>
+          <a:noFill/>
+        </p:spPr>
+        <p:txBody>
+          <a:bodyPr wrap="square">
+            <a:spAutoFit/>
+          </a:bodyPr>
+          <a:lstStyle/>
+          <a:p>
+            <a:r>
+              <a:rPr sz="950" b="1">
+                <a:solidFill>
+                  <a:srgbClr val="F2A900"/>
+                </a:solidFill>
+                <a:latin typeface="Segoe UI"/>
+              </a:rPr>
+              <a:t>TUTOR DEL CURSO</a:t>
+            </a:r>
+          </a:p>
+          <a:p>
+            <a:r>
+              <a:rPr sz="1350" b="1">
+                <a:solidFill>
+                  <a:srgbClr val="FFFFFF"/>
+                </a:solidFill>
+                <a:latin typeface="Segoe UI"/>
+              </a:rPr>
+              <a:t>Ing. Fidias Rafael Barros</a:t>
+            </a:r>
+          </a:p>
+          <a:p>
+            <a:r>
+              <a:rPr sz="1050">
+                <a:solidFill>
+                  <a:srgbClr val="94A3B8"/>
+                </a:solidFill>
+                <a:latin typeface="Segoe UI"/>
+              </a:rPr>
+              <a:t>Universidad Nacional Abierta y a Distancia (UNAD)</a:t>
+            </a:r>
+          </a:p>
+        </p:txBody>
+      </p:sp>
+    </p:spTree>
+  </p:cSld>
+  <p:clrMapOvr>
+    <a:masterClrMapping/>
+  </p:clrMapOvr>
+</p:sld>
+</file>
+
+<file path=ppt/slides/slide10.xml><?xml version="1.0" encoding="utf-8"?>
+<p:sld xmlns:a="http://schemas.openxmlformats.org/drawingml/2006/main" xmlns:p="http://schemas.openxmlformats.org/presentationml/2006/main" xmlns:r="http://schemas.openxmlformats.org/officeDocument/2006/relationships">
+  <p:cSld>
+    <p:spTree>
+      <p:nvGrpSpPr>
+        <p:cNvPr id="1" name=""/>
+        <p:cNvGrpSpPr/>
+        <p:nvPr/>
+      </p:nvGrpSpPr>
+      <p:grpSpPr/>
+      <p:sp>
+        <p:nvSpPr>
+          <p:cNvPr id="2" name="Rectangle 1"/>
+          <p:cNvSpPr/>
+          <p:nvPr/>
+        </p:nvSpPr>
+        <p:spPr>
+          <a:xfrm>
+            <a:off x="0" y="0"/>
+            <a:ext cx="12191695" cy="6858000"/>
+          </a:xfrm>
+          <a:prstGeom prst="rect">
+            <a:avLst/>
+          </a:prstGeom>
+          <a:solidFill>
+            <a:srgbClr val="00204A"/>
+          </a:solidFill>
+          <a:ln>
+            <a:noFill/>
+          </a:ln>
+        </p:spPr>
+        <p:style>
+          <a:lnRef idx="1">
+            <a:schemeClr val="accent1"/>
+          </a:lnRef>
+          <a:fillRef idx="3">
+            <a:schemeClr val="accent1"/>
+          </a:fillRef>
+          <a:effectRef idx="2">
+            <a:schemeClr val="accent1"/>
+          </a:effectRef>
+          <a:fontRef idx="minor">
+            <a:schemeClr val="lt1"/>
+          </a:fontRef>
+        </p:style>
+        <p:txBody>
+          <a:bodyPr rtlCol="0" anchor="ctr"/>
+          <a:lstStyle/>
+          <a:p>
+            <a:pPr algn="ctr"/>
+          </a:p>
+        </p:txBody>
+      </p:sp>
+      <p:sp>
+        <p:nvSpPr>
+          <p:cNvPr id="3" name="TextBox 2"/>
+          <p:cNvSpPr txBox="1"/>
+          <p:nvPr/>
+        </p:nvSpPr>
+        <p:spPr>
+          <a:xfrm>
+            <a:off x="548640" y="320040"/>
+            <a:ext cx="11064240" cy="256032"/>
+          </a:xfrm>
+          <a:prstGeom prst="rect">
+            <a:avLst/>
+          </a:prstGeom>
+          <a:noFill/>
+        </p:spPr>
+        <p:txBody>
+          <a:bodyPr wrap="square" lIns="0" tIns="0" rIns="0" bIns="0">
+            <a:spAutoFit/>
+          </a:bodyPr>
+          <a:lstStyle/>
+          <a:p>
+            <a:r>
+              <a:rPr sz="1050" b="1">
+                <a:solidFill>
+                  <a:srgbClr val="F2A900"/>
+                </a:solidFill>
+                <a:latin typeface="Segoe UI"/>
+              </a:rPr>
+              <a:t>09 · CIERRE, CONCLUSIONES Y ENTREGABLES VERIFICABLES</a:t>
+            </a:r>
+          </a:p>
+        </p:txBody>
+      </p:sp>
+      <p:sp>
+        <p:nvSpPr>
+          <p:cNvPr id="4" name="TextBox 3"/>
+          <p:cNvSpPr txBox="1"/>
+          <p:nvPr/>
+        </p:nvSpPr>
+        <p:spPr>
+          <a:xfrm>
+            <a:off x="548640" y="548640"/>
+            <a:ext cx="11091672" cy="438912"/>
+          </a:xfrm>
+          <a:prstGeom prst="rect">
+            <a:avLst/>
+          </a:prstGeom>
+          <a:noFill/>
+        </p:spPr>
+        <p:txBody>
+          <a:bodyPr wrap="square" lIns="0" tIns="0" rIns="0" bIns="0">
+            <a:spAutoFit/>
+          </a:bodyPr>
+          <a:lstStyle/>
+          <a:p>
+            <a:r>
+              <a:rPr sz="2100" b="1">
+                <a:solidFill>
+                  <a:srgbClr val="FFFFFF"/>
+                </a:solidFill>
+                <a:latin typeface="Segoe UI"/>
+              </a:rPr>
+              <a:t>Conclusiones Generales del Proyecto, Repositorio Git y Video Explicativo</a:t>
+            </a:r>
+          </a:p>
+        </p:txBody>
+      </p:sp>
+      <p:sp>
+        <p:nvSpPr>
+          <p:cNvPr id="5" name="Rounded Rectangle 4"/>
+          <p:cNvSpPr/>
+          <p:nvPr/>
+        </p:nvSpPr>
+        <p:spPr>
+          <a:xfrm>
+            <a:off x="548640" y="1234440"/>
+            <a:ext cx="3575304" cy="1600200"/>
+          </a:xfrm>
+          <a:prstGeom prst="roundRect">
+            <a:avLst>
+              <a:gd name="adj" fmla="val 3000"/>
+            </a:avLst>
+          </a:prstGeom>
+          <a:solidFill>
+            <a:srgbClr val="062C5E"/>
+          </a:solidFill>
+          <a:ln w="12700">
+            <a:solidFill>
+              <a:srgbClr val="1E4976"/>
+            </a:solidFill>
+          </a:ln>
+        </p:spPr>
+        <p:style>
+          <a:lnRef idx="1">
+            <a:schemeClr val="accent1"/>
+          </a:lnRef>
+          <a:fillRef idx="3">
+            <a:schemeClr val="accent1"/>
+          </a:fillRef>
+          <a:effectRef idx="2">
+            <a:schemeClr val="accent1"/>
+          </a:effectRef>
+          <a:fontRef idx="minor">
+            <a:schemeClr val="lt1"/>
+          </a:fontRef>
+        </p:style>
+        <p:txBody>
+          <a:bodyPr rtlCol="0" anchor="ctr"/>
+          <a:lstStyle/>
+          <a:p>
+            <a:pPr algn="ctr"/>
           </a:p>
         </p:txBody>
       </p:sp>
@@ -3286,8 +3720,8 @@
         </p:nvSpPr>
         <p:spPr>
           <a:xfrm>
-            <a:off x="10182225" y="533400"/>
-            <a:ext cx="1654968" cy="200025"/>
+            <a:off x="713232" y="1325880"/>
+            <a:ext cx="3246120" cy="1417320"/>
           </a:xfrm>
           <a:prstGeom prst="rect">
             <a:avLst/>
@@ -3295,34 +3729,96 @@
           <a:noFill/>
         </p:spPr>
         <p:txBody>
-          <a:bodyPr wrap="none" lIns="0" rIns="0" tIns="0" bIns="0" anchor="t">
+          <a:bodyPr wrap="square">
             <a:spAutoFit/>
           </a:bodyPr>
           <a:lstStyle/>
           <a:p>
-            <a:pPr algn="l"/>
-            <a:r>
-              <a:rPr b="1" sz="1200" i="0" u="none">
+            <a:r>
+              <a:rPr sz="1300" b="1">
+                <a:solidFill>
+                  <a:srgbClr val="F2A900"/>
+                </a:solidFill>
+                <a:latin typeface="Segoe UI"/>
+              </a:rPr>
+              <a:t>1 · Superioridad In-Memory</a:t>
+            </a:r>
+          </a:p>
+          <a:p>
+            <a:pPr>
+              <a:spcBef>
+                <a:spcPts val="500"/>
+              </a:spcBef>
+            </a:pPr>
+            <a:r>
+              <a:rPr sz="1050">
                 <a:solidFill>
                   <a:srgbClr val="FFFFFF"/>
                 </a:solidFill>
-                <a:latin typeface="DM Sans"/>
-              </a:rPr>
-              <a:t>Tarea 3 · Grupo 16</a:t>
-            </a:r>
-          </a:p>
-        </p:txBody>
-      </p:sp>
-      <p:sp>
-        <p:nvSpPr>
-          <p:cNvPr id="7" name="TextBox 6"/>
+                <a:latin typeface="Segoe UI"/>
+              </a:rPr>
+              <a:t>Apache Spark supera el cuello de botella I/O en disco de Hadoop MapReduce, procesando 60.000 registros ambientales en segundos mediante memoria RAM.</a:t>
+            </a:r>
+          </a:p>
+        </p:txBody>
+      </p:sp>
+      <p:sp>
+        <p:nvSpPr>
+          <p:cNvPr id="7" name="Rounded Rectangle 6"/>
+          <p:cNvSpPr/>
+          <p:nvPr/>
+        </p:nvSpPr>
+        <p:spPr>
+          <a:xfrm>
+            <a:off x="4306824" y="1234440"/>
+            <a:ext cx="3575304" cy="1600200"/>
+          </a:xfrm>
+          <a:prstGeom prst="roundRect">
+            <a:avLst>
+              <a:gd name="adj" fmla="val 3000"/>
+            </a:avLst>
+          </a:prstGeom>
+          <a:solidFill>
+            <a:srgbClr val="062C5E"/>
+          </a:solidFill>
+          <a:ln w="12700">
+            <a:solidFill>
+              <a:srgbClr val="1E4976"/>
+            </a:solidFill>
+          </a:ln>
+        </p:spPr>
+        <p:style>
+          <a:lnRef idx="1">
+            <a:schemeClr val="accent1"/>
+          </a:lnRef>
+          <a:fillRef idx="3">
+            <a:schemeClr val="accent1"/>
+          </a:fillRef>
+          <a:effectRef idx="2">
+            <a:schemeClr val="accent1"/>
+          </a:effectRef>
+          <a:fontRef idx="minor">
+            <a:schemeClr val="lt1"/>
+          </a:fontRef>
+        </p:style>
+        <p:txBody>
+          <a:bodyPr rtlCol="0" anchor="ctr"/>
+          <a:lstStyle/>
+          <a:p>
+            <a:pPr algn="ctr"/>
+          </a:p>
+        </p:txBody>
+      </p:sp>
+      <p:sp>
+        <p:nvSpPr>
+          <p:cNvPr id="8" name="TextBox 7"/>
           <p:cNvSpPr txBox="1"/>
           <p:nvPr/>
         </p:nvSpPr>
         <p:spPr>
           <a:xfrm>
-            <a:off x="685800" y="2047875"/>
-            <a:ext cx="10701337" cy="1600200"/>
+            <a:off x="4471416" y="1325880"/>
+            <a:ext cx="3246120" cy="1417320"/>
           </a:xfrm>
           <a:prstGeom prst="rect">
             <a:avLst/>
@@ -3330,38 +3826,96 @@
           <a:noFill/>
         </p:spPr>
         <p:txBody>
-          <a:bodyPr wrap="square" lIns="0" rIns="0" tIns="0" bIns="0" anchor="t">
+          <a:bodyPr wrap="square">
             <a:spAutoFit/>
           </a:bodyPr>
           <a:lstStyle/>
           <a:p>
-            <a:pPr algn="l">
-              <a:lnSpc>
-                <a:spcPts val="4200"/>
-              </a:lnSpc>
+            <a:r>
+              <a:rPr sz="1300" b="1">
+                <a:solidFill>
+                  <a:srgbClr val="F2A900"/>
+                </a:solidFill>
+                <a:latin typeface="Segoe UI"/>
+              </a:rPr>
+              <a:t>2 · Optimización Catalyst</a:t>
+            </a:r>
+          </a:p>
+          <a:p>
+            <a:pPr>
+              <a:spcBef>
+                <a:spcPts val="500"/>
+              </a:spcBef>
             </a:pPr>
             <a:r>
-              <a:rPr b="1" sz="3750" i="0" u="none">
+              <a:rPr sz="1050">
                 <a:solidFill>
                   <a:srgbClr val="FFFFFF"/>
                 </a:solidFill>
-                <a:latin typeface="Space Grotesk"/>
-              </a:rPr>
-              <a:t>Plataforma Integral de Analítica Ambiental Big Data: Procesamiento Batch y Streaming con Apache Spark y Apache Kafka</a:t>
-            </a:r>
-          </a:p>
-        </p:txBody>
-      </p:sp>
-      <p:sp>
-        <p:nvSpPr>
-          <p:cNvPr id="8" name="TextBox 7"/>
+                <a:latin typeface="Segoe UI"/>
+              </a:rPr>
+              <a:t>El uso de DataFrames y Spark SQL demostró mayor eficiencia que los RDDs manuales gracias al reordenamiento lógico de consultas y gestión Off-Heap de Tungsten.</a:t>
+            </a:r>
+          </a:p>
+        </p:txBody>
+      </p:sp>
+      <p:sp>
+        <p:nvSpPr>
+          <p:cNvPr id="9" name="Rounded Rectangle 8"/>
+          <p:cNvSpPr/>
+          <p:nvPr/>
+        </p:nvSpPr>
+        <p:spPr>
+          <a:xfrm>
+            <a:off x="8065008" y="1234440"/>
+            <a:ext cx="3575304" cy="1600200"/>
+          </a:xfrm>
+          <a:prstGeom prst="roundRect">
+            <a:avLst>
+              <a:gd name="adj" fmla="val 3000"/>
+            </a:avLst>
+          </a:prstGeom>
+          <a:solidFill>
+            <a:srgbClr val="062C5E"/>
+          </a:solidFill>
+          <a:ln w="12700">
+            <a:solidFill>
+              <a:srgbClr val="1E4976"/>
+            </a:solidFill>
+          </a:ln>
+        </p:spPr>
+        <p:style>
+          <a:lnRef idx="1">
+            <a:schemeClr val="accent1"/>
+          </a:lnRef>
+          <a:fillRef idx="3">
+            <a:schemeClr val="accent1"/>
+          </a:fillRef>
+          <a:effectRef idx="2">
+            <a:schemeClr val="accent1"/>
+          </a:effectRef>
+          <a:fontRef idx="minor">
+            <a:schemeClr val="lt1"/>
+          </a:fontRef>
+        </p:style>
+        <p:txBody>
+          <a:bodyPr rtlCol="0" anchor="ctr"/>
+          <a:lstStyle/>
+          <a:p>
+            <a:pPr algn="ctr"/>
+          </a:p>
+        </p:txBody>
+      </p:sp>
+      <p:sp>
+        <p:nvSpPr>
+          <p:cNvPr id="10" name="TextBox 9"/>
           <p:cNvSpPr txBox="1"/>
           <p:nvPr/>
         </p:nvSpPr>
         <p:spPr>
           <a:xfrm>
-            <a:off x="685800" y="3876675"/>
-            <a:ext cx="8191500" cy="552450"/>
+            <a:off x="8229600" y="1325880"/>
+            <a:ext cx="3246120" cy="1417320"/>
           </a:xfrm>
           <a:prstGeom prst="rect">
             <a:avLst/>
@@ -3369,34 +3923,96 @@
           <a:noFill/>
         </p:spPr>
         <p:txBody>
-          <a:bodyPr wrap="square" lIns="0" rIns="0" tIns="0" bIns="0" anchor="t">
+          <a:bodyPr wrap="square">
             <a:spAutoFit/>
           </a:bodyPr>
           <a:lstStyle/>
           <a:p>
-            <a:pPr algn="l"/>
-            <a:r>
-              <a:rPr b="0" sz="1650" i="0" u="none">
-                <a:solidFill>
-                  <a:srgbClr val="CBD5E1"/>
-                </a:solidFill>
-                <a:latin typeface="DM Sans"/>
-              </a:rPr>
-              <a:t>Arquitectura distribuida para el monitoreo de calidad del aire y correlación meteorológica en Colombia</a:t>
-            </a:r>
-          </a:p>
-        </p:txBody>
-      </p:sp>
-      <p:sp>
-        <p:nvSpPr>
-          <p:cNvPr id="9" name="TextBox 8"/>
+            <a:r>
+              <a:rPr sz="1300" b="1">
+                <a:solidFill>
+                  <a:srgbClr val="F2A900"/>
+                </a:solidFill>
+                <a:latin typeface="Segoe UI"/>
+              </a:rPr>
+              <a:t>3 · Hallazgo Ambiental</a:t>
+            </a:r>
+          </a:p>
+          <a:p>
+            <a:pPr>
+              <a:spcBef>
+                <a:spcPts val="500"/>
+              </a:spcBef>
+            </a:pPr>
+            <a:r>
+              <a:rPr sz="1050">
+                <a:solidFill>
+                  <a:srgbClr val="FFFFFF"/>
+                </a:solidFill>
+                <a:latin typeface="Segoe UI"/>
+              </a:rPr>
+              <a:t>Se comprobó empíricamente que la inversión térmica (bajas temperaturas + humedad &gt;75%) eleva críticamente la concentración de PM2.5 en zonas urbanas.</a:t>
+            </a:r>
+          </a:p>
+        </p:txBody>
+      </p:sp>
+      <p:sp>
+        <p:nvSpPr>
+          <p:cNvPr id="11" name="Rounded Rectangle 10"/>
+          <p:cNvSpPr/>
+          <p:nvPr/>
+        </p:nvSpPr>
+        <p:spPr>
+          <a:xfrm>
+            <a:off x="548640" y="2999232"/>
+            <a:ext cx="5449824" cy="1417320"/>
+          </a:xfrm>
+          <a:prstGeom prst="roundRect">
+            <a:avLst>
+              <a:gd name="adj" fmla="val 3000"/>
+            </a:avLst>
+          </a:prstGeom>
+          <a:solidFill>
+            <a:srgbClr val="062C5E"/>
+          </a:solidFill>
+          <a:ln w="12700">
+            <a:solidFill>
+              <a:srgbClr val="1E4976"/>
+            </a:solidFill>
+          </a:ln>
+        </p:spPr>
+        <p:style>
+          <a:lnRef idx="1">
+            <a:schemeClr val="accent1"/>
+          </a:lnRef>
+          <a:fillRef idx="3">
+            <a:schemeClr val="accent1"/>
+          </a:fillRef>
+          <a:effectRef idx="2">
+            <a:schemeClr val="accent1"/>
+          </a:effectRef>
+          <a:fontRef idx="minor">
+            <a:schemeClr val="lt1"/>
+          </a:fontRef>
+        </p:style>
+        <p:txBody>
+          <a:bodyPr rtlCol="0" anchor="ctr"/>
+          <a:lstStyle/>
+          <a:p>
+            <a:pPr algn="ctr"/>
+          </a:p>
+        </p:txBody>
+      </p:sp>
+      <p:sp>
+        <p:nvSpPr>
+          <p:cNvPr id="12" name="TextBox 11"/>
           <p:cNvSpPr txBox="1"/>
           <p:nvPr/>
         </p:nvSpPr>
         <p:spPr>
           <a:xfrm>
-            <a:off x="685800" y="5695950"/>
-            <a:ext cx="3750468" cy="171450"/>
+            <a:off x="731520" y="3090672"/>
+            <a:ext cx="5084064" cy="1234440"/>
           </a:xfrm>
           <a:prstGeom prst="rect">
             <a:avLst/>
@@ -3404,34 +4020,96 @@
           <a:noFill/>
         </p:spPr>
         <p:txBody>
-          <a:bodyPr wrap="none" lIns="0" rIns="0" tIns="0" bIns="0" anchor="t">
+          <a:bodyPr wrap="square">
             <a:spAutoFit/>
           </a:bodyPr>
           <a:lstStyle/>
           <a:p>
-            <a:pPr algn="l"/>
-            <a:r>
-              <a:rPr b="1" sz="1050" i="0" u="none">
-                <a:solidFill>
-                  <a:srgbClr val="D87014"/>
-                </a:solidFill>
-                <a:latin typeface="DM Sans"/>
-              </a:rPr>
-              <a:t>ESTUDIANTE</a:t>
-            </a:r>
-          </a:p>
-        </p:txBody>
-      </p:sp>
-      <p:sp>
-        <p:nvSpPr>
-          <p:cNvPr id="10" name="TextBox 9"/>
+            <a:r>
+              <a:rPr sz="1300" b="1">
+                <a:solidFill>
+                  <a:srgbClr val="F2A900"/>
+                </a:solidFill>
+                <a:latin typeface="Segoe UI"/>
+              </a:rPr>
+              <a:t>4 · Desacoplamiento con Kafka</a:t>
+            </a:r>
+          </a:p>
+          <a:p>
+            <a:pPr>
+              <a:spcBef>
+                <a:spcPts val="500"/>
+              </a:spcBef>
+            </a:pPr>
+            <a:r>
+              <a:rPr sz="1080">
+                <a:solidFill>
+                  <a:srgbClr val="FFFFFF"/>
+                </a:solidFill>
+                <a:latin typeface="Segoe UI"/>
+              </a:rPr>
+              <a:t>Apache Kafka actúa como amortiguador elástico de telemetría IoT, garantizando persistencia y tolerancia a fallos mediante topics particionados.</a:t>
+            </a:r>
+          </a:p>
+        </p:txBody>
+      </p:sp>
+      <p:sp>
+        <p:nvSpPr>
+          <p:cNvPr id="13" name="Rounded Rectangle 12"/>
+          <p:cNvSpPr/>
+          <p:nvPr/>
+        </p:nvSpPr>
+        <p:spPr>
+          <a:xfrm>
+            <a:off x="6190488" y="2999232"/>
+            <a:ext cx="5449824" cy="1417320"/>
+          </a:xfrm>
+          <a:prstGeom prst="roundRect">
+            <a:avLst>
+              <a:gd name="adj" fmla="val 3000"/>
+            </a:avLst>
+          </a:prstGeom>
+          <a:solidFill>
+            <a:srgbClr val="062C5E"/>
+          </a:solidFill>
+          <a:ln w="12700">
+            <a:solidFill>
+              <a:srgbClr val="1E4976"/>
+            </a:solidFill>
+          </a:ln>
+        </p:spPr>
+        <p:style>
+          <a:lnRef idx="1">
+            <a:schemeClr val="accent1"/>
+          </a:lnRef>
+          <a:fillRef idx="3">
+            <a:schemeClr val="accent1"/>
+          </a:fillRef>
+          <a:effectRef idx="2">
+            <a:schemeClr val="accent1"/>
+          </a:effectRef>
+          <a:fontRef idx="minor">
+            <a:schemeClr val="lt1"/>
+          </a:fontRef>
+        </p:style>
+        <p:txBody>
+          <a:bodyPr rtlCol="0" anchor="ctr"/>
+          <a:lstStyle/>
+          <a:p>
+            <a:pPr algn="ctr"/>
+          </a:p>
+        </p:txBody>
+      </p:sp>
+      <p:sp>
+        <p:nvSpPr>
+          <p:cNvPr id="14" name="TextBox 13"/>
           <p:cNvSpPr txBox="1"/>
           <p:nvPr/>
         </p:nvSpPr>
         <p:spPr>
           <a:xfrm>
-            <a:off x="685800" y="5905500"/>
-            <a:ext cx="3750468" cy="228600"/>
+            <a:off x="6373368" y="3090672"/>
+            <a:ext cx="5084064" cy="1234440"/>
           </a:xfrm>
           <a:prstGeom prst="rect">
             <a:avLst/>
@@ -3439,34 +4117,94 @@
           <a:noFill/>
         </p:spPr>
         <p:txBody>
-          <a:bodyPr wrap="none" lIns="0" rIns="0" tIns="0" bIns="0" anchor="t">
+          <a:bodyPr wrap="square">
             <a:spAutoFit/>
           </a:bodyPr>
           <a:lstStyle/>
           <a:p>
-            <a:pPr algn="l"/>
-            <a:r>
-              <a:rPr b="1" sz="1350" i="0" u="none">
+            <a:r>
+              <a:rPr sz="1300" b="1">
+                <a:solidFill>
+                  <a:srgbClr val="F2A900"/>
+                </a:solidFill>
+                <a:latin typeface="Segoe UI"/>
+              </a:rPr>
+              <a:t>5 · Analítica en Ventanas</a:t>
+            </a:r>
+          </a:p>
+          <a:p>
+            <a:pPr>
+              <a:spcBef>
+                <a:spcPts val="500"/>
+              </a:spcBef>
+            </a:pPr>
+            <a:r>
+              <a:rPr sz="1080">
                 <a:solidFill>
                   <a:srgbClr val="FFFFFF"/>
                 </a:solidFill>
-                <a:latin typeface="DM Sans"/>
-              </a:rPr>
-              <a:t>Paulo Andrés De los Reyes González</a:t>
-            </a:r>
-          </a:p>
-        </p:txBody>
-      </p:sp>
-      <p:sp>
-        <p:nvSpPr>
-          <p:cNvPr id="11" name="TextBox 10"/>
+                <a:latin typeface="Segoe UI"/>
+              </a:rPr>
+              <a:t>Spark Structured Streaming permitió consolidar promedios térmicos y de humedad en ventanas de 1 minuto con latencia sub-segundo y monitoreo en el puerto :4040.</a:t>
+            </a:r>
+          </a:p>
+        </p:txBody>
+      </p:sp>
+      <p:sp>
+        <p:nvSpPr>
+          <p:cNvPr id="15" name="Rounded Rectangle 14"/>
+          <p:cNvSpPr/>
+          <p:nvPr/>
+        </p:nvSpPr>
+        <p:spPr>
+          <a:xfrm>
+            <a:off x="548640" y="4645152"/>
+            <a:ext cx="11091672" cy="1783080"/>
+          </a:xfrm>
+          <a:prstGeom prst="roundRect">
+            <a:avLst>
+              <a:gd name="adj" fmla="val 3000"/>
+            </a:avLst>
+          </a:prstGeom>
+          <a:solidFill>
+            <a:srgbClr val="FFFFFF"/>
+          </a:solidFill>
+          <a:ln>
+            <a:noFill/>
+          </a:ln>
+        </p:spPr>
+        <p:style>
+          <a:lnRef idx="1">
+            <a:schemeClr val="accent1"/>
+          </a:lnRef>
+          <a:fillRef idx="3">
+            <a:schemeClr val="accent1"/>
+          </a:fillRef>
+          <a:effectRef idx="2">
+            <a:schemeClr val="accent1"/>
+          </a:effectRef>
+          <a:fontRef idx="minor">
+            <a:schemeClr val="lt1"/>
+          </a:fontRef>
+        </p:style>
+        <p:txBody>
+          <a:bodyPr rtlCol="0" anchor="ctr"/>
+          <a:lstStyle/>
+          <a:p>
+            <a:pPr algn="ctr"/>
+          </a:p>
+        </p:txBody>
+      </p:sp>
+      <p:sp>
+        <p:nvSpPr>
+          <p:cNvPr id="16" name="TextBox 15"/>
           <p:cNvSpPr txBox="1"/>
           <p:nvPr/>
         </p:nvSpPr>
         <p:spPr>
           <a:xfrm>
-            <a:off x="685800" y="6134100"/>
-            <a:ext cx="3750468" cy="190500"/>
+            <a:off x="822960" y="4754880"/>
+            <a:ext cx="7680960" cy="1554480"/>
           </a:xfrm>
           <a:prstGeom prst="rect">
             <a:avLst/>
@@ -3474,34 +4212,71 @@
           <a:noFill/>
         </p:spPr>
         <p:txBody>
-          <a:bodyPr wrap="none" lIns="0" rIns="0" tIns="0" bIns="0" anchor="t">
+          <a:bodyPr wrap="square">
             <a:spAutoFit/>
           </a:bodyPr>
           <a:lstStyle/>
           <a:p>
-            <a:pPr algn="l"/>
-            <a:r>
-              <a:rPr b="0" sz="1125" i="0" u="none">
-                <a:solidFill>
-                  <a:srgbClr val="94A3B8"/>
-                </a:solidFill>
-                <a:latin typeface="DM Sans"/>
-              </a:rPr>
-              <a:t>C.C. 1143451533</a:t>
-            </a:r>
-          </a:p>
-        </p:txBody>
-      </p:sp>
-      <p:sp>
-        <p:nvSpPr>
-          <p:cNvPr id="12" name="TextBox 11"/>
+            <a:r>
+              <a:rPr sz="1050" b="1">
+                <a:solidFill>
+                  <a:srgbClr val="E87722"/>
+                </a:solidFill>
+                <a:latin typeface="Segoe UI"/>
+              </a:rPr>
+              <a:t>📦 REPOSITORIO OFICIAL DE CÓDIGO FUENTE (GITHUB)</a:t>
+            </a:r>
+          </a:p>
+          <a:p>
+            <a:r>
+              <a:rPr sz="1400" b="1">
+                <a:solidFill>
+                  <a:srgbClr val="002855"/>
+                </a:solidFill>
+                <a:latin typeface="Segoe UI"/>
+              </a:rPr>
+              <a:t>https://github.com/paulodelosrey/UNAD-BigData-Tarea3-Spark-Streaming</a:t>
+            </a:r>
+          </a:p>
+          <a:p>
+            <a:pPr>
+              <a:spcBef>
+                <a:spcPts val="800"/>
+              </a:spcBef>
+            </a:pPr>
+            <a:r>
+              <a:rPr sz="1050" b="1">
+                <a:solidFill>
+                  <a:srgbClr val="E87722"/>
+                </a:solidFill>
+                <a:latin typeface="Segoe UI"/>
+              </a:rPr>
+              <a:t>🎬 ENLACE AL VIDEO EXPLICATIVO DE SUSTENTACIÓN (MÁX. 5 MINUTOS)</a:t>
+            </a:r>
+          </a:p>
+          <a:p>
+            <a:r>
+              <a:rPr sz="1300" b="1">
+                <a:solidFill>
+                  <a:srgbClr val="005691"/>
+                </a:solidFill>
+                <a:latin typeface="Segoe UI"/>
+              </a:rPr>
+              <a:t>[Pegar aquí el enlace de YouTube / Loom / Drive tras finalizar la grabación]</a:t>
+            </a:r>
+          </a:p>
+        </p:txBody>
+      </p:sp>
+      <p:sp>
+        <p:nvSpPr>
+          <p:cNvPr id="17" name="TextBox 16"/>
           <p:cNvSpPr txBox="1"/>
           <p:nvPr/>
         </p:nvSpPr>
         <p:spPr>
           <a:xfrm>
-            <a:off x="4143375" y="5695950"/>
-            <a:ext cx="4369593" cy="171450"/>
+            <a:off x="8549640" y="4983480"/>
+            <a:ext cx="2880360" cy="1143000"/>
           </a:xfrm>
           <a:prstGeom prst="rect">
             <a:avLst/>
@@ -3509,195 +4284,31 @@
           <a:noFill/>
         </p:spPr>
         <p:txBody>
-          <a:bodyPr wrap="none" lIns="0" rIns="0" tIns="0" bIns="0" anchor="t">
+          <a:bodyPr wrap="square">
             <a:spAutoFit/>
           </a:bodyPr>
           <a:lstStyle/>
           <a:p>
-            <a:pPr algn="l"/>
-            <a:r>
-              <a:rPr b="1" sz="1050" i="0" u="none">
-                <a:solidFill>
-                  <a:srgbClr val="D87014"/>
-                </a:solidFill>
-                <a:latin typeface="DM Sans"/>
-              </a:rPr>
-              <a:t>PROGRAMA ACADÉMICO</a:t>
-            </a:r>
-          </a:p>
-        </p:txBody>
-      </p:sp>
-      <p:sp>
-        <p:nvSpPr>
-          <p:cNvPr id="13" name="TextBox 12"/>
-          <p:cNvSpPr txBox="1"/>
-          <p:nvPr/>
-        </p:nvSpPr>
-        <p:spPr>
-          <a:xfrm>
-            <a:off x="4143375" y="5905500"/>
-            <a:ext cx="4369593" cy="228600"/>
-          </a:xfrm>
-          <a:prstGeom prst="rect">
-            <a:avLst/>
-          </a:prstGeom>
-          <a:noFill/>
-        </p:spPr>
-        <p:txBody>
-          <a:bodyPr wrap="none" lIns="0" rIns="0" tIns="0" bIns="0" anchor="t">
-            <a:spAutoFit/>
-          </a:bodyPr>
-          <a:lstStyle/>
-          <a:p>
-            <a:pPr algn="l"/>
-            <a:r>
-              <a:rPr b="1" sz="1350" i="0" u="none">
-                <a:solidFill>
-                  <a:srgbClr val="FFFFFF"/>
-                </a:solidFill>
-                <a:latin typeface="DM Sans"/>
-              </a:rPr>
-              <a:t>Ingeniería de Sistemas</a:t>
-            </a:r>
-          </a:p>
-        </p:txBody>
-      </p:sp>
-      <p:sp>
-        <p:nvSpPr>
-          <p:cNvPr id="14" name="TextBox 13"/>
-          <p:cNvSpPr txBox="1"/>
-          <p:nvPr/>
-        </p:nvSpPr>
-        <p:spPr>
-          <a:xfrm>
-            <a:off x="4143375" y="6134100"/>
-            <a:ext cx="4369593" cy="190500"/>
-          </a:xfrm>
-          <a:prstGeom prst="rect">
-            <a:avLst/>
-          </a:prstGeom>
-          <a:noFill/>
-        </p:spPr>
-        <p:txBody>
-          <a:bodyPr wrap="none" lIns="0" rIns="0" tIns="0" bIns="0" anchor="t">
-            <a:spAutoFit/>
-          </a:bodyPr>
-          <a:lstStyle/>
-          <a:p>
-            <a:pPr algn="l"/>
-            <a:r>
-              <a:rPr b="0" sz="1125" i="0" u="none">
-                <a:solidFill>
-                  <a:srgbClr val="94A3B8"/>
-                </a:solidFill>
-                <a:latin typeface="DM Sans"/>
-              </a:rPr>
-              <a:t>Escuela de Ciencias Básicas, Tecnología e Ingeniería</a:t>
-            </a:r>
-          </a:p>
-        </p:txBody>
-      </p:sp>
-      <p:sp>
-        <p:nvSpPr>
-          <p:cNvPr id="15" name="TextBox 14"/>
-          <p:cNvSpPr txBox="1"/>
-          <p:nvPr/>
-        </p:nvSpPr>
-        <p:spPr>
-          <a:xfrm>
-            <a:off x="8096250" y="5695950"/>
-            <a:ext cx="3548062" cy="171450"/>
-          </a:xfrm>
-          <a:prstGeom prst="rect">
-            <a:avLst/>
-          </a:prstGeom>
-          <a:noFill/>
-        </p:spPr>
-        <p:txBody>
-          <a:bodyPr wrap="none" lIns="0" rIns="0" tIns="0" bIns="0" anchor="t">
-            <a:spAutoFit/>
-          </a:bodyPr>
-          <a:lstStyle/>
-          <a:p>
-            <a:pPr algn="l"/>
-            <a:r>
-              <a:rPr b="1" sz="1050" i="0" u="none">
-                <a:solidFill>
-                  <a:srgbClr val="D87014"/>
-                </a:solidFill>
-                <a:latin typeface="DM Sans"/>
-              </a:rPr>
-              <a:t>TUTOR DEL CURSO</a:t>
-            </a:r>
-          </a:p>
-        </p:txBody>
-      </p:sp>
-      <p:sp>
-        <p:nvSpPr>
-          <p:cNvPr id="16" name="TextBox 15"/>
-          <p:cNvSpPr txBox="1"/>
-          <p:nvPr/>
-        </p:nvSpPr>
-        <p:spPr>
-          <a:xfrm>
-            <a:off x="8096250" y="5905500"/>
-            <a:ext cx="3548062" cy="228600"/>
-          </a:xfrm>
-          <a:prstGeom prst="rect">
-            <a:avLst/>
-          </a:prstGeom>
-          <a:noFill/>
-        </p:spPr>
-        <p:txBody>
-          <a:bodyPr wrap="none" lIns="0" rIns="0" tIns="0" bIns="0" anchor="t">
-            <a:spAutoFit/>
-          </a:bodyPr>
-          <a:lstStyle/>
-          <a:p>
-            <a:pPr algn="l"/>
-            <a:r>
-              <a:rPr b="1" sz="1350" i="0" u="none">
-                <a:solidFill>
-                  <a:srgbClr val="FFFFFF"/>
-                </a:solidFill>
-                <a:latin typeface="DM Sans"/>
-              </a:rPr>
-              <a:t>Ing. Fidias Rafael Barros</a:t>
-            </a:r>
-          </a:p>
-        </p:txBody>
-      </p:sp>
-      <p:sp>
-        <p:nvSpPr>
-          <p:cNvPr id="17" name="TextBox 16"/>
-          <p:cNvSpPr txBox="1"/>
-          <p:nvPr/>
-        </p:nvSpPr>
-        <p:spPr>
-          <a:xfrm>
-            <a:off x="8096250" y="6134100"/>
-            <a:ext cx="3548062" cy="190500"/>
-          </a:xfrm>
-          <a:prstGeom prst="rect">
-            <a:avLst/>
-          </a:prstGeom>
-          <a:noFill/>
-        </p:spPr>
-        <p:txBody>
-          <a:bodyPr wrap="none" lIns="0" rIns="0" tIns="0" bIns="0" anchor="t">
-            <a:spAutoFit/>
-          </a:bodyPr>
-          <a:lstStyle/>
-          <a:p>
-            <a:pPr algn="l"/>
-            <a:r>
-              <a:rPr b="0" sz="1125" i="0" u="none">
-                <a:solidFill>
-                  <a:srgbClr val="94A3B8"/>
-                </a:solidFill>
-                <a:latin typeface="DM Sans"/>
-              </a:rPr>
-              <a:t>Universidad Nacional Abierta y a Distancia</a:t>
+            <a:pPr algn="r"/>
+            <a:r>
+              <a:rPr sz="1350" b="1">
+                <a:solidFill>
+                  <a:srgbClr val="002855"/>
+                </a:solidFill>
+                <a:latin typeface="Segoe UI"/>
+              </a:rPr>
+              <a:t>Paulo Andrés De los Reyes G.
+</a:t>
+            </a:r>
+            <a:r>
+              <a:rPr sz="1050">
+                <a:solidFill>
+                  <a:srgbClr val="475569"/>
+                </a:solidFill>
+                <a:latin typeface="Segoe UI"/>
+              </a:rPr>
+              <a:t>C.C. 1143451533 · Grupo 16
+UNAD · Ingeniería de Sistemas · 2026</a:t>
             </a:r>
           </a:p>
         </p:txBody>
@@ -3713,14 +4324,6 @@
 <file path=ppt/slides/slide2.xml><?xml version="1.0" encoding="utf-8"?>
 <p:sld xmlns:a="http://schemas.openxmlformats.org/drawingml/2006/main" xmlns:p="http://schemas.openxmlformats.org/presentationml/2006/main" xmlns:r="http://schemas.openxmlformats.org/officeDocument/2006/relationships">
   <p:cSld>
-    <p:bg>
-      <p:bgPr>
-        <a:solidFill>
-          <a:srgbClr val="FFFFFF"/>
-        </a:solidFill>
-        <a:effectLst/>
-      </p:bgPr>
-    </p:bg>
     <p:spTree>
       <p:nvGrpSpPr>
         <p:cNvPr id="1" name=""/>
@@ -3730,19 +4333,17 @@
       <p:grpSpPr/>
       <p:sp>
         <p:nvSpPr>
-          <p:cNvPr id="2" name="Rounded Rectangle 1"/>
+          <p:cNvPr id="2" name="Rectangle 1"/>
           <p:cNvSpPr/>
           <p:nvPr/>
         </p:nvSpPr>
         <p:spPr>
           <a:xfrm>
-            <a:off x="609600" y="2233612"/>
-            <a:ext cx="4191000" cy="3295650"/>
-          </a:xfrm>
-          <a:prstGeom prst="roundRect">
-            <a:avLst>
-              <a:gd name="adj" fmla="val 4624"/>
-            </a:avLst>
+            <a:off x="0" y="0"/>
+            <a:ext cx="12191695" cy="6858000"/>
+          </a:xfrm>
+          <a:prstGeom prst="rect">
+            <a:avLst/>
           </a:prstGeom>
           <a:solidFill>
             <a:srgbClr val="F8FAFC"/>
@@ -3750,7 +4351,6 @@
           <a:ln>
             <a:noFill/>
           </a:ln>
-          <a:effectLst/>
         </p:spPr>
         <p:style>
           <a:lnRef idx="1">
@@ -3774,64 +4374,129 @@
           </a:p>
         </p:txBody>
       </p:sp>
-      <p:pic>
-        <p:nvPicPr>
-          <p:cNvPr id="3" name="Picture 2" descr="image.png"/>
-          <p:cNvPicPr>
-            <a:picLocks noChangeAspect="1"/>
-          </p:cNvPicPr>
-          <p:nvPr/>
-        </p:nvPicPr>
-        <p:blipFill>
-          <a:blip r:embed="rId2"/>
-          <a:stretch>
-            <a:fillRect/>
-          </a:stretch>
-        </p:blipFill>
-        <p:spPr>
-          <a:xfrm>
-            <a:off x="5257800" y="2390775"/>
-            <a:ext cx="209550" cy="209550"/>
+      <p:sp>
+        <p:nvSpPr>
+          <p:cNvPr id="3" name="TextBox 2"/>
+          <p:cNvSpPr txBox="1"/>
+          <p:nvPr/>
+        </p:nvSpPr>
+        <p:spPr>
+          <a:xfrm>
+            <a:off x="548640" y="320040"/>
+            <a:ext cx="11064240" cy="256032"/>
           </a:xfrm>
           <a:prstGeom prst="rect">
             <a:avLst/>
           </a:prstGeom>
-        </p:spPr>
-      </p:pic>
-      <p:pic>
-        <p:nvPicPr>
-          <p:cNvPr id="4" name="Picture 3" descr="image.png"/>
-          <p:cNvPicPr>
-            <a:picLocks noChangeAspect="1"/>
-          </p:cNvPicPr>
-          <p:nvPr/>
-        </p:nvPicPr>
-        <p:blipFill>
-          <a:blip r:embed="rId3"/>
-          <a:stretch>
-            <a:fillRect/>
-          </a:stretch>
-        </p:blipFill>
-        <p:spPr>
-          <a:xfrm>
-            <a:off x="5257800" y="3905250"/>
-            <a:ext cx="180975" cy="209550"/>
+          <a:noFill/>
+        </p:spPr>
+        <p:txBody>
+          <a:bodyPr wrap="square" lIns="0" tIns="0" rIns="0" bIns="0">
+            <a:spAutoFit/>
+          </a:bodyPr>
+          <a:lstStyle/>
+          <a:p>
+            <a:r>
+              <a:rPr sz="1050" b="1">
+                <a:solidFill>
+                  <a:srgbClr val="E87722"/>
+                </a:solidFill>
+                <a:latin typeface="Segoe UI"/>
+              </a:rPr>
+              <a:t>01 · CONTEXTO Y FUENTE OFICIAL</a:t>
+            </a:r>
+          </a:p>
+        </p:txBody>
+      </p:sp>
+      <p:sp>
+        <p:nvSpPr>
+          <p:cNvPr id="4" name="TextBox 3"/>
+          <p:cNvSpPr txBox="1"/>
+          <p:nvPr/>
+        </p:nvSpPr>
+        <p:spPr>
+          <a:xfrm>
+            <a:off x="548640" y="548640"/>
+            <a:ext cx="11091672" cy="438912"/>
           </a:xfrm>
           <a:prstGeom prst="rect">
             <a:avLst/>
           </a:prstGeom>
-        </p:spPr>
-      </p:pic>
-      <p:sp>
-        <p:nvSpPr>
-          <p:cNvPr id="5" name="TextBox 4"/>
+          <a:noFill/>
+        </p:spPr>
+        <p:txBody>
+          <a:bodyPr wrap="square" lIns="0" tIns="0" rIns="0" bIns="0">
+            <a:spAutoFit/>
+          </a:bodyPr>
+          <a:lstStyle/>
+          <a:p>
+            <a:r>
+              <a:rPr sz="2100" b="1">
+                <a:solidFill>
+                  <a:srgbClr val="002855"/>
+                </a:solidFill>
+                <a:latin typeface="Segoe UI"/>
+              </a:rPr>
+              <a:t>Definición del Problema y Conjunto de Datos Seleccionado</a:t>
+            </a:r>
+          </a:p>
+        </p:txBody>
+      </p:sp>
+      <p:sp>
+        <p:nvSpPr>
+          <p:cNvPr id="5" name="Rounded Rectangle 4"/>
+          <p:cNvSpPr/>
+          <p:nvPr/>
+        </p:nvSpPr>
+        <p:spPr>
+          <a:xfrm>
+            <a:off x="548640" y="1234440"/>
+            <a:ext cx="3931920" cy="5166360"/>
+          </a:xfrm>
+          <a:prstGeom prst="roundRect">
+            <a:avLst>
+              <a:gd name="adj" fmla="val 3000"/>
+            </a:avLst>
+          </a:prstGeom>
+          <a:solidFill>
+            <a:srgbClr val="002855"/>
+          </a:solidFill>
+          <a:ln>
+            <a:noFill/>
+          </a:ln>
+        </p:spPr>
+        <p:style>
+          <a:lnRef idx="1">
+            <a:schemeClr val="accent1"/>
+          </a:lnRef>
+          <a:fillRef idx="3">
+            <a:schemeClr val="accent1"/>
+          </a:fillRef>
+          <a:effectRef idx="2">
+            <a:schemeClr val="accent1"/>
+          </a:effectRef>
+          <a:fontRef idx="minor">
+            <a:schemeClr val="lt1"/>
+          </a:fontRef>
+        </p:style>
+        <p:txBody>
+          <a:bodyPr rtlCol="0" anchor="ctr"/>
+          <a:lstStyle/>
+          <a:p>
+            <a:pPr algn="ctr"/>
+          </a:p>
+        </p:txBody>
+      </p:sp>
+      <p:sp>
+        <p:nvSpPr>
+          <p:cNvPr id="6" name="TextBox 5"/>
           <p:cNvSpPr txBox="1"/>
           <p:nvPr/>
         </p:nvSpPr>
         <p:spPr>
           <a:xfrm>
-            <a:off x="609600" y="457200"/>
-            <a:ext cx="11582400" cy="171450"/>
+            <a:off x="777240" y="1463040"/>
+            <a:ext cx="3474720" cy="4754880"/>
           </a:xfrm>
           <a:prstGeom prst="rect">
             <a:avLst/>
@@ -3839,34 +4504,170 @@
           <a:noFill/>
         </p:spPr>
         <p:txBody>
-          <a:bodyPr wrap="none" lIns="0" rIns="0" tIns="0" bIns="0" anchor="t">
+          <a:bodyPr wrap="square">
             <a:spAutoFit/>
           </a:bodyPr>
           <a:lstStyle/>
           <a:p>
-            <a:pPr algn="l"/>
-            <a:r>
-              <a:rPr b="1" sz="1050" i="0" u="none">
-                <a:solidFill>
-                  <a:srgbClr val="D87014"/>
-                </a:solidFill>
-                <a:latin typeface="DM Sans"/>
-              </a:rPr>
-              <a:t>01 · CONTEXTO Y FUENTE OFICIAL</a:t>
-            </a:r>
-          </a:p>
-        </p:txBody>
-      </p:sp>
-      <p:sp>
-        <p:nvSpPr>
-          <p:cNvPr id="6" name="TextBox 5"/>
+            <a:r>
+              <a:rPr sz="5400" b="1">
+                <a:solidFill>
+                  <a:srgbClr val="F2A900"/>
+                </a:solidFill>
+                <a:latin typeface="Segoe UI"/>
+              </a:rPr>
+              <a:t>60.000</a:t>
+            </a:r>
+          </a:p>
+          <a:p>
+            <a:r>
+              <a:rPr sz="1400" b="1">
+                <a:solidFill>
+                  <a:srgbClr val="FFFFFF"/>
+                </a:solidFill>
+                <a:latin typeface="Segoe UI"/>
+              </a:rPr>
+              <a:t>Registros horarios auditados (Año 2026)
+</a:t>
+            </a:r>
+          </a:p>
+          <a:p>
+            <a:pPr>
+              <a:spcBef>
+                <a:spcPts val="1000"/>
+              </a:spcBef>
+            </a:pPr>
+            <a:r>
+              <a:rPr sz="1150" b="1">
+                <a:solidFill>
+                  <a:srgbClr val="F2A900"/>
+                </a:solidFill>
+                <a:latin typeface="Segoe UI"/>
+              </a:rPr>
+              <a:t>▪ Fuente Oficial Pública:
+</a:t>
+            </a:r>
+            <a:r>
+              <a:rPr sz="1080">
+                <a:solidFill>
+                  <a:srgbClr val="E2E8F0"/>
+                </a:solidFill>
+                <a:latin typeface="Segoe UI"/>
+              </a:rPr>
+              <a:t>Portal de Datos Abiertos de Colombia (datos.gov.co) – Subsistema de Información sobre Calidad del Aire (SISAIRE / IDEAM).</a:t>
+            </a:r>
+          </a:p>
+          <a:p>
+            <a:pPr>
+              <a:spcBef>
+                <a:spcPts val="1000"/>
+              </a:spcBef>
+            </a:pPr>
+            <a:r>
+              <a:rPr sz="1150" b="1">
+                <a:solidFill>
+                  <a:srgbClr val="F2A900"/>
+                </a:solidFill>
+                <a:latin typeface="Segoe UI"/>
+              </a:rPr>
+              <a:t>▪ Cobertura Geográfica:
+</a:t>
+            </a:r>
+            <a:r>
+              <a:rPr sz="1080">
+                <a:solidFill>
+                  <a:srgbClr val="E2E8F0"/>
+                </a:solidFill>
+                <a:latin typeface="Segoe UI"/>
+              </a:rPr>
+              <a:t>5 departamentos principales (Bogotá D.C., Antioquia, Valle del Cauca, Santander y Atlántico) y 15 estaciones críticas.</a:t>
+            </a:r>
+          </a:p>
+          <a:p>
+            <a:pPr>
+              <a:spcBef>
+                <a:spcPts val="1000"/>
+              </a:spcBef>
+            </a:pPr>
+            <a:r>
+              <a:rPr sz="1150" b="1">
+                <a:solidFill>
+                  <a:srgbClr val="F2A900"/>
+                </a:solidFill>
+                <a:latin typeface="Segoe UI"/>
+              </a:rPr>
+              <a:t>▪ Archivo del Dataset:
+</a:t>
+            </a:r>
+            <a:r>
+              <a:rPr sz="1080">
+                <a:solidFill>
+                  <a:srgbClr val="E2E8F0"/>
+                </a:solidFill>
+                <a:latin typeface="Segoe UI"/>
+              </a:rPr>
+              <a:t>dataset/calidad_aire_colombia.csv (9 columnas estructuradas: fecha_hora, departamento, municipio, estacion, contaminante, concentracion, unidad, temperatura, humedad e ICA).</a:t>
+            </a:r>
+          </a:p>
+        </p:txBody>
+      </p:sp>
+      <p:sp>
+        <p:nvSpPr>
+          <p:cNvPr id="7" name="Rounded Rectangle 6"/>
+          <p:cNvSpPr/>
+          <p:nvPr/>
+        </p:nvSpPr>
+        <p:spPr>
+          <a:xfrm>
+            <a:off x="4709160" y="1234440"/>
+            <a:ext cx="6931152" cy="2423160"/>
+          </a:xfrm>
+          <a:prstGeom prst="roundRect">
+            <a:avLst>
+              <a:gd name="adj" fmla="val 3000"/>
+            </a:avLst>
+          </a:prstGeom>
+          <a:solidFill>
+            <a:srgbClr val="FFFFFF"/>
+          </a:solidFill>
+          <a:ln w="12700">
+            <a:solidFill>
+              <a:srgbClr val="CBD5E1"/>
+            </a:solidFill>
+          </a:ln>
+        </p:spPr>
+        <p:style>
+          <a:lnRef idx="1">
+            <a:schemeClr val="accent1"/>
+          </a:lnRef>
+          <a:fillRef idx="3">
+            <a:schemeClr val="accent1"/>
+          </a:fillRef>
+          <a:effectRef idx="2">
+            <a:schemeClr val="accent1"/>
+          </a:effectRef>
+          <a:fontRef idx="minor">
+            <a:schemeClr val="lt1"/>
+          </a:fontRef>
+        </p:style>
+        <p:txBody>
+          <a:bodyPr rtlCol="0" anchor="ctr"/>
+          <a:lstStyle/>
+          <a:p>
+            <a:pPr algn="ctr"/>
+          </a:p>
+        </p:txBody>
+      </p:sp>
+      <p:sp>
+        <p:nvSpPr>
+          <p:cNvPr id="8" name="TextBox 7"/>
           <p:cNvSpPr txBox="1"/>
           <p:nvPr/>
         </p:nvSpPr>
         <p:spPr>
           <a:xfrm>
-            <a:off x="609600" y="685800"/>
-            <a:ext cx="11582400" cy="409575"/>
+            <a:off x="4937760" y="1371600"/>
+            <a:ext cx="6492240" cy="2148840"/>
           </a:xfrm>
           <a:prstGeom prst="rect">
             <a:avLst/>
@@ -3874,34 +4675,155 @@
           <a:noFill/>
         </p:spPr>
         <p:txBody>
-          <a:bodyPr wrap="none" lIns="0" rIns="0" tIns="0" bIns="0" anchor="t">
+          <a:bodyPr wrap="square">
             <a:spAutoFit/>
           </a:bodyPr>
           <a:lstStyle/>
           <a:p>
-            <a:pPr algn="l"/>
-            <a:r>
-              <a:rPr b="1" sz="2550" i="0" u="none">
+            <a:r>
+              <a:rPr sz="1600" b="1">
                 <a:solidFill>
                   <a:srgbClr val="002855"/>
                 </a:solidFill>
-                <a:latin typeface="Space Grotesk"/>
-              </a:rPr>
-              <a:t>Definición del Problema y Conjunto de Datos</a:t>
-            </a:r>
-          </a:p>
-        </p:txBody>
-      </p:sp>
-      <p:sp>
-        <p:nvSpPr>
-          <p:cNvPr id="7" name="TextBox 6"/>
+                <a:latin typeface="Segoe UI"/>
+              </a:rPr>
+              <a:t>Problemática Ambiental y Tecnológica a Resolver</a:t>
+            </a:r>
+          </a:p>
+          <a:p>
+            <a:pPr>
+              <a:spcBef>
+                <a:spcPts val="600"/>
+              </a:spcBef>
+            </a:pPr>
+            <a:r>
+              <a:rPr sz="1150" b="1">
+                <a:solidFill>
+                  <a:srgbClr val="E87722"/>
+                </a:solidFill>
+                <a:latin typeface="Segoe UI"/>
+              </a:rPr>
+              <a:t>• Riesgo en Salud Pública:</a:t>
+            </a:r>
+            <a:r>
+              <a:rPr sz="1120">
+                <a:solidFill>
+                  <a:srgbClr val="0F172A"/>
+                </a:solidFill>
+                <a:latin typeface="Segoe UI"/>
+              </a:rPr>
+              <a:t> Necesidad de identificar focos críticos de material particulado respirable (PM2.5 y PM10) que superan los umbrales de la OMS y la Resolución 2254 del Ministerio de Ambiente.</a:t>
+            </a:r>
+          </a:p>
+          <a:p>
+            <a:pPr>
+              <a:spcBef>
+                <a:spcPts val="600"/>
+              </a:spcBef>
+            </a:pPr>
+            <a:r>
+              <a:rPr sz="1150" b="1">
+                <a:solidFill>
+                  <a:srgbClr val="E87722"/>
+                </a:solidFill>
+                <a:latin typeface="Segoe UI"/>
+              </a:rPr>
+              <a:t>• Cuello de Botella en RDBMS Tradicionales:</a:t>
+            </a:r>
+            <a:r>
+              <a:rPr sz="1120">
+                <a:solidFill>
+                  <a:srgbClr val="0F172A"/>
+                </a:solidFill>
+                <a:latin typeface="Segoe UI"/>
+              </a:rPr>
+              <a:t> Las bases relacionales presentan alta latencia al cruzar millones de lecturas históricas con variables meteorológicas (temperatura y humedad) y son incapaces de ingerir ráfagas IoT segundo a segundo.</a:t>
+            </a:r>
+          </a:p>
+          <a:p>
+            <a:pPr>
+              <a:spcBef>
+                <a:spcPts val="600"/>
+              </a:spcBef>
+            </a:pPr>
+            <a:r>
+              <a:rPr sz="1150" b="1">
+                <a:solidFill>
+                  <a:srgbClr val="E87722"/>
+                </a:solidFill>
+                <a:latin typeface="Segoe UI"/>
+              </a:rPr>
+              <a:t>• Solución Big Data (Arquitectura Lambda):</a:t>
+            </a:r>
+            <a:r>
+              <a:rPr sz="1120">
+                <a:solidFill>
+                  <a:srgbClr val="0F172A"/>
+                </a:solidFill>
+                <a:latin typeface="Segoe UI"/>
+              </a:rPr>
+              <a:t> Combinación de procesamiento masivo en memoria (PySpark Batch) con ingesta continua mediante colas de mensajería distribuida (Apache Kafka + Spark Structured Streaming).</a:t>
+            </a:r>
+          </a:p>
+        </p:txBody>
+      </p:sp>
+      <p:sp>
+        <p:nvSpPr>
+          <p:cNvPr id="9" name="Rounded Rectangle 8"/>
+          <p:cNvSpPr/>
+          <p:nvPr/>
+        </p:nvSpPr>
+        <p:spPr>
+          <a:xfrm>
+            <a:off x="4709160" y="3840480"/>
+            <a:ext cx="6931152" cy="2560320"/>
+          </a:xfrm>
+          <a:prstGeom prst="roundRect">
+            <a:avLst>
+              <a:gd name="adj" fmla="val 3000"/>
+            </a:avLst>
+          </a:prstGeom>
+          <a:solidFill>
+            <a:srgbClr val="FFFFFF"/>
+          </a:solidFill>
+          <a:ln w="12700">
+            <a:solidFill>
+              <a:srgbClr val="CBD5E1"/>
+            </a:solidFill>
+          </a:ln>
+        </p:spPr>
+        <p:style>
+          <a:lnRef idx="1">
+            <a:schemeClr val="accent1"/>
+          </a:lnRef>
+          <a:fillRef idx="3">
+            <a:schemeClr val="accent1"/>
+          </a:fillRef>
+          <a:effectRef idx="2">
+            <a:schemeClr val="accent1"/>
+          </a:effectRef>
+          <a:fontRef idx="minor">
+            <a:schemeClr val="lt1"/>
+          </a:fontRef>
+        </p:style>
+        <p:txBody>
+          <a:bodyPr rtlCol="0" anchor="ctr"/>
+          <a:lstStyle/>
+          <a:p>
+            <a:pPr algn="ctr"/>
+          </a:p>
+        </p:txBody>
+      </p:sp>
+      <p:sp>
+        <p:nvSpPr>
+          <p:cNvPr id="10" name="TextBox 9"/>
           <p:cNvSpPr txBox="1"/>
           <p:nvPr/>
         </p:nvSpPr>
         <p:spPr>
           <a:xfrm>
-            <a:off x="952500" y="2576512"/>
-            <a:ext cx="4381500" cy="800100"/>
+            <a:off x="4937760" y="3977639"/>
+            <a:ext cx="6492240" cy="2286000"/>
           </a:xfrm>
           <a:prstGeom prst="rect">
             <a:avLst/>
@@ -3909,612 +4831,94 @@
           <a:noFill/>
         </p:spPr>
         <p:txBody>
-          <a:bodyPr wrap="none" lIns="0" rIns="0" tIns="0" bIns="0" anchor="t">
+          <a:bodyPr wrap="square">
             <a:spAutoFit/>
           </a:bodyPr>
           <a:lstStyle/>
           <a:p>
-            <a:pPr algn="l">
-              <a:lnSpc>
-                <a:spcPts val="6300"/>
-              </a:lnSpc>
+            <a:r>
+              <a:rPr sz="1600" b="1">
+                <a:solidFill>
+                  <a:srgbClr val="002855"/>
+                </a:solidFill>
+                <a:latin typeface="Segoe UI"/>
+              </a:rPr>
+              <a:t>Variables Físico-Químicas y Meteorológicas Analizadas</a:t>
+            </a:r>
+          </a:p>
+          <a:p>
+            <a:pPr>
+              <a:spcBef>
+                <a:spcPts val="700"/>
+              </a:spcBef>
             </a:pPr>
             <a:r>
-              <a:rPr b="1" sz="6300" i="0" u="none">
-                <a:solidFill>
-                  <a:srgbClr val="002855"/>
-                </a:solidFill>
-                <a:latin typeface="DM Sans"/>
-              </a:rPr>
-              <a:t>60.000</a:t>
-            </a:r>
-          </a:p>
-        </p:txBody>
-      </p:sp>
-      <p:sp>
-        <p:nvSpPr>
-          <p:cNvPr id="8" name="TextBox 7"/>
-          <p:cNvSpPr txBox="1"/>
-          <p:nvPr/>
-        </p:nvSpPr>
-        <p:spPr>
-          <a:xfrm>
-            <a:off x="952500" y="3490912"/>
-            <a:ext cx="4381500" cy="247650"/>
-          </a:xfrm>
-          <a:prstGeom prst="rect">
-            <a:avLst/>
-          </a:prstGeom>
-          <a:noFill/>
-        </p:spPr>
-        <p:txBody>
-          <a:bodyPr wrap="none" lIns="0" rIns="0" tIns="0" bIns="0" anchor="t">
-            <a:spAutoFit/>
-          </a:bodyPr>
-          <a:lstStyle/>
-          <a:p>
-            <a:pPr algn="l"/>
-            <a:r>
-              <a:rPr b="1" sz="1500" i="0" u="none">
-                <a:solidFill>
-                  <a:srgbClr val="D87014"/>
-                </a:solidFill>
-                <a:latin typeface="DM Sans"/>
-              </a:rPr>
-              <a:t>Observaciones horarias en 2026</a:t>
-            </a:r>
-          </a:p>
-        </p:txBody>
-      </p:sp>
-      <p:sp>
-        <p:nvSpPr>
-          <p:cNvPr id="9" name="TextBox 8"/>
-          <p:cNvSpPr txBox="1"/>
-          <p:nvPr/>
-        </p:nvSpPr>
-        <p:spPr>
-          <a:xfrm>
-            <a:off x="952500" y="3929062"/>
-            <a:ext cx="3600450" cy="457200"/>
-          </a:xfrm>
-          <a:prstGeom prst="rect">
-            <a:avLst/>
-          </a:prstGeom>
-          <a:noFill/>
-        </p:spPr>
-        <p:txBody>
-          <a:bodyPr wrap="square" lIns="0" rIns="0" tIns="0" bIns="0" anchor="t">
-            <a:spAutoFit/>
-          </a:bodyPr>
-          <a:lstStyle/>
-          <a:p>
-            <a:pPr algn="l"/>
-            <a:r>
-              <a:rPr b="1" sz="1350" i="0" u="none">
-                <a:solidFill>
-                  <a:srgbClr val="334155"/>
-                </a:solidFill>
-                <a:latin typeface="DM Sans"/>
-              </a:rPr>
-              <a:t>Cobertura:</a:t>
-            </a:r>
-            <a:r>
-              <a:rPr b="0" sz="1350" i="0" u="none">
-                <a:solidFill>
-                  <a:srgbClr val="334155"/>
-                </a:solidFill>
-                <a:latin typeface="DM Sans"/>
-              </a:rPr>
-              <a:t> Bogotá D.C., Antioquia, Valle del Cauca, Santander y Atlántico.</a:t>
-            </a:r>
-          </a:p>
-        </p:txBody>
-      </p:sp>
-      <p:sp>
-        <p:nvSpPr>
-          <p:cNvPr id="10" name="TextBox 9"/>
-          <p:cNvSpPr txBox="1"/>
-          <p:nvPr/>
-        </p:nvSpPr>
-        <p:spPr>
-          <a:xfrm>
-            <a:off x="952500" y="4500562"/>
-            <a:ext cx="3600450" cy="685800"/>
-          </a:xfrm>
-          <a:prstGeom prst="rect">
-            <a:avLst/>
-          </a:prstGeom>
-          <a:noFill/>
-        </p:spPr>
-        <p:txBody>
-          <a:bodyPr wrap="square" lIns="0" rIns="0" tIns="0" bIns="0" anchor="t">
-            <a:spAutoFit/>
-          </a:bodyPr>
-          <a:lstStyle/>
-          <a:p>
-            <a:pPr algn="l"/>
-            <a:r>
-              <a:rPr b="1" sz="1350" i="0" u="none">
-                <a:solidFill>
-                  <a:srgbClr val="334155"/>
-                </a:solidFill>
-                <a:latin typeface="DM Sans"/>
-              </a:rPr>
-              <a:t>Fuente:</a:t>
-            </a:r>
-            <a:r>
-              <a:rPr b="0" sz="1350" i="0" u="none">
-                <a:solidFill>
-                  <a:srgbClr val="334155"/>
-                </a:solidFill>
-                <a:latin typeface="DM Sans"/>
-              </a:rPr>
-              <a:t> Portal Datos Abiertos (datos.gov.co) – SISAIRE / IDEAM / MinAmbiente.</a:t>
-            </a:r>
-          </a:p>
-        </p:txBody>
-      </p:sp>
-      <p:sp>
-        <p:nvSpPr>
-          <p:cNvPr id="11" name="TextBox 10"/>
-          <p:cNvSpPr txBox="1"/>
-          <p:nvPr/>
-        </p:nvSpPr>
-        <p:spPr>
-          <a:xfrm>
-            <a:off x="5257800" y="2362200"/>
-            <a:ext cx="6934200" cy="266700"/>
-          </a:xfrm>
-          <a:prstGeom prst="rect">
-            <a:avLst/>
-          </a:prstGeom>
-          <a:noFill/>
-        </p:spPr>
-        <p:txBody>
-          <a:bodyPr wrap="none" lIns="304800" rIns="0" tIns="0" bIns="0" anchor="t">
-            <a:spAutoFit/>
-          </a:bodyPr>
-          <a:lstStyle/>
-          <a:p>
-            <a:pPr algn="l"/>
-            <a:r>
-              <a:rPr b="1" sz="1650" i="0" u="none">
-                <a:solidFill>
-                  <a:srgbClr val="002855"/>
-                </a:solidFill>
-                <a:latin typeface="Space Grotesk"/>
-              </a:rPr>
-              <a:t>Problemática Ambiental y Tecnológica</a:t>
-            </a:r>
-          </a:p>
-        </p:txBody>
-      </p:sp>
-      <p:sp>
-        <p:nvSpPr>
-          <p:cNvPr id="12" name="TextBox 11"/>
-          <p:cNvSpPr txBox="1"/>
-          <p:nvPr/>
-        </p:nvSpPr>
-        <p:spPr>
-          <a:xfrm>
-            <a:off x="5257800" y="3876675"/>
-            <a:ext cx="6934200" cy="266700"/>
-          </a:xfrm>
-          <a:prstGeom prst="rect">
-            <a:avLst/>
-          </a:prstGeom>
-          <a:noFill/>
-        </p:spPr>
-        <p:txBody>
-          <a:bodyPr wrap="none" lIns="276225" rIns="0" tIns="0" bIns="0" anchor="t">
-            <a:spAutoFit/>
-          </a:bodyPr>
-          <a:lstStyle/>
-          <a:p>
-            <a:pPr algn="l"/>
-            <a:r>
-              <a:rPr b="1" sz="1650" i="0" u="none">
-                <a:solidFill>
-                  <a:srgbClr val="002855"/>
-                </a:solidFill>
-                <a:latin typeface="Space Grotesk"/>
-              </a:rPr>
-              <a:t>Variables Monitoreadas</a:t>
-            </a:r>
-          </a:p>
-        </p:txBody>
-      </p:sp>
-      <p:sp>
-        <p:nvSpPr>
-          <p:cNvPr id="13" name="TextBox 12"/>
-          <p:cNvSpPr txBox="1"/>
-          <p:nvPr/>
-        </p:nvSpPr>
-        <p:spPr>
-          <a:xfrm>
-            <a:off x="5419725" y="2714625"/>
-            <a:ext cx="66675" cy="238125"/>
-          </a:xfrm>
-          <a:prstGeom prst="rect">
-            <a:avLst/>
-          </a:prstGeom>
-          <a:noFill/>
-        </p:spPr>
-        <p:txBody>
-          <a:bodyPr wrap="none" lIns="0" rIns="0" tIns="0" bIns="0" anchor="t">
-            <a:spAutoFit/>
-          </a:bodyPr>
-          <a:lstStyle/>
-          <a:p>
-            <a:pPr algn="l"/>
-            <a:r>
-              <a:rPr b="0" sz="1425" i="0" u="none">
-                <a:solidFill>
-                  <a:srgbClr val="1E293B"/>
-                </a:solidFill>
-                <a:latin typeface="DM Sans"/>
-              </a:rPr>
-              <a:t>•</a:t>
-            </a:r>
-          </a:p>
-        </p:txBody>
-      </p:sp>
-      <p:sp>
-        <p:nvSpPr>
-          <p:cNvPr id="14" name="TextBox 13"/>
-          <p:cNvSpPr txBox="1"/>
-          <p:nvPr/>
-        </p:nvSpPr>
-        <p:spPr>
-          <a:xfrm>
-            <a:off x="5486400" y="2743200"/>
-            <a:ext cx="6705600" cy="238125"/>
-          </a:xfrm>
-          <a:prstGeom prst="rect">
-            <a:avLst/>
-          </a:prstGeom>
-          <a:noFill/>
-        </p:spPr>
-        <p:txBody>
-          <a:bodyPr wrap="none" lIns="66675" rIns="0" tIns="0" bIns="0" anchor="t">
-            <a:spAutoFit/>
-          </a:bodyPr>
-          <a:lstStyle/>
-          <a:p>
-            <a:pPr algn="l"/>
-            <a:r>
-              <a:rPr b="1" sz="1425" i="0" u="none">
-                <a:solidFill>
-                  <a:srgbClr val="1E293B"/>
-                </a:solidFill>
-                <a:latin typeface="DM Sans"/>
-              </a:rPr>
-              <a:t>Salud pública:</a:t>
-            </a:r>
-            <a:r>
-              <a:rPr b="0" sz="1425" i="0" u="none">
-                <a:solidFill>
-                  <a:srgbClr val="1E293B"/>
-                </a:solidFill>
-                <a:latin typeface="DM Sans"/>
-              </a:rPr>
-              <a:t> Mitigación de material particulado PM2.5 y PM10.</a:t>
-            </a:r>
-          </a:p>
-        </p:txBody>
-      </p:sp>
-      <p:sp>
-        <p:nvSpPr>
-          <p:cNvPr id="15" name="TextBox 14"/>
-          <p:cNvSpPr txBox="1"/>
-          <p:nvPr/>
-        </p:nvSpPr>
-        <p:spPr>
-          <a:xfrm>
-            <a:off x="5419725" y="3048000"/>
-            <a:ext cx="66675" cy="238125"/>
-          </a:xfrm>
-          <a:prstGeom prst="rect">
-            <a:avLst/>
-          </a:prstGeom>
-          <a:noFill/>
-        </p:spPr>
-        <p:txBody>
-          <a:bodyPr wrap="none" lIns="0" rIns="0" tIns="0" bIns="0" anchor="t">
-            <a:spAutoFit/>
-          </a:bodyPr>
-          <a:lstStyle/>
-          <a:p>
-            <a:pPr algn="l"/>
-            <a:r>
-              <a:rPr b="0" sz="1425" i="0" u="none">
-                <a:solidFill>
-                  <a:srgbClr val="1E293B"/>
-                </a:solidFill>
-                <a:latin typeface="DM Sans"/>
-              </a:rPr>
-              <a:t>•</a:t>
-            </a:r>
-          </a:p>
-        </p:txBody>
-      </p:sp>
-      <p:sp>
-        <p:nvSpPr>
-          <p:cNvPr id="16" name="TextBox 15"/>
-          <p:cNvSpPr txBox="1"/>
-          <p:nvPr/>
-        </p:nvSpPr>
-        <p:spPr>
-          <a:xfrm>
-            <a:off x="5486400" y="3076575"/>
-            <a:ext cx="6191250" cy="476250"/>
-          </a:xfrm>
-          <a:prstGeom prst="rect">
-            <a:avLst/>
-          </a:prstGeom>
-          <a:noFill/>
-        </p:spPr>
-        <p:txBody>
-          <a:bodyPr wrap="square" lIns="66675" rIns="0" tIns="0" bIns="0" anchor="t">
-            <a:spAutoFit/>
-          </a:bodyPr>
-          <a:lstStyle/>
-          <a:p>
-            <a:pPr algn="l"/>
-            <a:r>
-              <a:rPr b="1" sz="1425" i="0" u="none">
-                <a:solidFill>
-                  <a:srgbClr val="1E293B"/>
-                </a:solidFill>
-                <a:latin typeface="DM Sans"/>
-              </a:rPr>
-              <a:t>Cuello de botella RDBMS:</a:t>
-            </a:r>
-            <a:r>
-              <a:rPr b="0" sz="1425" i="0" u="none">
-                <a:solidFill>
-                  <a:srgbClr val="1E293B"/>
-                </a:solidFill>
-                <a:latin typeface="DM Sans"/>
-              </a:rPr>
-              <a:t> Alta latencia ante volúmenes masivos multi-estación.</a:t>
-            </a:r>
-          </a:p>
-        </p:txBody>
-      </p:sp>
-      <p:sp>
-        <p:nvSpPr>
-          <p:cNvPr id="17" name="TextBox 16"/>
-          <p:cNvSpPr txBox="1"/>
-          <p:nvPr/>
-        </p:nvSpPr>
-        <p:spPr>
-          <a:xfrm>
-            <a:off x="5419725" y="4229100"/>
-            <a:ext cx="66675" cy="238125"/>
-          </a:xfrm>
-          <a:prstGeom prst="rect">
-            <a:avLst/>
-          </a:prstGeom>
-          <a:noFill/>
-        </p:spPr>
-        <p:txBody>
-          <a:bodyPr wrap="none" lIns="0" rIns="0" tIns="0" bIns="0" anchor="t">
-            <a:spAutoFit/>
-          </a:bodyPr>
-          <a:lstStyle/>
-          <a:p>
-            <a:pPr algn="l"/>
-            <a:r>
-              <a:rPr b="0" sz="1425" i="0" u="none">
-                <a:solidFill>
-                  <a:srgbClr val="1E293B"/>
-                </a:solidFill>
-                <a:latin typeface="DM Sans"/>
-              </a:rPr>
-              <a:t>•</a:t>
-            </a:r>
-          </a:p>
-        </p:txBody>
-      </p:sp>
-      <p:sp>
-        <p:nvSpPr>
-          <p:cNvPr id="18" name="TextBox 17"/>
-          <p:cNvSpPr txBox="1"/>
-          <p:nvPr/>
-        </p:nvSpPr>
-        <p:spPr>
-          <a:xfrm>
-            <a:off x="5486400" y="4257675"/>
-            <a:ext cx="6191250" cy="476250"/>
-          </a:xfrm>
-          <a:prstGeom prst="rect">
-            <a:avLst/>
-          </a:prstGeom>
-          <a:noFill/>
-        </p:spPr>
-        <p:txBody>
-          <a:bodyPr wrap="square" lIns="66675" rIns="0" tIns="0" bIns="0" anchor="t">
-            <a:spAutoFit/>
-          </a:bodyPr>
-          <a:lstStyle/>
-          <a:p>
-            <a:pPr algn="l"/>
-            <a:r>
-              <a:rPr b="1" sz="1425" i="0" u="none">
-                <a:solidFill>
-                  <a:srgbClr val="1E293B"/>
-                </a:solidFill>
-                <a:latin typeface="DM Sans"/>
-              </a:rPr>
-              <a:t>Material particulado:</a:t>
-            </a:r>
-            <a:r>
-              <a:rPr b="0" sz="1425" i="0" u="none">
-                <a:solidFill>
-                  <a:srgbClr val="1E293B"/>
-                </a:solidFill>
-                <a:latin typeface="DM Sans"/>
-              </a:rPr>
-              <a:t> Concentraciones horarias de PM2.5 y PM10 (µg/m³).</a:t>
-            </a:r>
-          </a:p>
-        </p:txBody>
-      </p:sp>
-      <p:sp>
-        <p:nvSpPr>
-          <p:cNvPr id="19" name="TextBox 18"/>
-          <p:cNvSpPr txBox="1"/>
-          <p:nvPr/>
-        </p:nvSpPr>
-        <p:spPr>
-          <a:xfrm>
-            <a:off x="5419725" y="4800600"/>
-            <a:ext cx="66675" cy="238125"/>
-          </a:xfrm>
-          <a:prstGeom prst="rect">
-            <a:avLst/>
-          </a:prstGeom>
-          <a:noFill/>
-        </p:spPr>
-        <p:txBody>
-          <a:bodyPr wrap="none" lIns="0" rIns="0" tIns="0" bIns="0" anchor="t">
-            <a:spAutoFit/>
-          </a:bodyPr>
-          <a:lstStyle/>
-          <a:p>
-            <a:pPr algn="l"/>
-            <a:r>
-              <a:rPr b="0" sz="1425" i="0" u="none">
-                <a:solidFill>
-                  <a:srgbClr val="1E293B"/>
-                </a:solidFill>
-                <a:latin typeface="DM Sans"/>
-              </a:rPr>
-              <a:t>•</a:t>
-            </a:r>
-          </a:p>
-        </p:txBody>
-      </p:sp>
-      <p:sp>
-        <p:nvSpPr>
-          <p:cNvPr id="20" name="TextBox 19"/>
-          <p:cNvSpPr txBox="1"/>
-          <p:nvPr/>
-        </p:nvSpPr>
-        <p:spPr>
-          <a:xfrm>
-            <a:off x="5486400" y="4829175"/>
-            <a:ext cx="6705600" cy="238125"/>
-          </a:xfrm>
-          <a:prstGeom prst="rect">
-            <a:avLst/>
-          </a:prstGeom>
-          <a:noFill/>
-        </p:spPr>
-        <p:txBody>
-          <a:bodyPr wrap="none" lIns="66675" rIns="0" tIns="0" bIns="0" anchor="t">
-            <a:spAutoFit/>
-          </a:bodyPr>
-          <a:lstStyle/>
-          <a:p>
-            <a:pPr algn="l"/>
-            <a:r>
-              <a:rPr b="1" sz="1425" i="0" u="none">
-                <a:solidFill>
-                  <a:srgbClr val="1E293B"/>
-                </a:solidFill>
-                <a:latin typeface="DM Sans"/>
-              </a:rPr>
-              <a:t>Gases contaminantes:</a:t>
-            </a:r>
-            <a:r>
-              <a:rPr b="0" sz="1425" i="0" u="none">
-                <a:solidFill>
-                  <a:srgbClr val="1E293B"/>
-                </a:solidFill>
-                <a:latin typeface="DM Sans"/>
-              </a:rPr>
-              <a:t> Ozono (O3), NO2, SO2 y monóxido (CO).</a:t>
-            </a:r>
-          </a:p>
-        </p:txBody>
-      </p:sp>
-      <p:sp>
-        <p:nvSpPr>
-          <p:cNvPr id="21" name="TextBox 20"/>
-          <p:cNvSpPr txBox="1"/>
-          <p:nvPr/>
-        </p:nvSpPr>
-        <p:spPr>
-          <a:xfrm>
-            <a:off x="5419725" y="5133975"/>
-            <a:ext cx="66675" cy="238125"/>
-          </a:xfrm>
-          <a:prstGeom prst="rect">
-            <a:avLst/>
-          </a:prstGeom>
-          <a:noFill/>
-        </p:spPr>
-        <p:txBody>
-          <a:bodyPr wrap="none" lIns="0" rIns="0" tIns="0" bIns="0" anchor="t">
-            <a:spAutoFit/>
-          </a:bodyPr>
-          <a:lstStyle/>
-          <a:p>
-            <a:pPr algn="l"/>
-            <a:r>
-              <a:rPr b="0" sz="1425" i="0" u="none">
-                <a:solidFill>
-                  <a:srgbClr val="1E293B"/>
-                </a:solidFill>
-                <a:latin typeface="DM Sans"/>
-              </a:rPr>
-              <a:t>•</a:t>
-            </a:r>
-          </a:p>
-        </p:txBody>
-      </p:sp>
-      <p:sp>
-        <p:nvSpPr>
-          <p:cNvPr id="22" name="TextBox 21"/>
-          <p:cNvSpPr txBox="1"/>
-          <p:nvPr/>
-        </p:nvSpPr>
-        <p:spPr>
-          <a:xfrm>
-            <a:off x="5486400" y="5162550"/>
-            <a:ext cx="6705600" cy="238125"/>
-          </a:xfrm>
-          <a:prstGeom prst="rect">
-            <a:avLst/>
-          </a:prstGeom>
-          <a:noFill/>
-        </p:spPr>
-        <p:txBody>
-          <a:bodyPr wrap="none" lIns="66675" rIns="0" tIns="0" bIns="0" anchor="t">
-            <a:spAutoFit/>
-          </a:bodyPr>
-          <a:lstStyle/>
-          <a:p>
-            <a:pPr algn="l"/>
-            <a:r>
-              <a:rPr b="1" sz="1425" i="0" u="none">
-                <a:solidFill>
-                  <a:srgbClr val="1E293B"/>
-                </a:solidFill>
-                <a:latin typeface="DM Sans"/>
-              </a:rPr>
-              <a:t>Meteorología e índice:</a:t>
-            </a:r>
-            <a:r>
-              <a:rPr b="0" sz="1425" i="0" u="none">
-                <a:solidFill>
-                  <a:srgbClr val="1E293B"/>
-                </a:solidFill>
-                <a:latin typeface="DM Sans"/>
-              </a:rPr>
-              <a:t> Temperatura, humedad relativa e Índice ICA.</a:t>
+              <a:rPr sz="1150" b="1">
+                <a:solidFill>
+                  <a:srgbClr val="005691"/>
+                </a:solidFill>
+                <a:latin typeface="Segoe UI"/>
+              </a:rPr>
+              <a:t>▸ Material Particulado (PM2.5 y PM10):</a:t>
+            </a:r>
+            <a:r>
+              <a:rPr sz="1120">
+                <a:solidFill>
+                  <a:srgbClr val="0F172A"/>
+                </a:solidFill>
+                <a:latin typeface="Segoe UI"/>
+              </a:rPr>
+              <a:t> Concentraciones horarias en µg/m³ asociadas a combustión vehicular e industrial.</a:t>
+            </a:r>
+          </a:p>
+          <a:p>
+            <a:pPr>
+              <a:spcBef>
+                <a:spcPts val="700"/>
+              </a:spcBef>
+            </a:pPr>
+            <a:r>
+              <a:rPr sz="1150" b="1">
+                <a:solidFill>
+                  <a:srgbClr val="005691"/>
+                </a:solidFill>
+                <a:latin typeface="Segoe UI"/>
+              </a:rPr>
+              <a:t>▸ Gases Contaminantes Criterio:</a:t>
+            </a:r>
+            <a:r>
+              <a:rPr sz="1120">
+                <a:solidFill>
+                  <a:srgbClr val="0F172A"/>
+                </a:solidFill>
+                <a:latin typeface="Segoe UI"/>
+              </a:rPr>
+              <a:t> Dióxido de Nitrógeno (NO2), Ozono Troposférico (O3), Dióxido de Azufre (SO2) y Monóxido de Carbono (CO).</a:t>
+            </a:r>
+          </a:p>
+          <a:p>
+            <a:pPr>
+              <a:spcBef>
+                <a:spcPts val="700"/>
+              </a:spcBef>
+            </a:pPr>
+            <a:r>
+              <a:rPr sz="1150" b="1">
+                <a:solidFill>
+                  <a:srgbClr val="005691"/>
+                </a:solidFill>
+                <a:latin typeface="Segoe UI"/>
+              </a:rPr>
+              <a:t>▸ Variables Climáticas y Clasificación ICA:</a:t>
+            </a:r>
+            <a:r>
+              <a:rPr sz="1120">
+                <a:solidFill>
+                  <a:srgbClr val="0F172A"/>
+                </a:solidFill>
+                <a:latin typeface="Segoe UI"/>
+              </a:rPr>
+              <a:t> Temperatura ambiental (°C), Humedad Relativa (%) y categorización oficial del Índice de Calidad del Aire (Buena, Aceptable, Dañina a Grupos Sensibles, Dañina).</a:t>
             </a:r>
           </a:p>
         </p:txBody>
@@ -4530,14 +4934,6 @@
 <file path=ppt/slides/slide3.xml><?xml version="1.0" encoding="utf-8"?>
 <p:sld xmlns:a="http://schemas.openxmlformats.org/drawingml/2006/main" xmlns:p="http://schemas.openxmlformats.org/presentationml/2006/main" xmlns:r="http://schemas.openxmlformats.org/officeDocument/2006/relationships">
   <p:cSld>
-    <p:bg>
-      <p:bgPr>
-        <a:solidFill>
-          <a:srgbClr val="FFFFFF"/>
-        </a:solidFill>
-        <a:effectLst/>
-      </p:bgPr>
-    </p:bg>
     <p:spTree>
       <p:nvGrpSpPr>
         <p:cNvPr id="1" name=""/>
@@ -4547,19 +4943,17 @@
       <p:grpSpPr/>
       <p:sp>
         <p:nvSpPr>
-          <p:cNvPr id="2" name="Rounded Rectangle 1"/>
+          <p:cNvPr id="2" name="Rectangle 1"/>
           <p:cNvSpPr/>
           <p:nvPr/>
         </p:nvSpPr>
         <p:spPr>
           <a:xfrm>
-            <a:off x="609600" y="5057775"/>
-            <a:ext cx="3505200" cy="1343025"/>
-          </a:xfrm>
-          <a:prstGeom prst="roundRect">
-            <a:avLst>
-              <a:gd name="adj" fmla="val 8510"/>
-            </a:avLst>
+            <a:off x="0" y="0"/>
+            <a:ext cx="12191695" cy="6858000"/>
+          </a:xfrm>
+          <a:prstGeom prst="rect">
+            <a:avLst/>
           </a:prstGeom>
           <a:solidFill>
             <a:srgbClr val="F8FAFC"/>
@@ -4567,7 +4961,6 @@
           <a:ln>
             <a:noFill/>
           </a:ln>
-          <a:effectLst/>
         </p:spPr>
         <p:style>
           <a:lnRef idx="1">
@@ -4593,239 +4986,113 @@
       </p:sp>
       <p:sp>
         <p:nvSpPr>
-          <p:cNvPr id="3" name="Rounded Rectangle 2"/>
-          <p:cNvSpPr/>
-          <p:nvPr/>
-        </p:nvSpPr>
-        <p:spPr>
-          <a:xfrm>
-            <a:off x="4343400" y="5057775"/>
-            <a:ext cx="3505200" cy="1343025"/>
-          </a:xfrm>
-          <a:prstGeom prst="roundRect">
-            <a:avLst>
-              <a:gd name="adj" fmla="val 8510"/>
-            </a:avLst>
-          </a:prstGeom>
-          <a:solidFill>
-            <a:srgbClr val="F8FAFC"/>
-          </a:solidFill>
-          <a:ln>
-            <a:noFill/>
-          </a:ln>
-          <a:effectLst/>
-        </p:spPr>
-        <p:style>
-          <a:lnRef idx="1">
-            <a:schemeClr val="accent1"/>
-          </a:lnRef>
-          <a:fillRef idx="3">
-            <a:schemeClr val="accent1"/>
-          </a:fillRef>
-          <a:effectRef idx="2">
-            <a:schemeClr val="accent1"/>
-          </a:effectRef>
-          <a:fontRef idx="minor">
-            <a:schemeClr val="lt1"/>
-          </a:fontRef>
-        </p:style>
-        <p:txBody>
-          <a:bodyPr rtlCol="0" anchor="ctr"/>
-          <a:lstStyle/>
-          <a:p>
-            <a:pPr algn="ctr"/>
-          </a:p>
-        </p:txBody>
-      </p:sp>
-      <p:sp>
-        <p:nvSpPr>
-          <p:cNvPr id="4" name="Rounded Rectangle 3"/>
-          <p:cNvSpPr/>
-          <p:nvPr/>
-        </p:nvSpPr>
-        <p:spPr>
-          <a:xfrm>
-            <a:off x="8077200" y="5057775"/>
-            <a:ext cx="3505200" cy="1343025"/>
-          </a:xfrm>
-          <a:prstGeom prst="roundRect">
-            <a:avLst>
-              <a:gd name="adj" fmla="val 8510"/>
-            </a:avLst>
-          </a:prstGeom>
-          <a:solidFill>
-            <a:srgbClr val="F8FAFC"/>
-          </a:solidFill>
-          <a:ln>
-            <a:noFill/>
-          </a:ln>
-          <a:effectLst/>
-        </p:spPr>
-        <p:style>
-          <a:lnRef idx="1">
-            <a:schemeClr val="accent1"/>
-          </a:lnRef>
-          <a:fillRef idx="3">
-            <a:schemeClr val="accent1"/>
-          </a:fillRef>
-          <a:effectRef idx="2">
-            <a:schemeClr val="accent1"/>
-          </a:effectRef>
-          <a:fontRef idx="minor">
-            <a:schemeClr val="lt1"/>
-          </a:fontRef>
-        </p:style>
-        <p:txBody>
-          <a:bodyPr rtlCol="0" anchor="ctr"/>
-          <a:lstStyle/>
-          <a:p>
-            <a:pPr algn="ctr"/>
-          </a:p>
-        </p:txBody>
-      </p:sp>
-      <p:pic>
-        <p:nvPicPr>
-          <p:cNvPr id="5" name="Picture 4" descr="image.png"/>
-          <p:cNvPicPr>
-            <a:picLocks noChangeAspect="1"/>
-          </p:cNvPicPr>
-          <p:nvPr/>
-        </p:nvPicPr>
-        <p:blipFill>
-          <a:blip r:embed="rId2"/>
-          <a:stretch>
-            <a:fillRect/>
-          </a:stretch>
-        </p:blipFill>
-        <p:spPr>
-          <a:xfrm>
-            <a:off x="876300" y="5353050"/>
-            <a:ext cx="228600" cy="200025"/>
+          <p:cNvPr id="3" name="TextBox 2"/>
+          <p:cNvSpPr txBox="1"/>
+          <p:nvPr/>
+        </p:nvSpPr>
+        <p:spPr>
+          <a:xfrm>
+            <a:off x="548640" y="320040"/>
+            <a:ext cx="11064240" cy="256032"/>
           </a:xfrm>
           <a:prstGeom prst="rect">
             <a:avLst/>
           </a:prstGeom>
-        </p:spPr>
-      </p:pic>
-      <p:pic>
-        <p:nvPicPr>
-          <p:cNvPr id="6" name="Picture 5" descr="image.png"/>
-          <p:cNvPicPr>
-            <a:picLocks noChangeAspect="1"/>
-          </p:cNvPicPr>
-          <p:nvPr/>
-        </p:nvPicPr>
-        <p:blipFill>
-          <a:blip r:embed="rId3"/>
-          <a:stretch>
-            <a:fillRect/>
-          </a:stretch>
-        </p:blipFill>
-        <p:spPr>
-          <a:xfrm>
-            <a:off x="4610100" y="5353050"/>
-            <a:ext cx="171450" cy="200025"/>
+          <a:noFill/>
+        </p:spPr>
+        <p:txBody>
+          <a:bodyPr wrap="square" lIns="0" tIns="0" rIns="0" bIns="0">
+            <a:spAutoFit/>
+          </a:bodyPr>
+          <a:lstStyle/>
+          <a:p>
+            <a:r>
+              <a:rPr sz="1050" b="1">
+                <a:solidFill>
+                  <a:srgbClr val="E87722"/>
+                </a:solidFill>
+                <a:latin typeface="Segoe UI"/>
+              </a:rPr>
+              <a:t>02 · INVESTIGACIÓN Y PARADIGMAS DE CÓMPUTO DISTRIBUIDO</a:t>
+            </a:r>
+          </a:p>
+        </p:txBody>
+      </p:sp>
+      <p:sp>
+        <p:nvSpPr>
+          <p:cNvPr id="4" name="TextBox 3"/>
+          <p:cNvSpPr txBox="1"/>
+          <p:nvPr/>
+        </p:nvSpPr>
+        <p:spPr>
+          <a:xfrm>
+            <a:off x="548640" y="548640"/>
+            <a:ext cx="11091672" cy="438912"/>
           </a:xfrm>
           <a:prstGeom prst="rect">
             <a:avLst/>
           </a:prstGeom>
-        </p:spPr>
-      </p:pic>
-      <p:pic>
-        <p:nvPicPr>
-          <p:cNvPr id="7" name="Picture 6" descr="image.png"/>
-          <p:cNvPicPr>
-            <a:picLocks noChangeAspect="1"/>
-          </p:cNvPicPr>
-          <p:nvPr/>
-        </p:nvPicPr>
-        <p:blipFill>
-          <a:blip r:embed="rId4"/>
-          <a:stretch>
-            <a:fillRect/>
-          </a:stretch>
-        </p:blipFill>
-        <p:spPr>
-          <a:xfrm>
-            <a:off x="8343900" y="5353050"/>
-            <a:ext cx="171450" cy="200025"/>
-          </a:xfrm>
-          <a:prstGeom prst="rect">
-            <a:avLst/>
-          </a:prstGeom>
-        </p:spPr>
-      </p:pic>
+          <a:noFill/>
+        </p:spPr>
+        <p:txBody>
+          <a:bodyPr wrap="square" lIns="0" tIns="0" rIns="0" bIns="0">
+            <a:spAutoFit/>
+          </a:bodyPr>
+          <a:lstStyle/>
+          <a:p>
+            <a:r>
+              <a:rPr sz="2100" b="1">
+                <a:solidFill>
+                  <a:srgbClr val="002855"/>
+                </a:solidFill>
+                <a:latin typeface="Segoe UI"/>
+              </a:rPr>
+              <a:t>Comparativa Hadoop vs. Spark, RDDs, DataFrames y Arquitectura Kafka</a:t>
+            </a:r>
+          </a:p>
+        </p:txBody>
+      </p:sp>
       <p:graphicFrame>
         <p:nvGraphicFramePr>
-          <p:cNvPr id="8" name="Table 7"/>
+          <p:cNvPr id="5" name="Table 4"/>
           <p:cNvGraphicFramePr>
             <a:graphicFrameLocks noGrp="1"/>
           </p:cNvGraphicFramePr>
           <p:nvPr/>
         </p:nvGraphicFramePr>
         <p:xfrm>
-          <a:off x="609600" y="1323975"/>
-          <a:ext cx="10972799" cy="1962150"/>
+          <a:off x="548640" y="1188720"/>
+          <a:ext cx="11091672" cy="2514600"/>
         </p:xfrm>
         <a:graphic>
           <a:graphicData uri="http://schemas.openxmlformats.org/drawingml/2006/table">
             <a:tbl>
-              <a:tblPr firstRow="0" bandRow="0">
-                <a:lnL>
-                  <a:noFill/>
-                </a:lnL>
-                <a:lnR>
-                  <a:noFill/>
-                </a:lnR>
-                <a:lnT>
-                  <a:noFill/>
-                </a:lnT>
-                <a:lnB>
-                  <a:noFill/>
-                </a:lnB>
-                <a:lnV>
-                  <a:noFill/>
-                </a:lnV>
-                <a:lnH>
-                  <a:noFill/>
-                </a:lnH>
+              <a:tblPr firstRow="1" bandRow="1">
+                <a:tableStyleId>{5C22544A-7EE6-4342-B048-85BDC9FD1C3A}</a:tableStyleId>
               </a:tblPr>
               <a:tblGrid>
-                <a:gridCol w="2414289"/>
-                <a:gridCol w="3540621"/>
-                <a:gridCol w="5017889"/>
+                <a:gridCol w="2039112"/>
+                <a:gridCol w="4434840"/>
+                <a:gridCol w="4617720"/>
               </a:tblGrid>
-              <a:tr h="654050">
+              <a:tr h="502920">
                 <a:tc>
                   <a:txBody>
                     <a:bodyPr/>
                     <a:lstStyle/>
                     <a:p>
-                      <a:pPr algn="l"/>
                       <a:r>
-                        <a:rPr b="1" sz="1350" i="0" u="none">
+                        <a:rPr sz="1100" b="1">
                           <a:solidFill>
                             <a:srgbClr val="FFFFFF"/>
                           </a:solidFill>
-                          <a:latin typeface="DM Sans"/>
+                          <a:latin typeface="Segoe UI"/>
                         </a:rPr>
                         <a:t>Criterio Técnico</a:t>
                       </a:r>
                     </a:p>
                   </a:txBody>
-                  <a:tcPr anchor="ctr" marL="63500" marR="63500" marT="25400" marB="25400">
-                    <a:lnL>
-                      <a:noFill/>
-                    </a:lnL>
-                    <a:lnR>
-                      <a:noFill/>
-                    </a:lnR>
-                    <a:lnT>
-                      <a:noFill/>
-                    </a:lnT>
-                    <a:lnB>
-                      <a:noFill/>
-                    </a:lnB>
+                  <a:tcPr anchor="ctr">
                     <a:solidFill>
                       <a:srgbClr val="002855"/>
                     </a:solidFill>
@@ -4836,31 +5103,18 @@
                     <a:bodyPr/>
                     <a:lstStyle/>
                     <a:p>
-                      <a:pPr algn="l"/>
                       <a:r>
-                        <a:rPr b="1" sz="1350" i="0" u="none">
+                        <a:rPr sz="1100" b="1">
                           <a:solidFill>
                             <a:srgbClr val="FFFFFF"/>
                           </a:solidFill>
-                          <a:latin typeface="DM Sans"/>
+                          <a:latin typeface="Segoe UI"/>
                         </a:rPr>
-                        <a:t>Apache Hadoop (MapReduce)</a:t>
+                        <a:t>Apache Hadoop (MapReduce / HDFS)</a:t>
                       </a:r>
                     </a:p>
                   </a:txBody>
-                  <a:tcPr anchor="ctr" marL="63500" marR="63500" marT="25400" marB="25400">
-                    <a:lnL>
-                      <a:noFill/>
-                    </a:lnL>
-                    <a:lnR>
-                      <a:noFill/>
-                    </a:lnR>
-                    <a:lnT>
-                      <a:noFill/>
-                    </a:lnT>
-                    <a:lnB>
-                      <a:noFill/>
-                    </a:lnB>
+                  <a:tcPr anchor="ctr">
                     <a:solidFill>
                       <a:srgbClr val="002855"/>
                     </a:solidFill>
@@ -4871,68 +5125,42 @@
                     <a:bodyPr/>
                     <a:lstStyle/>
                     <a:p>
-                      <a:pPr algn="l"/>
                       <a:r>
-                        <a:rPr b="1" sz="1350" i="0" u="none">
+                        <a:rPr sz="1100" b="1">
                           <a:solidFill>
                             <a:srgbClr val="FFFFFF"/>
                           </a:solidFill>
-                          <a:latin typeface="DM Sans"/>
+                          <a:latin typeface="Segoe UI"/>
                         </a:rPr>
-                        <a:t>Apache Spark (In-Memory)</a:t>
+                        <a:t>Apache Spark (In-Memory / DAG)</a:t>
                       </a:r>
                     </a:p>
                   </a:txBody>
-                  <a:tcPr anchor="ctr" marL="63500" marR="63500" marT="25400" marB="25400">
-                    <a:lnL>
-                      <a:noFill/>
-                    </a:lnL>
-                    <a:lnR>
-                      <a:noFill/>
-                    </a:lnR>
-                    <a:lnT>
-                      <a:noFill/>
-                    </a:lnT>
-                    <a:lnB>
-                      <a:noFill/>
-                    </a:lnB>
+                  <a:tcPr anchor="ctr">
                     <a:solidFill>
                       <a:srgbClr val="002855"/>
                     </a:solidFill>
                   </a:tcPr>
                 </a:tc>
               </a:tr>
-              <a:tr h="654050">
+              <a:tr h="502920">
                 <a:tc>
                   <a:txBody>
                     <a:bodyPr/>
                     <a:lstStyle/>
                     <a:p>
-                      <a:pPr algn="l"/>
                       <a:r>
-                        <a:rPr b="1" sz="1350" i="0" u="none">
+                        <a:rPr sz="1050" b="1">
                           <a:solidFill>
                             <a:srgbClr val="002855"/>
                           </a:solidFill>
-                          <a:latin typeface="DM Sans"/>
+                          <a:latin typeface="Segoe UI"/>
                         </a:rPr>
-                        <a:t>Motor de Procesamiento</a:t>
+                        <a:t>1. Arquitectura</a:t>
                       </a:r>
                     </a:p>
                   </a:txBody>
-                  <a:tcPr anchor="ctr" marL="63500" marR="63500" marT="25400" marB="25400">
-                    <a:lnL>
-                      <a:noFill/>
-                    </a:lnL>
-                    <a:lnR>
-                      <a:noFill/>
-                    </a:lnR>
-                    <a:lnT>
-                      <a:noFill/>
-                    </a:lnT>
-                    <a:lnB>
-                      <a:noFill/>
-                    </a:lnB>
+                  <a:tcPr anchor="ctr">
                     <a:solidFill>
                       <a:srgbClr val="FFFFFF"/>
                     </a:solidFill>
@@ -4943,31 +5171,18 @@
                     <a:bodyPr/>
                     <a:lstStyle/>
                     <a:p>
-                      <a:pPr algn="l"/>
                       <a:r>
-                        <a:rPr b="0" sz="1350" i="0" u="none">
+                        <a:rPr sz="1050" b="0">
                           <a:solidFill>
-                            <a:srgbClr val="475569"/>
+                            <a:srgbClr val="0F172A"/>
                           </a:solidFill>
-                          <a:latin typeface="DM Sans"/>
+                          <a:latin typeface="Segoe UI"/>
                         </a:rPr>
-                        <a:t>Lectura/escritura intensiva en disco HDFS</a:t>
+                        <a:t>Almacenamiento HDFS en bloques de disco + gestor YARN.</a:t>
                       </a:r>
                     </a:p>
                   </a:txBody>
-                  <a:tcPr anchor="ctr" marL="63500" marR="63500" marT="25400" marB="25400">
-                    <a:lnL>
-                      <a:noFill/>
-                    </a:lnL>
-                    <a:lnR>
-                      <a:noFill/>
-                    </a:lnR>
-                    <a:lnT>
-                      <a:noFill/>
-                    </a:lnT>
-                    <a:lnB>
-                      <a:noFill/>
-                    </a:lnB>
+                  <a:tcPr anchor="ctr">
                     <a:solidFill>
                       <a:srgbClr val="FFFFFF"/>
                     </a:solidFill>
@@ -4978,70 +5193,44 @@
                     <a:bodyPr/>
                     <a:lstStyle/>
                     <a:p>
-                      <a:pPr algn="l"/>
                       <a:r>
-                        <a:rPr b="1" sz="1350" i="0" u="none">
+                        <a:rPr sz="1050" b="0">
                           <a:solidFill>
-                            <a:srgbClr val="002855"/>
+                            <a:srgbClr val="0B4F6C"/>
                           </a:solidFill>
-                          <a:latin typeface="DM Sans"/>
+                          <a:latin typeface="Segoe UI"/>
                         </a:rPr>
-                        <a:t>Cómputo en memoria RAM (hasta 100x más veloz)</a:t>
+                        <a:t>Cómputo distribuido en memoria RAM basado en Grafos Acíclicos Dirigidos (DAG).</a:t>
                       </a:r>
                     </a:p>
                   </a:txBody>
-                  <a:tcPr anchor="ctr" marL="63500" marR="63500" marT="25400" marB="25400">
-                    <a:lnL>
-                      <a:noFill/>
-                    </a:lnL>
-                    <a:lnR>
-                      <a:noFill/>
-                    </a:lnR>
-                    <a:lnT>
-                      <a:noFill/>
-                    </a:lnT>
-                    <a:lnB>
-                      <a:noFill/>
-                    </a:lnB>
+                  <a:tcPr anchor="ctr">
                     <a:solidFill>
                       <a:srgbClr val="FFFFFF"/>
                     </a:solidFill>
                   </a:tcPr>
                 </a:tc>
               </a:tr>
-              <a:tr h="654050">
+              <a:tr h="502920">
                 <a:tc>
                   <a:txBody>
                     <a:bodyPr/>
                     <a:lstStyle/>
                     <a:p>
-                      <a:pPr algn="l"/>
                       <a:r>
-                        <a:rPr b="1" sz="1350" i="0" u="none">
+                        <a:rPr sz="1050" b="1">
                           <a:solidFill>
                             <a:srgbClr val="002855"/>
                           </a:solidFill>
-                          <a:latin typeface="DM Sans"/>
+                          <a:latin typeface="Segoe UI"/>
                         </a:rPr>
-                        <a:t>Tolerancia a Fallos</a:t>
+                        <a:t>2. Procesamiento</a:t>
                       </a:r>
                     </a:p>
                   </a:txBody>
-                  <a:tcPr anchor="ctr" marL="63500" marR="63500" marT="25400" marB="25400">
-                    <a:lnL>
-                      <a:noFill/>
-                    </a:lnL>
-                    <a:lnR>
-                      <a:noFill/>
-                    </a:lnR>
-                    <a:lnT>
-                      <a:noFill/>
-                    </a:lnT>
-                    <a:lnB>
-                      <a:noFill/>
-                    </a:lnB>
+                  <a:tcPr anchor="ctr">
                     <a:solidFill>
-                      <a:srgbClr val="F8FAFC"/>
+                      <a:srgbClr val="F1F5F9"/>
                     </a:solidFill>
                   </a:tcPr>
                 </a:tc>
@@ -5050,33 +5239,20 @@
                     <a:bodyPr/>
                     <a:lstStyle/>
                     <a:p>
-                      <a:pPr algn="l"/>
                       <a:r>
-                        <a:rPr b="0" sz="1350" i="0" u="none">
+                        <a:rPr sz="1050" b="0">
                           <a:solidFill>
-                            <a:srgbClr val="475569"/>
+                            <a:srgbClr val="0F172A"/>
                           </a:solidFill>
-                          <a:latin typeface="DM Sans"/>
+                          <a:latin typeface="Segoe UI"/>
                         </a:rPr>
-                        <a:t>Replicación física de bloques en disco</a:t>
+                        <a:t>Por lotes (Batch) en dos fases rígidas (Map y Reduce) con I/O en disco.</a:t>
                       </a:r>
                     </a:p>
                   </a:txBody>
-                  <a:tcPr anchor="ctr" marL="63500" marR="63500" marT="25400" marB="25400">
-                    <a:lnL>
-                      <a:noFill/>
-                    </a:lnL>
-                    <a:lnR>
-                      <a:noFill/>
-                    </a:lnR>
-                    <a:lnT>
-                      <a:noFill/>
-                    </a:lnT>
-                    <a:lnB>
-                      <a:noFill/>
-                    </a:lnB>
+                  <a:tcPr anchor="ctr">
                     <a:solidFill>
-                      <a:srgbClr val="F8FAFC"/>
+                      <a:srgbClr val="F1F5F9"/>
                     </a:solidFill>
                   </a:tcPr>
                 </a:tc>
@@ -5085,33 +5261,156 @@
                     <a:bodyPr/>
                     <a:lstStyle/>
                     <a:p>
-                      <a:pPr algn="l"/>
                       <a:r>
-                        <a:rPr b="1" sz="1350" i="0" u="none">
+                        <a:rPr sz="1050" b="0">
+                          <a:solidFill>
+                            <a:srgbClr val="0B4F6C"/>
+                          </a:solidFill>
+                          <a:latin typeface="Segoe UI"/>
+                        </a:rPr>
+                        <a:t>Unificado: Batch, SQL, Streaming en tiempo real, MLlib y GraphX en memoria.</a:t>
+                      </a:r>
+                    </a:p>
+                  </a:txBody>
+                  <a:tcPr anchor="ctr">
+                    <a:solidFill>
+                      <a:srgbClr val="F1F5F9"/>
+                    </a:solidFill>
+                  </a:tcPr>
+                </a:tc>
+              </a:tr>
+              <a:tr h="502920">
+                <a:tc>
+                  <a:txBody>
+                    <a:bodyPr/>
+                    <a:lstStyle/>
+                    <a:p>
+                      <a:r>
+                        <a:rPr sz="1050" b="1">
                           <a:solidFill>
                             <a:srgbClr val="002855"/>
                           </a:solidFill>
-                          <a:latin typeface="DM Sans"/>
+                          <a:latin typeface="Segoe UI"/>
                         </a:rPr>
-                        <a:t>Linaje de datos mediante Grafos Acíclicos Dirigidos (DAG)</a:t>
+                        <a:t>3. Rendimiento</a:t>
                       </a:r>
                     </a:p>
                   </a:txBody>
-                  <a:tcPr anchor="ctr" marL="63500" marR="63500" marT="25400" marB="25400">
-                    <a:lnL>
-                      <a:noFill/>
-                    </a:lnL>
-                    <a:lnR>
-                      <a:noFill/>
-                    </a:lnR>
-                    <a:lnT>
-                      <a:noFill/>
-                    </a:lnT>
-                    <a:lnB>
-                      <a:noFill/>
-                    </a:lnB>
+                  <a:tcPr anchor="ctr">
                     <a:solidFill>
-                      <a:srgbClr val="F8FAFC"/>
+                      <a:srgbClr val="FFFFFF"/>
+                    </a:solidFill>
+                  </a:tcPr>
+                </a:tc>
+                <a:tc>
+                  <a:txBody>
+                    <a:bodyPr/>
+                    <a:lstStyle/>
+                    <a:p>
+                      <a:r>
+                        <a:rPr sz="1050" b="0">
+                          <a:solidFill>
+                            <a:srgbClr val="0F172A"/>
+                          </a:solidFill>
+                          <a:latin typeface="Segoe UI"/>
+                        </a:rPr>
+                        <a:t>Alta latencia por serialización y escritura intermedia en disco físico.</a:t>
+                      </a:r>
+                    </a:p>
+                  </a:txBody>
+                  <a:tcPr anchor="ctr">
+                    <a:solidFill>
+                      <a:srgbClr val="FFFFFF"/>
+                    </a:solidFill>
+                  </a:tcPr>
+                </a:tc>
+                <a:tc>
+                  <a:txBody>
+                    <a:bodyPr/>
+                    <a:lstStyle/>
+                    <a:p>
+                      <a:r>
+                        <a:rPr sz="1050" b="0">
+                          <a:solidFill>
+                            <a:srgbClr val="0B4F6C"/>
+                          </a:solidFill>
+                          <a:latin typeface="Segoe UI"/>
+                        </a:rPr>
+                        <a:t>Hasta 100x más veloz en RAM y 10x en disco gracias a Catalyst y Tungsten.</a:t>
+                      </a:r>
+                    </a:p>
+                  </a:txBody>
+                  <a:tcPr anchor="ctr">
+                    <a:solidFill>
+                      <a:srgbClr val="FFFFFF"/>
+                    </a:solidFill>
+                  </a:tcPr>
+                </a:tc>
+              </a:tr>
+              <a:tr h="502920">
+                <a:tc>
+                  <a:txBody>
+                    <a:bodyPr/>
+                    <a:lstStyle/>
+                    <a:p>
+                      <a:r>
+                        <a:rPr sz="1050" b="1">
+                          <a:solidFill>
+                            <a:srgbClr val="002855"/>
+                          </a:solidFill>
+                          <a:latin typeface="Segoe UI"/>
+                        </a:rPr>
+                        <a:t>4. Tolerancia y Uso</a:t>
+                      </a:r>
+                    </a:p>
+                  </a:txBody>
+                  <a:tcPr anchor="ctr">
+                    <a:solidFill>
+                      <a:srgbClr val="F1F5F9"/>
+                    </a:solidFill>
+                  </a:tcPr>
+                </a:tc>
+                <a:tc>
+                  <a:txBody>
+                    <a:bodyPr/>
+                    <a:lstStyle/>
+                    <a:p>
+                      <a:r>
+                        <a:rPr sz="1050" b="0">
+                          <a:solidFill>
+                            <a:srgbClr val="0F172A"/>
+                          </a:solidFill>
+                          <a:latin typeface="Segoe UI"/>
+                        </a:rPr>
+                        <a:t>Replicación de bloques (factor 3); ideal para ETL histórico masivo en frío.</a:t>
+                      </a:r>
+                    </a:p>
+                  </a:txBody>
+                  <a:tcPr anchor="ctr">
+                    <a:solidFill>
+                      <a:srgbClr val="F1F5F9"/>
+                    </a:solidFill>
+                  </a:tcPr>
+                </a:tc>
+                <a:tc>
+                  <a:txBody>
+                    <a:bodyPr/>
+                    <a:lstStyle/>
+                    <a:p>
+                      <a:r>
+                        <a:rPr sz="1050" b="0">
+                          <a:solidFill>
+                            <a:srgbClr val="0B4F6C"/>
+                          </a:solidFill>
+                          <a:latin typeface="Segoe UI"/>
+                        </a:rPr>
+                        <a:t>Linaje de RDDs (reconstrucción de particiones); ideal para analítica interactiva e IoT.</a:t>
+                      </a:r>
+                    </a:p>
+                  </a:txBody>
+                  <a:tcPr anchor="ctr">
+                    <a:solidFill>
+                      <a:srgbClr val="F1F5F9"/>
                     </a:solidFill>
                   </a:tcPr>
                 </a:tc>
@@ -5122,14 +5421,160 @@
       </p:graphicFrame>
       <p:sp>
         <p:nvSpPr>
+          <p:cNvPr id="6" name="Rounded Rectangle 5"/>
+          <p:cNvSpPr/>
+          <p:nvPr/>
+        </p:nvSpPr>
+        <p:spPr>
+          <a:xfrm>
+            <a:off x="548640" y="3886200"/>
+            <a:ext cx="3520440" cy="2560320"/>
+          </a:xfrm>
+          <a:prstGeom prst="roundRect">
+            <a:avLst>
+              <a:gd name="adj" fmla="val 3000"/>
+            </a:avLst>
+          </a:prstGeom>
+          <a:solidFill>
+            <a:srgbClr val="FFFFFF"/>
+          </a:solidFill>
+          <a:ln w="12700">
+            <a:solidFill>
+              <a:srgbClr val="CBD5E1"/>
+            </a:solidFill>
+          </a:ln>
+        </p:spPr>
+        <p:style>
+          <a:lnRef idx="1">
+            <a:schemeClr val="accent1"/>
+          </a:lnRef>
+          <a:fillRef idx="3">
+            <a:schemeClr val="accent1"/>
+          </a:fillRef>
+          <a:effectRef idx="2">
+            <a:schemeClr val="accent1"/>
+          </a:effectRef>
+          <a:fontRef idx="minor">
+            <a:schemeClr val="lt1"/>
+          </a:fontRef>
+        </p:style>
+        <p:txBody>
+          <a:bodyPr rtlCol="0" anchor="ctr"/>
+          <a:lstStyle/>
+          <a:p>
+            <a:pPr algn="ctr"/>
+          </a:p>
+        </p:txBody>
+      </p:sp>
+      <p:sp>
+        <p:nvSpPr>
+          <p:cNvPr id="7" name="TextBox 6"/>
+          <p:cNvSpPr txBox="1"/>
+          <p:nvPr/>
+        </p:nvSpPr>
+        <p:spPr>
+          <a:xfrm>
+            <a:off x="731520" y="4005072"/>
+            <a:ext cx="3154680" cy="2331720"/>
+          </a:xfrm>
+          <a:prstGeom prst="rect">
+            <a:avLst/>
+          </a:prstGeom>
+          <a:noFill/>
+        </p:spPr>
+        <p:txBody>
+          <a:bodyPr wrap="square">
+            <a:spAutoFit/>
+          </a:bodyPr>
+          <a:lstStyle/>
+          <a:p>
+            <a:r>
+              <a:rPr sz="1350" b="1">
+                <a:solidFill>
+                  <a:srgbClr val="E87722"/>
+                </a:solidFill>
+                <a:latin typeface="Segoe UI"/>
+              </a:rPr>
+              <a:t>RDDs: Propiedades y Operaciones</a:t>
+            </a:r>
+          </a:p>
+          <a:p>
+            <a:pPr>
+              <a:spcBef>
+                <a:spcPts val="600"/>
+              </a:spcBef>
+            </a:pPr>
+            <a:r>
+              <a:rPr sz="1050">
+                <a:solidFill>
+                  <a:srgbClr val="0F172A"/>
+                </a:solidFill>
+                <a:latin typeface="Segoe UI"/>
+              </a:rPr>
+              <a:t>• Inmutabilidad y Particionamiento: Colecciones distribuidas tolerantes a fallos mediante linaje DAG.
+• Transformaciones (Lazy): map(), filter(), flatMap(), groupByKey(), reduceByKey().
+• Acciones (Eager): collect(), count(), take(n), reduce().</a:t>
+            </a:r>
+          </a:p>
+        </p:txBody>
+      </p:sp>
+      <p:sp>
+        <p:nvSpPr>
+          <p:cNvPr id="8" name="Rounded Rectangle 7"/>
+          <p:cNvSpPr/>
+          <p:nvPr/>
+        </p:nvSpPr>
+        <p:spPr>
+          <a:xfrm>
+            <a:off x="4224528" y="3886200"/>
+            <a:ext cx="3520440" cy="2560320"/>
+          </a:xfrm>
+          <a:prstGeom prst="roundRect">
+            <a:avLst>
+              <a:gd name="adj" fmla="val 3000"/>
+            </a:avLst>
+          </a:prstGeom>
+          <a:solidFill>
+            <a:srgbClr val="FFFFFF"/>
+          </a:solidFill>
+          <a:ln w="12700">
+            <a:solidFill>
+              <a:srgbClr val="CBD5E1"/>
+            </a:solidFill>
+          </a:ln>
+        </p:spPr>
+        <p:style>
+          <a:lnRef idx="1">
+            <a:schemeClr val="accent1"/>
+          </a:lnRef>
+          <a:fillRef idx="3">
+            <a:schemeClr val="accent1"/>
+          </a:fillRef>
+          <a:effectRef idx="2">
+            <a:schemeClr val="accent1"/>
+          </a:effectRef>
+          <a:fontRef idx="minor">
+            <a:schemeClr val="lt1"/>
+          </a:fontRef>
+        </p:style>
+        <p:txBody>
+          <a:bodyPr rtlCol="0" anchor="ctr"/>
+          <a:lstStyle/>
+          <a:p>
+            <a:pPr algn="ctr"/>
+          </a:p>
+        </p:txBody>
+      </p:sp>
+      <p:sp>
+        <p:nvSpPr>
           <p:cNvPr id="9" name="TextBox 8"/>
           <p:cNvSpPr txBox="1"/>
           <p:nvPr/>
         </p:nvSpPr>
         <p:spPr>
           <a:xfrm>
-            <a:off x="609600" y="457200"/>
-            <a:ext cx="11582400" cy="171450"/>
+            <a:off x="4407408" y="4005072"/>
+            <a:ext cx="3154680" cy="2331720"/>
           </a:xfrm>
           <a:prstGeom prst="rect">
             <a:avLst/>
@@ -5137,34 +5582,98 @@
           <a:noFill/>
         </p:spPr>
         <p:txBody>
-          <a:bodyPr wrap="none" lIns="0" rIns="0" tIns="0" bIns="0" anchor="t">
+          <a:bodyPr wrap="square">
             <a:spAutoFit/>
           </a:bodyPr>
           <a:lstStyle/>
           <a:p>
-            <a:pPr algn="l"/>
-            <a:r>
-              <a:rPr b="1" sz="1050" i="0" u="none">
-                <a:solidFill>
-                  <a:srgbClr val="D87014"/>
-                </a:solidFill>
-                <a:latin typeface="DM Sans"/>
-              </a:rPr>
-              <a:t>02 · PARADIGMAS DE CÓMPUTO DISTRIBUIDO</a:t>
-            </a:r>
-          </a:p>
-        </p:txBody>
-      </p:sp>
-      <p:sp>
-        <p:nvSpPr>
-          <p:cNvPr id="10" name="TextBox 9"/>
+            <a:r>
+              <a:rPr sz="1350" b="1">
+                <a:solidFill>
+                  <a:srgbClr val="E87722"/>
+                </a:solidFill>
+                <a:latin typeface="Segoe UI"/>
+              </a:rPr>
+              <a:t>DataFrames vs. RDDs (Ventajas)</a:t>
+            </a:r>
+          </a:p>
+          <a:p>
+            <a:pPr>
+              <a:spcBef>
+                <a:spcPts val="600"/>
+              </a:spcBef>
+            </a:pPr>
+            <a:r>
+              <a:rPr sz="1050">
+                <a:solidFill>
+                  <a:srgbClr val="0F172A"/>
+                </a:solidFill>
+                <a:latin typeface="Segoe UI"/>
+              </a:rPr>
+              <a:t>• Esquema Tipado: Organización tabular con metadatos de columnas (similar a SQL/Pandas).
+• Optimizador Catalyst: Reordena filtros (predicate pushdown) y optimiza el plan lógico/físico.
+• Motor Tungsten: Gestión de memoria Off-Heap y generación de bytecode Java sin sobrecarga GC.</a:t>
+            </a:r>
+          </a:p>
+        </p:txBody>
+      </p:sp>
+      <p:sp>
+        <p:nvSpPr>
+          <p:cNvPr id="10" name="Rounded Rectangle 9"/>
+          <p:cNvSpPr/>
+          <p:nvPr/>
+        </p:nvSpPr>
+        <p:spPr>
+          <a:xfrm>
+            <a:off x="7900416" y="3886200"/>
+            <a:ext cx="3739896" cy="2560320"/>
+          </a:xfrm>
+          <a:prstGeom prst="roundRect">
+            <a:avLst>
+              <a:gd name="adj" fmla="val 3000"/>
+            </a:avLst>
+          </a:prstGeom>
+          <a:solidFill>
+            <a:srgbClr val="FFFFFF"/>
+          </a:solidFill>
+          <a:ln w="12700">
+            <a:solidFill>
+              <a:srgbClr val="CBD5E1"/>
+            </a:solidFill>
+          </a:ln>
+        </p:spPr>
+        <p:style>
+          <a:lnRef idx="1">
+            <a:schemeClr val="accent1"/>
+          </a:lnRef>
+          <a:fillRef idx="3">
+            <a:schemeClr val="accent1"/>
+          </a:fillRef>
+          <a:effectRef idx="2">
+            <a:schemeClr val="accent1"/>
+          </a:effectRef>
+          <a:fontRef idx="minor">
+            <a:schemeClr val="lt1"/>
+          </a:fontRef>
+        </p:style>
+        <p:txBody>
+          <a:bodyPr rtlCol="0" anchor="ctr"/>
+          <a:lstStyle/>
+          <a:p>
+            <a:pPr algn="ctr"/>
+          </a:p>
+        </p:txBody>
+      </p:sp>
+      <p:sp>
+        <p:nvSpPr>
+          <p:cNvPr id="11" name="TextBox 10"/>
           <p:cNvSpPr txBox="1"/>
           <p:nvPr/>
         </p:nvSpPr>
         <p:spPr>
           <a:xfrm>
-            <a:off x="609600" y="685800"/>
-            <a:ext cx="11582400" cy="409575"/>
+            <a:off x="8083296" y="4005072"/>
+            <a:ext cx="3374136" cy="2331720"/>
           </a:xfrm>
           <a:prstGeom prst="rect">
             <a:avLst/>
@@ -5172,266 +5681,36 @@
           <a:noFill/>
         </p:spPr>
         <p:txBody>
-          <a:bodyPr wrap="none" lIns="0" rIns="0" tIns="0" bIns="0" anchor="t">
+          <a:bodyPr wrap="square">
             <a:spAutoFit/>
           </a:bodyPr>
           <a:lstStyle/>
           <a:p>
-            <a:pPr algn="l"/>
-            <a:r>
-              <a:rPr b="1" sz="2550" i="0" u="none">
-                <a:solidFill>
-                  <a:srgbClr val="002855"/>
-                </a:solidFill>
-                <a:latin typeface="Space Grotesk"/>
-              </a:rPr>
-              <a:t>Fundamentación Teórica: Spark vs. Hadoop y RDDs</a:t>
-            </a:r>
-          </a:p>
-        </p:txBody>
-      </p:sp>
-      <p:sp>
-        <p:nvSpPr>
-          <p:cNvPr id="11" name="TextBox 10"/>
-          <p:cNvSpPr txBox="1"/>
-          <p:nvPr/>
-        </p:nvSpPr>
-        <p:spPr>
-          <a:xfrm>
-            <a:off x="876300" y="5324475"/>
-            <a:ext cx="3900487" cy="257175"/>
-          </a:xfrm>
-          <a:prstGeom prst="rect">
-            <a:avLst/>
-          </a:prstGeom>
-          <a:noFill/>
-        </p:spPr>
-        <p:txBody>
-          <a:bodyPr wrap="none" lIns="304800" rIns="0" tIns="0" bIns="0" anchor="t">
-            <a:spAutoFit/>
-          </a:bodyPr>
-          <a:lstStyle/>
-          <a:p>
-            <a:pPr algn="l"/>
-            <a:r>
-              <a:rPr b="1" sz="1575" i="0" u="none">
-                <a:solidFill>
-                  <a:srgbClr val="002855"/>
-                </a:solidFill>
-                <a:latin typeface="Space Grotesk"/>
-              </a:rPr>
-              <a:t>Arquitectura RDD</a:t>
-            </a:r>
-          </a:p>
-        </p:txBody>
-      </p:sp>
-      <p:sp>
-        <p:nvSpPr>
-          <p:cNvPr id="12" name="TextBox 11"/>
-          <p:cNvSpPr txBox="1"/>
-          <p:nvPr/>
-        </p:nvSpPr>
-        <p:spPr>
-          <a:xfrm>
-            <a:off x="876300" y="5676900"/>
-            <a:ext cx="3067050" cy="457200"/>
-          </a:xfrm>
-          <a:prstGeom prst="rect">
-            <a:avLst/>
-          </a:prstGeom>
-          <a:noFill/>
-        </p:spPr>
-        <p:txBody>
-          <a:bodyPr wrap="square" lIns="0" rIns="0" tIns="0" bIns="0" anchor="t">
-            <a:spAutoFit/>
-          </a:bodyPr>
-          <a:lstStyle/>
-          <a:p>
-            <a:pPr algn="l"/>
-            <a:r>
-              <a:rPr b="0" sz="1350" i="0" u="none">
-                <a:solidFill>
-                  <a:srgbClr val="334155"/>
-                </a:solidFill>
-                <a:latin typeface="DM Sans"/>
-              </a:rPr>
-              <a:t>Colecciones inmutables distribuidas con evaluación perezosa.</a:t>
-            </a:r>
-          </a:p>
-        </p:txBody>
-      </p:sp>
-      <p:sp>
-        <p:nvSpPr>
-          <p:cNvPr id="13" name="TextBox 12"/>
-          <p:cNvSpPr txBox="1"/>
-          <p:nvPr/>
-        </p:nvSpPr>
-        <p:spPr>
-          <a:xfrm>
-            <a:off x="4610100" y="5324475"/>
-            <a:ext cx="3900487" cy="257175"/>
-          </a:xfrm>
-          <a:prstGeom prst="rect">
-            <a:avLst/>
-          </a:prstGeom>
-          <a:noFill/>
-        </p:spPr>
-        <p:txBody>
-          <a:bodyPr wrap="none" lIns="247650" rIns="0" tIns="0" bIns="0" anchor="t">
-            <a:spAutoFit/>
-          </a:bodyPr>
-          <a:lstStyle/>
-          <a:p>
-            <a:pPr algn="l"/>
-            <a:r>
-              <a:rPr b="1" sz="1575" i="0" u="none">
-                <a:solidFill>
-                  <a:srgbClr val="002855"/>
-                </a:solidFill>
-                <a:latin typeface="Space Grotesk"/>
-              </a:rPr>
-              <a:t>Operaciones RDD</a:t>
-            </a:r>
-          </a:p>
-        </p:txBody>
-      </p:sp>
-      <p:sp>
-        <p:nvSpPr>
-          <p:cNvPr id="14" name="TextBox 13"/>
-          <p:cNvSpPr txBox="1"/>
-          <p:nvPr/>
-        </p:nvSpPr>
-        <p:spPr>
-          <a:xfrm>
-            <a:off x="4610100" y="5676900"/>
-            <a:ext cx="3067050" cy="457200"/>
-          </a:xfrm>
-          <a:prstGeom prst="rect">
-            <a:avLst/>
-          </a:prstGeom>
-          <a:noFill/>
-        </p:spPr>
-        <p:txBody>
-          <a:bodyPr wrap="square" lIns="0" rIns="0" tIns="0" bIns="0" anchor="t">
-            <a:spAutoFit/>
-          </a:bodyPr>
-          <a:lstStyle/>
-          <a:p>
-            <a:pPr algn="l"/>
-            <a:r>
-              <a:rPr b="0" sz="1350" i="0" u="none">
-                <a:solidFill>
-                  <a:srgbClr val="334155"/>
-                </a:solidFill>
-                <a:latin typeface="DM Sans"/>
-              </a:rPr>
-              <a:t>Transformaciones </a:t>
-            </a:r>
-            <a:r>
-              <a:rPr b="0" sz="1350" i="0" u="none">
-                <a:solidFill>
-                  <a:srgbClr val="334155"/>
-                </a:solidFill>
-                <a:latin typeface="DM Sans"/>
-              </a:rPr>
-              <a:t>map/filter</a:t>
-            </a:r>
-            <a:r>
-              <a:rPr b="0" sz="1350" i="0" u="none">
-                <a:solidFill>
-                  <a:srgbClr val="334155"/>
-                </a:solidFill>
-                <a:latin typeface="DM Sans"/>
-              </a:rPr>
-              <a:t> vs. acciones </a:t>
-            </a:r>
-            <a:r>
-              <a:rPr b="0" sz="1350" i="0" u="none">
-                <a:solidFill>
-                  <a:srgbClr val="334155"/>
-                </a:solidFill>
-                <a:latin typeface="DM Sans"/>
-              </a:rPr>
-              <a:t>count/collect</a:t>
-            </a:r>
-            <a:r>
-              <a:rPr b="0" sz="1350" i="0" u="none">
-                <a:solidFill>
-                  <a:srgbClr val="334155"/>
-                </a:solidFill>
-                <a:latin typeface="DM Sans"/>
-              </a:rPr>
-              <a:t>.</a:t>
-            </a:r>
-          </a:p>
-        </p:txBody>
-      </p:sp>
-      <p:sp>
-        <p:nvSpPr>
-          <p:cNvPr id="15" name="TextBox 14"/>
-          <p:cNvSpPr txBox="1"/>
-          <p:nvPr/>
-        </p:nvSpPr>
-        <p:spPr>
-          <a:xfrm>
-            <a:off x="8343900" y="5324475"/>
-            <a:ext cx="3848100" cy="257175"/>
-          </a:xfrm>
-          <a:prstGeom prst="rect">
-            <a:avLst/>
-          </a:prstGeom>
-          <a:noFill/>
-        </p:spPr>
-        <p:txBody>
-          <a:bodyPr wrap="none" lIns="247650" rIns="0" tIns="0" bIns="0" anchor="t">
-            <a:spAutoFit/>
-          </a:bodyPr>
-          <a:lstStyle/>
-          <a:p>
-            <a:pPr algn="l"/>
-            <a:r>
-              <a:rPr b="1" sz="1575" i="0" u="none">
-                <a:solidFill>
-                  <a:srgbClr val="002855"/>
-                </a:solidFill>
-                <a:latin typeface="Space Grotesk"/>
-              </a:rPr>
-              <a:t>Catalyst y Tungsten</a:t>
-            </a:r>
-          </a:p>
-        </p:txBody>
-      </p:sp>
-      <p:sp>
-        <p:nvSpPr>
-          <p:cNvPr id="16" name="TextBox 15"/>
-          <p:cNvSpPr txBox="1"/>
-          <p:nvPr/>
-        </p:nvSpPr>
-        <p:spPr>
-          <a:xfrm>
-            <a:off x="8343900" y="5676900"/>
-            <a:ext cx="3067050" cy="457200"/>
-          </a:xfrm>
-          <a:prstGeom prst="rect">
-            <a:avLst/>
-          </a:prstGeom>
-          <a:noFill/>
-        </p:spPr>
-        <p:txBody>
-          <a:bodyPr wrap="square" lIns="0" rIns="0" tIns="0" bIns="0" anchor="t">
-            <a:spAutoFit/>
-          </a:bodyPr>
-          <a:lstStyle/>
-          <a:p>
-            <a:pPr algn="l"/>
-            <a:r>
-              <a:rPr b="0" sz="1350" i="0" u="none">
-                <a:solidFill>
-                  <a:srgbClr val="334155"/>
-                </a:solidFill>
-                <a:latin typeface="DM Sans"/>
-              </a:rPr>
-              <a:t>Predicate pushdown en DataFrames con memoria Off-Heap.</a:t>
+            <a:r>
+              <a:rPr sz="1350" b="1">
+                <a:solidFill>
+                  <a:srgbClr val="E87722"/>
+                </a:solidFill>
+                <a:latin typeface="Segoe UI"/>
+              </a:rPr>
+              <a:t>Arquitectura de Apache Kafka</a:t>
+            </a:r>
+          </a:p>
+          <a:p>
+            <a:pPr>
+              <a:spcBef>
+                <a:spcPts val="600"/>
+              </a:spcBef>
+            </a:pPr>
+            <a:r>
+              <a:rPr sz="1050">
+                <a:solidFill>
+                  <a:srgbClr val="0F172A"/>
+                </a:solidFill>
+                <a:latin typeface="Segoe UI"/>
+              </a:rPr>
+              <a:t>• Flujo: Producers (IoT) ➔ Broker Kafka (Topics divididos en Partitions con Offset secuencial) ➔ Consumers (Spark Streaming).
+• Escalabilidad y Retención: Log inmutable en disco con replicación entre Brokers y coordinación de clúster vía ZooKeeper/KRaft.</a:t>
             </a:r>
           </a:p>
         </p:txBody>
@@ -5447,14 +5726,6 @@
 <file path=ppt/slides/slide4.xml><?xml version="1.0" encoding="utf-8"?>
 <p:sld xmlns:a="http://schemas.openxmlformats.org/drawingml/2006/main" xmlns:p="http://schemas.openxmlformats.org/presentationml/2006/main" xmlns:r="http://schemas.openxmlformats.org/officeDocument/2006/relationships">
   <p:cSld>
-    <p:bg>
-      <p:bgPr>
-        <a:solidFill>
-          <a:srgbClr val="FFFFFF"/>
-        </a:solidFill>
-        <a:effectLst/>
-      </p:bgPr>
-    </p:bg>
     <p:spTree>
       <p:nvGrpSpPr>
         <p:cNvPr id="1" name=""/>
@@ -5464,18 +5735,129 @@
       <p:grpSpPr/>
       <p:sp>
         <p:nvSpPr>
-          <p:cNvPr id="2" name="Rounded Rectangle 1"/>
+          <p:cNvPr id="2" name="Rectangle 1"/>
           <p:cNvSpPr/>
           <p:nvPr/>
         </p:nvSpPr>
         <p:spPr>
           <a:xfrm>
-            <a:off x="609600" y="1285875"/>
-            <a:ext cx="2628900" cy="1009650"/>
+            <a:off x="0" y="0"/>
+            <a:ext cx="12191695" cy="6858000"/>
+          </a:xfrm>
+          <a:prstGeom prst="rect">
+            <a:avLst/>
+          </a:prstGeom>
+          <a:solidFill>
+            <a:srgbClr val="F8FAFC"/>
+          </a:solidFill>
+          <a:ln>
+            <a:noFill/>
+          </a:ln>
+        </p:spPr>
+        <p:style>
+          <a:lnRef idx="1">
+            <a:schemeClr val="accent1"/>
+          </a:lnRef>
+          <a:fillRef idx="3">
+            <a:schemeClr val="accent1"/>
+          </a:fillRef>
+          <a:effectRef idx="2">
+            <a:schemeClr val="accent1"/>
+          </a:effectRef>
+          <a:fontRef idx="minor">
+            <a:schemeClr val="lt1"/>
+          </a:fontRef>
+        </p:style>
+        <p:txBody>
+          <a:bodyPr rtlCol="0" anchor="ctr"/>
+          <a:lstStyle/>
+          <a:p>
+            <a:pPr algn="ctr"/>
+          </a:p>
+        </p:txBody>
+      </p:sp>
+      <p:sp>
+        <p:nvSpPr>
+          <p:cNvPr id="3" name="TextBox 2"/>
+          <p:cNvSpPr txBox="1"/>
+          <p:nvPr/>
+        </p:nvSpPr>
+        <p:spPr>
+          <a:xfrm>
+            <a:off x="548640" y="320040"/>
+            <a:ext cx="11064240" cy="256032"/>
+          </a:xfrm>
+          <a:prstGeom prst="rect">
+            <a:avLst/>
+          </a:prstGeom>
+          <a:noFill/>
+        </p:spPr>
+        <p:txBody>
+          <a:bodyPr wrap="square" lIns="0" tIns="0" rIns="0" bIns="0">
+            <a:spAutoFit/>
+          </a:bodyPr>
+          <a:lstStyle/>
+          <a:p>
+            <a:r>
+              <a:rPr sz="1050" b="1">
+                <a:solidFill>
+                  <a:srgbClr val="E87722"/>
+                </a:solidFill>
+                <a:latin typeface="Segoe UI"/>
+              </a:rPr>
+              <a:t>03 · IMPLEMENTACIÓN Y EJECUCIÓN EN BATCH (PYSPARK)</a:t>
+            </a:r>
+          </a:p>
+        </p:txBody>
+      </p:sp>
+      <p:sp>
+        <p:nvSpPr>
+          <p:cNvPr id="4" name="TextBox 3"/>
+          <p:cNvSpPr txBox="1"/>
+          <p:nvPr/>
+        </p:nvSpPr>
+        <p:spPr>
+          <a:xfrm>
+            <a:off x="548640" y="548640"/>
+            <a:ext cx="11091672" cy="438912"/>
+          </a:xfrm>
+          <a:prstGeom prst="rect">
+            <a:avLst/>
+          </a:prstGeom>
+          <a:noFill/>
+        </p:spPr>
+        <p:txBody>
+          <a:bodyPr wrap="square" lIns="0" tIns="0" rIns="0" bIns="0">
+            <a:spAutoFit/>
+          </a:bodyPr>
+          <a:lstStyle/>
+          <a:p>
+            <a:r>
+              <a:rPr sz="2100" b="1">
+                <a:solidFill>
+                  <a:srgbClr val="002855"/>
+                </a:solidFill>
+                <a:latin typeface="Segoe UI"/>
+              </a:rPr>
+              <a:t>Código Desarrollado (batch_analysis.py) y Salida Real en Consola Linux</a:t>
+            </a:r>
+          </a:p>
+        </p:txBody>
+      </p:sp>
+      <p:sp>
+        <p:nvSpPr>
+          <p:cNvPr id="5" name="Rounded Rectangle 4"/>
+          <p:cNvSpPr/>
+          <p:nvPr/>
+        </p:nvSpPr>
+        <p:spPr>
+          <a:xfrm>
+            <a:off x="548640" y="1143000"/>
+            <a:ext cx="2651760" cy="841248"/>
           </a:xfrm>
           <a:prstGeom prst="roundRect">
             <a:avLst>
-              <a:gd name="adj" fmla="val 9433"/>
+              <a:gd name="adj" fmla="val 3000"/>
             </a:avLst>
           </a:prstGeom>
           <a:solidFill>
@@ -5484,7 +5866,6 @@
           <a:ln>
             <a:noFill/>
           </a:ln>
-          <a:effectLst/>
         </p:spPr>
         <p:style>
           <a:lnRef idx="1">
@@ -5510,18 +5891,68 @@
       </p:sp>
       <p:sp>
         <p:nvSpPr>
-          <p:cNvPr id="3" name="Rounded Rectangle 2"/>
+          <p:cNvPr id="6" name="TextBox 5"/>
+          <p:cNvSpPr txBox="1"/>
+          <p:nvPr/>
+        </p:nvSpPr>
+        <p:spPr>
+          <a:xfrm>
+            <a:off x="685800" y="1207008"/>
+            <a:ext cx="2377440" cy="713232"/>
+          </a:xfrm>
+          <a:prstGeom prst="rect">
+            <a:avLst/>
+          </a:prstGeom>
+          <a:noFill/>
+        </p:spPr>
+        <p:txBody>
+          <a:bodyPr wrap="square">
+            <a:spAutoFit/>
+          </a:bodyPr>
+          <a:lstStyle/>
+          <a:p>
+            <a:r>
+              <a:rPr sz="1050" b="1">
+                <a:solidFill>
+                  <a:srgbClr val="F2A900"/>
+                </a:solidFill>
+                <a:latin typeface="Segoe UI"/>
+              </a:rPr>
+              <a:t>PASO 1 · INGESTA CSV</a:t>
+            </a:r>
+          </a:p>
+          <a:p>
+            <a:pPr>
+              <a:spcBef>
+                <a:spcPts val="200"/>
+              </a:spcBef>
+            </a:pPr>
+            <a:r>
+              <a:rPr sz="1000">
+                <a:solidFill>
+                  <a:srgbClr val="FFFFFF"/>
+                </a:solidFill>
+                <a:latin typeface="Segoe UI"/>
+              </a:rPr>
+              <a:t>Lectura de 60.000 registros con inferSchema=True</a:t>
+            </a:r>
+          </a:p>
+        </p:txBody>
+      </p:sp>
+      <p:sp>
+        <p:nvSpPr>
+          <p:cNvPr id="7" name="Rounded Rectangle 6"/>
           <p:cNvSpPr/>
           <p:nvPr/>
         </p:nvSpPr>
         <p:spPr>
           <a:xfrm>
-            <a:off x="3390900" y="1285875"/>
-            <a:ext cx="2628900" cy="1009650"/>
+            <a:off x="3364992" y="1143000"/>
+            <a:ext cx="2651760" cy="841248"/>
           </a:xfrm>
           <a:prstGeom prst="roundRect">
             <a:avLst>
-              <a:gd name="adj" fmla="val 9433"/>
+              <a:gd name="adj" fmla="val 3000"/>
             </a:avLst>
           </a:prstGeom>
           <a:solidFill>
@@ -5530,7 +5961,6 @@
           <a:ln>
             <a:noFill/>
           </a:ln>
-          <a:effectLst/>
         </p:spPr>
         <p:style>
           <a:lnRef idx="1">
@@ -5556,18 +5986,68 @@
       </p:sp>
       <p:sp>
         <p:nvSpPr>
-          <p:cNvPr id="4" name="Rounded Rectangle 3"/>
+          <p:cNvPr id="8" name="TextBox 7"/>
+          <p:cNvSpPr txBox="1"/>
+          <p:nvPr/>
+        </p:nvSpPr>
+        <p:spPr>
+          <a:xfrm>
+            <a:off x="3502152" y="1207008"/>
+            <a:ext cx="2377440" cy="713232"/>
+          </a:xfrm>
+          <a:prstGeom prst="rect">
+            <a:avLst/>
+          </a:prstGeom>
+          <a:noFill/>
+        </p:spPr>
+        <p:txBody>
+          <a:bodyPr wrap="square">
+            <a:spAutoFit/>
+          </a:bodyPr>
+          <a:lstStyle/>
+          <a:p>
+            <a:r>
+              <a:rPr sz="1050" b="1">
+                <a:solidFill>
+                  <a:srgbClr val="F2A900"/>
+                </a:solidFill>
+                <a:latin typeface="Segoe UI"/>
+              </a:rPr>
+              <a:t>PASO 2 · LIMPIEZA</a:t>
+            </a:r>
+          </a:p>
+          <a:p>
+            <a:pPr>
+              <a:spcBef>
+                <a:spcPts val="200"/>
+              </a:spcBef>
+            </a:pPr>
+            <a:r>
+              <a:rPr sz="1000">
+                <a:solidFill>
+                  <a:srgbClr val="FFFFFF"/>
+                </a:solidFill>
+                <a:latin typeface="Segoe UI"/>
+              </a:rPr>
+              <a:t>Casting Double/Timestamp y filtro (59.091 válidos)</a:t>
+            </a:r>
+          </a:p>
+        </p:txBody>
+      </p:sp>
+      <p:sp>
+        <p:nvSpPr>
+          <p:cNvPr id="9" name="Rounded Rectangle 8"/>
           <p:cNvSpPr/>
           <p:nvPr/>
         </p:nvSpPr>
         <p:spPr>
           <a:xfrm>
-            <a:off x="6172200" y="1285875"/>
-            <a:ext cx="2628900" cy="1009650"/>
+            <a:off x="6181344" y="1143000"/>
+            <a:ext cx="2651760" cy="841248"/>
           </a:xfrm>
           <a:prstGeom prst="roundRect">
             <a:avLst>
-              <a:gd name="adj" fmla="val 9433"/>
+              <a:gd name="adj" fmla="val 3000"/>
             </a:avLst>
           </a:prstGeom>
           <a:solidFill>
@@ -5576,7 +6056,6 @@
           <a:ln>
             <a:noFill/>
           </a:ln>
-          <a:effectLst/>
         </p:spPr>
         <p:style>
           <a:lnRef idx="1">
@@ -5602,18 +6081,68 @@
       </p:sp>
       <p:sp>
         <p:nvSpPr>
-          <p:cNvPr id="5" name="Rounded Rectangle 4"/>
+          <p:cNvPr id="10" name="TextBox 9"/>
+          <p:cNvSpPr txBox="1"/>
+          <p:nvPr/>
+        </p:nvSpPr>
+        <p:spPr>
+          <a:xfrm>
+            <a:off x="6318504" y="1207008"/>
+            <a:ext cx="2377440" cy="713232"/>
+          </a:xfrm>
+          <a:prstGeom prst="rect">
+            <a:avLst/>
+          </a:prstGeom>
+          <a:noFill/>
+        </p:spPr>
+        <p:txBody>
+          <a:bodyPr wrap="square">
+            <a:spAutoFit/>
+          </a:bodyPr>
+          <a:lstStyle/>
+          <a:p>
+            <a:r>
+              <a:rPr sz="1050" b="1">
+                <a:solidFill>
+                  <a:srgbClr val="F2A900"/>
+                </a:solidFill>
+                <a:latin typeface="Segoe UI"/>
+              </a:rPr>
+              <a:t>PASO 3 · API RDDs</a:t>
+            </a:r>
+          </a:p>
+          <a:p>
+            <a:pPr>
+              <a:spcBef>
+                <a:spcPts val="200"/>
+              </a:spcBef>
+            </a:pPr>
+            <a:r>
+              <a:rPr sz="1000">
+                <a:solidFill>
+                  <a:srgbClr val="FFFFFF"/>
+                </a:solidFill>
+                <a:latin typeface="Segoe UI"/>
+              </a:rPr>
+              <a:t>filter(PM2.5), map() y reduceByKey() por depto.</a:t>
+            </a:r>
+          </a:p>
+        </p:txBody>
+      </p:sp>
+      <p:sp>
+        <p:nvSpPr>
+          <p:cNvPr id="11" name="Rounded Rectangle 10"/>
           <p:cNvSpPr/>
           <p:nvPr/>
         </p:nvSpPr>
         <p:spPr>
           <a:xfrm>
-            <a:off x="8953500" y="1285875"/>
-            <a:ext cx="2628900" cy="1009650"/>
+            <a:off x="8997696" y="1143000"/>
+            <a:ext cx="2651760" cy="841248"/>
           </a:xfrm>
           <a:prstGeom prst="roundRect">
             <a:avLst>
-              <a:gd name="adj" fmla="val 9433"/>
+              <a:gd name="adj" fmla="val 3000"/>
             </a:avLst>
           </a:prstGeom>
           <a:solidFill>
@@ -5622,7 +6151,6 @@
           <a:ln>
             <a:noFill/>
           </a:ln>
-          <a:effectLst/>
         </p:spPr>
         <p:style>
           <a:lnRef idx="1">
@@ -5646,9 +6174,106 @@
           </a:p>
         </p:txBody>
       </p:sp>
+      <p:sp>
+        <p:nvSpPr>
+          <p:cNvPr id="12" name="TextBox 11"/>
+          <p:cNvSpPr txBox="1"/>
+          <p:nvPr/>
+        </p:nvSpPr>
+        <p:spPr>
+          <a:xfrm>
+            <a:off x="9134856" y="1207008"/>
+            <a:ext cx="2377440" cy="713232"/>
+          </a:xfrm>
+          <a:prstGeom prst="rect">
+            <a:avLst/>
+          </a:prstGeom>
+          <a:noFill/>
+        </p:spPr>
+        <p:txBody>
+          <a:bodyPr wrap="square">
+            <a:spAutoFit/>
+          </a:bodyPr>
+          <a:lstStyle/>
+          <a:p>
+            <a:r>
+              <a:rPr sz="1050" b="1">
+                <a:solidFill>
+                  <a:srgbClr val="F2A900"/>
+                </a:solidFill>
+                <a:latin typeface="Segoe UI"/>
+              </a:rPr>
+              <a:t>PASO 4 · SPARK SQL</a:t>
+            </a:r>
+          </a:p>
+          <a:p>
+            <a:pPr>
+              <a:spcBef>
+                <a:spcPts val="200"/>
+              </a:spcBef>
+            </a:pPr>
+            <a:r>
+              <a:rPr sz="1000">
+                <a:solidFill>
+                  <a:srgbClr val="FFFFFF"/>
+                </a:solidFill>
+                <a:latin typeface="Segoe UI"/>
+              </a:rPr>
+              <a:t>DataFrames groupBy, agg() y ranking de estaciones</a:t>
+            </a:r>
+          </a:p>
+        </p:txBody>
+      </p:sp>
+      <p:sp>
+        <p:nvSpPr>
+          <p:cNvPr id="13" name="Rounded Rectangle 12"/>
+          <p:cNvSpPr/>
+          <p:nvPr/>
+        </p:nvSpPr>
+        <p:spPr>
+          <a:xfrm>
+            <a:off x="548640" y="2103120"/>
+            <a:ext cx="11091672" cy="4434840"/>
+          </a:xfrm>
+          <a:prstGeom prst="roundRect">
+            <a:avLst>
+              <a:gd name="adj" fmla="val 3000"/>
+            </a:avLst>
+          </a:prstGeom>
+          <a:solidFill>
+            <a:srgbClr val="FFFFFF"/>
+          </a:solidFill>
+          <a:ln w="12700">
+            <a:solidFill>
+              <a:srgbClr val="CBD5E1"/>
+            </a:solidFill>
+          </a:ln>
+        </p:spPr>
+        <p:style>
+          <a:lnRef idx="1">
+            <a:schemeClr val="accent1"/>
+          </a:lnRef>
+          <a:fillRef idx="3">
+            <a:schemeClr val="accent1"/>
+          </a:fillRef>
+          <a:effectRef idx="2">
+            <a:schemeClr val="accent1"/>
+          </a:effectRef>
+          <a:fontRef idx="minor">
+            <a:schemeClr val="lt1"/>
+          </a:fontRef>
+        </p:style>
+        <p:txBody>
+          <a:bodyPr rtlCol="0" anchor="ctr"/>
+          <a:lstStyle/>
+          <a:p>
+            <a:pPr algn="ctr"/>
+          </a:p>
+        </p:txBody>
+      </p:sp>
       <p:pic>
         <p:nvPicPr>
-          <p:cNvPr id="6" name="Picture 5" descr="image.png"/>
+          <p:cNvPr id="14" name="Picture 13" descr="captura_batch_terminal_real.png"/>
           <p:cNvPicPr>
             <a:picLocks noChangeAspect="1"/>
           </p:cNvPicPr>
@@ -5662,406 +6287,8 @@
         </p:blipFill>
         <p:spPr>
           <a:xfrm>
-            <a:off x="0" y="0"/>
-            <a:ext cx="12192000" cy="6858000"/>
-          </a:xfrm>
-          <a:prstGeom prst="rect">
-            <a:avLst/>
-          </a:prstGeom>
-        </p:spPr>
-      </p:pic>
-      <p:sp>
-        <p:nvSpPr>
-          <p:cNvPr id="7" name="TextBox 6"/>
-          <p:cNvSpPr txBox="1"/>
-          <p:nvPr/>
-        </p:nvSpPr>
-        <p:spPr>
-          <a:xfrm>
-            <a:off x="609600" y="457200"/>
-            <a:ext cx="11582400" cy="171450"/>
-          </a:xfrm>
-          <a:prstGeom prst="rect">
-            <a:avLst/>
-          </a:prstGeom>
-          <a:noFill/>
-        </p:spPr>
-        <p:txBody>
-          <a:bodyPr wrap="none" lIns="0" rIns="0" tIns="0" bIns="0" anchor="t">
-            <a:spAutoFit/>
-          </a:bodyPr>
-          <a:lstStyle/>
-          <a:p>
-            <a:pPr algn="l"/>
-            <a:r>
-              <a:rPr b="1" sz="1050" i="0" u="none">
-                <a:solidFill>
-                  <a:srgbClr val="D87014"/>
-                </a:solidFill>
-                <a:latin typeface="DM Sans"/>
-              </a:rPr>
-              <a:t>03 · PROCESAMIENTO POR LOTES EN PYSPARK</a:t>
-            </a:r>
-          </a:p>
-        </p:txBody>
-      </p:sp>
-      <p:sp>
-        <p:nvSpPr>
-          <p:cNvPr id="8" name="TextBox 7"/>
-          <p:cNvSpPr txBox="1"/>
-          <p:nvPr/>
-        </p:nvSpPr>
-        <p:spPr>
-          <a:xfrm>
-            <a:off x="609600" y="685800"/>
-            <a:ext cx="11582400" cy="409575"/>
-          </a:xfrm>
-          <a:prstGeom prst="rect">
-            <a:avLst/>
-          </a:prstGeom>
-          <a:noFill/>
-        </p:spPr>
-        <p:txBody>
-          <a:bodyPr wrap="none" lIns="0" rIns="0" tIns="0" bIns="0" anchor="t">
-            <a:spAutoFit/>
-          </a:bodyPr>
-          <a:lstStyle/>
-          <a:p>
-            <a:pPr algn="l"/>
-            <a:r>
-              <a:rPr b="1" sz="2550" i="0" u="none">
-                <a:solidFill>
-                  <a:srgbClr val="002855"/>
-                </a:solidFill>
-                <a:latin typeface="Space Grotesk"/>
-              </a:rPr>
-              <a:t>Arquitectura de Procesamiento Batch y Resultados</a:t>
-            </a:r>
-          </a:p>
-        </p:txBody>
-      </p:sp>
-      <p:sp>
-        <p:nvSpPr>
-          <p:cNvPr id="9" name="TextBox 8"/>
-          <p:cNvSpPr txBox="1"/>
-          <p:nvPr/>
-        </p:nvSpPr>
-        <p:spPr>
-          <a:xfrm>
-            <a:off x="781050" y="1457325"/>
-            <a:ext cx="2857500" cy="171450"/>
-          </a:xfrm>
-          <a:prstGeom prst="rect">
-            <a:avLst/>
-          </a:prstGeom>
-          <a:noFill/>
-        </p:spPr>
-        <p:txBody>
-          <a:bodyPr wrap="none" lIns="0" rIns="0" tIns="0" bIns="0" anchor="t">
-            <a:spAutoFit/>
-          </a:bodyPr>
-          <a:lstStyle/>
-          <a:p>
-            <a:pPr algn="l"/>
-            <a:r>
-              <a:rPr b="1" sz="1050" i="0" u="none">
-                <a:solidFill>
-                  <a:srgbClr val="D87014"/>
-                </a:solidFill>
-                <a:latin typeface="DM Sans"/>
-              </a:rPr>
-              <a:t>PASO 1 · INGESTA</a:t>
-            </a:r>
-          </a:p>
-        </p:txBody>
-      </p:sp>
-      <p:sp>
-        <p:nvSpPr>
-          <p:cNvPr id="10" name="TextBox 9"/>
-          <p:cNvSpPr txBox="1"/>
-          <p:nvPr/>
-        </p:nvSpPr>
-        <p:spPr>
-          <a:xfrm>
-            <a:off x="781050" y="1666875"/>
-            <a:ext cx="2381250" cy="457200"/>
-          </a:xfrm>
-          <a:prstGeom prst="rect">
-            <a:avLst/>
-          </a:prstGeom>
-          <a:noFill/>
-        </p:spPr>
-        <p:txBody>
-          <a:bodyPr wrap="square" lIns="0" rIns="0" tIns="0" bIns="0" anchor="t">
-            <a:spAutoFit/>
-          </a:bodyPr>
-          <a:lstStyle/>
-          <a:p>
-            <a:pPr algn="l"/>
-            <a:r>
-              <a:rPr b="1" sz="1350" i="0" u="none">
-                <a:solidFill>
-                  <a:srgbClr val="FFFFFF"/>
-                </a:solidFill>
-                <a:latin typeface="DM Sans"/>
-              </a:rPr>
-              <a:t>Carga CSV e inferencia de esquema</a:t>
-            </a:r>
-          </a:p>
-        </p:txBody>
-      </p:sp>
-      <p:sp>
-        <p:nvSpPr>
-          <p:cNvPr id="11" name="TextBox 10"/>
-          <p:cNvSpPr txBox="1"/>
-          <p:nvPr/>
-        </p:nvSpPr>
-        <p:spPr>
-          <a:xfrm>
-            <a:off x="3562350" y="1457325"/>
-            <a:ext cx="2857500" cy="171450"/>
-          </a:xfrm>
-          <a:prstGeom prst="rect">
-            <a:avLst/>
-          </a:prstGeom>
-          <a:noFill/>
-        </p:spPr>
-        <p:txBody>
-          <a:bodyPr wrap="none" lIns="0" rIns="0" tIns="0" bIns="0" anchor="t">
-            <a:spAutoFit/>
-          </a:bodyPr>
-          <a:lstStyle/>
-          <a:p>
-            <a:pPr algn="l"/>
-            <a:r>
-              <a:rPr b="1" sz="1050" i="0" u="none">
-                <a:solidFill>
-                  <a:srgbClr val="D87014"/>
-                </a:solidFill>
-                <a:latin typeface="DM Sans"/>
-              </a:rPr>
-              <a:t>PASO 2 · LIMPIEZA</a:t>
-            </a:r>
-          </a:p>
-        </p:txBody>
-      </p:sp>
-      <p:sp>
-        <p:nvSpPr>
-          <p:cNvPr id="12" name="TextBox 11"/>
-          <p:cNvSpPr txBox="1"/>
-          <p:nvPr/>
-        </p:nvSpPr>
-        <p:spPr>
-          <a:xfrm>
-            <a:off x="3562350" y="1666875"/>
-            <a:ext cx="2381250" cy="457200"/>
-          </a:xfrm>
-          <a:prstGeom prst="rect">
-            <a:avLst/>
-          </a:prstGeom>
-          <a:noFill/>
-        </p:spPr>
-        <p:txBody>
-          <a:bodyPr wrap="square" lIns="0" rIns="0" tIns="0" bIns="0" anchor="t">
-            <a:spAutoFit/>
-          </a:bodyPr>
-          <a:lstStyle/>
-          <a:p>
-            <a:pPr algn="l"/>
-            <a:r>
-              <a:rPr b="1" sz="1350" i="0" u="none">
-                <a:solidFill>
-                  <a:srgbClr val="FFFFFF"/>
-                </a:solidFill>
-                <a:latin typeface="DM Sans"/>
-              </a:rPr>
-              <a:t>Casteo de tipos (59.091 válidos)</a:t>
-            </a:r>
-          </a:p>
-        </p:txBody>
-      </p:sp>
-      <p:sp>
-        <p:nvSpPr>
-          <p:cNvPr id="13" name="TextBox 12"/>
-          <p:cNvSpPr txBox="1"/>
-          <p:nvPr/>
-        </p:nvSpPr>
-        <p:spPr>
-          <a:xfrm>
-            <a:off x="6343650" y="1457325"/>
-            <a:ext cx="2857500" cy="171450"/>
-          </a:xfrm>
-          <a:prstGeom prst="rect">
-            <a:avLst/>
-          </a:prstGeom>
-          <a:noFill/>
-        </p:spPr>
-        <p:txBody>
-          <a:bodyPr wrap="none" lIns="0" rIns="0" tIns="0" bIns="0" anchor="t">
-            <a:spAutoFit/>
-          </a:bodyPr>
-          <a:lstStyle/>
-          <a:p>
-            <a:pPr algn="l"/>
-            <a:r>
-              <a:rPr b="1" sz="1050" i="0" u="none">
-                <a:solidFill>
-                  <a:srgbClr val="D87014"/>
-                </a:solidFill>
-                <a:latin typeface="DM Sans"/>
-              </a:rPr>
-              <a:t>PASO 3 · TRANSFORMACIÓN RDD</a:t>
-            </a:r>
-          </a:p>
-        </p:txBody>
-      </p:sp>
-      <p:sp>
-        <p:nvSpPr>
-          <p:cNvPr id="14" name="TextBox 13"/>
-          <p:cNvSpPr txBox="1"/>
-          <p:nvPr/>
-        </p:nvSpPr>
-        <p:spPr>
-          <a:xfrm>
-            <a:off x="6343650" y="1666875"/>
-            <a:ext cx="2381250" cy="457200"/>
-          </a:xfrm>
-          <a:prstGeom prst="rect">
-            <a:avLst/>
-          </a:prstGeom>
-          <a:noFill/>
-        </p:spPr>
-        <p:txBody>
-          <a:bodyPr wrap="square" lIns="0" rIns="0" tIns="0" bIns="0" anchor="t">
-            <a:spAutoFit/>
-          </a:bodyPr>
-          <a:lstStyle/>
-          <a:p>
-            <a:pPr algn="l"/>
-            <a:r>
-              <a:rPr b="1" sz="1350" i="0" u="none">
-                <a:solidFill>
-                  <a:srgbClr val="FFFFFF"/>
-                </a:solidFill>
-                <a:latin typeface="DM Sans"/>
-              </a:rPr>
-              <a:t>Filtro PM2.5 y media departamental</a:t>
-            </a:r>
-          </a:p>
-        </p:txBody>
-      </p:sp>
-      <p:sp>
-        <p:nvSpPr>
-          <p:cNvPr id="15" name="TextBox 14"/>
-          <p:cNvSpPr txBox="1"/>
-          <p:nvPr/>
-        </p:nvSpPr>
-        <p:spPr>
-          <a:xfrm>
-            <a:off x="9124950" y="1457325"/>
-            <a:ext cx="2857500" cy="171450"/>
-          </a:xfrm>
-          <a:prstGeom prst="rect">
-            <a:avLst/>
-          </a:prstGeom>
-          <a:noFill/>
-        </p:spPr>
-        <p:txBody>
-          <a:bodyPr wrap="none" lIns="0" rIns="0" tIns="0" bIns="0" anchor="t">
-            <a:spAutoFit/>
-          </a:bodyPr>
-          <a:lstStyle/>
-          <a:p>
-            <a:pPr algn="l"/>
-            <a:r>
-              <a:rPr b="1" sz="1050" i="0" u="none">
-                <a:solidFill>
-                  <a:srgbClr val="D87014"/>
-                </a:solidFill>
-                <a:latin typeface="DM Sans"/>
-              </a:rPr>
-              <a:t>PASO 4 · ANALÍTICA SQL</a:t>
-            </a:r>
-          </a:p>
-        </p:txBody>
-      </p:sp>
-      <p:sp>
-        <p:nvSpPr>
-          <p:cNvPr id="16" name="TextBox 15"/>
-          <p:cNvSpPr txBox="1"/>
-          <p:nvPr/>
-        </p:nvSpPr>
-        <p:spPr>
-          <a:xfrm>
-            <a:off x="9124950" y="1666875"/>
-            <a:ext cx="2381250" cy="457200"/>
-          </a:xfrm>
-          <a:prstGeom prst="rect">
-            <a:avLst/>
-          </a:prstGeom>
-          <a:noFill/>
-        </p:spPr>
-        <p:txBody>
-          <a:bodyPr wrap="square" lIns="0" rIns="0" tIns="0" bIns="0" anchor="t">
-            <a:spAutoFit/>
-          </a:bodyPr>
-          <a:lstStyle/>
-          <a:p>
-            <a:pPr algn="l"/>
-            <a:r>
-              <a:rPr b="1" sz="1350" i="0" u="none">
-                <a:solidFill>
-                  <a:srgbClr val="FFFFFF"/>
-                </a:solidFill>
-                <a:latin typeface="DM Sans"/>
-              </a:rPr>
-              <a:t>DataFrames y Window Functions</a:t>
-            </a:r>
-          </a:p>
-        </p:txBody>
-      </p:sp>
-      <p:pic>
-        <p:nvPicPr>
-          <p:cNvPr id="17" name="Picture 16" descr="figura1_pm_departamentos.png"/>
-          <p:cNvPicPr>
-            <a:picLocks noChangeAspect="1"/>
-          </p:cNvPicPr>
-          <p:nvPr/>
-        </p:nvPicPr>
-        <p:blipFill>
-          <a:blip r:embed="rId3"/>
-          <a:stretch>
-            <a:fillRect/>
-          </a:stretch>
-        </p:blipFill>
-        <p:spPr>
-          <a:xfrm>
-            <a:off x="612648" y="2468880"/>
-            <a:ext cx="5349240" cy="4023360"/>
-          </a:xfrm>
-          <a:prstGeom prst="rect">
-            <a:avLst/>
-          </a:prstGeom>
-        </p:spPr>
-      </p:pic>
-      <p:pic>
-        <p:nvPicPr>
-          <p:cNvPr id="18" name="Picture 17" descr="figura3_top_estaciones_criticas.png"/>
-          <p:cNvPicPr>
-            <a:picLocks noChangeAspect="1"/>
-          </p:cNvPicPr>
-          <p:nvPr/>
-        </p:nvPicPr>
-        <p:blipFill>
-          <a:blip r:embed="rId4"/>
-          <a:stretch>
-            <a:fillRect/>
-          </a:stretch>
-        </p:blipFill>
-        <p:spPr>
-          <a:xfrm>
-            <a:off x="6217920" y="2468880"/>
-            <a:ext cx="5349240" cy="4023360"/>
+            <a:off x="2172034" y="2176272"/>
+            <a:ext cx="7844882" cy="4288536"/>
           </a:xfrm>
           <a:prstGeom prst="rect">
             <a:avLst/>
@@ -6079,14 +6306,6 @@
 <file path=ppt/slides/slide5.xml><?xml version="1.0" encoding="utf-8"?>
 <p:sld xmlns:a="http://schemas.openxmlformats.org/drawingml/2006/main" xmlns:p="http://schemas.openxmlformats.org/presentationml/2006/main" xmlns:r="http://schemas.openxmlformats.org/officeDocument/2006/relationships">
   <p:cSld>
-    <p:bg>
-      <p:bgPr>
-        <a:solidFill>
-          <a:srgbClr val="FFFFFF"/>
-        </a:solidFill>
-        <a:effectLst/>
-      </p:bgPr>
-    </p:bg>
     <p:spTree>
       <p:nvGrpSpPr>
         <p:cNvPr id="1" name=""/>
@@ -6096,19 +6315,17 @@
       <p:grpSpPr/>
       <p:sp>
         <p:nvSpPr>
-          <p:cNvPr id="2" name="Rounded Rectangle 1"/>
+          <p:cNvPr id="2" name="Rectangle 1"/>
           <p:cNvSpPr/>
           <p:nvPr/>
         </p:nvSpPr>
         <p:spPr>
           <a:xfrm>
-            <a:off x="609600" y="1285875"/>
-            <a:ext cx="2600325" cy="1362075"/>
-          </a:xfrm>
-          <a:prstGeom prst="roundRect">
-            <a:avLst>
-              <a:gd name="adj" fmla="val 8391"/>
-            </a:avLst>
+            <a:off x="0" y="0"/>
+            <a:ext cx="12191695" cy="6858000"/>
+          </a:xfrm>
+          <a:prstGeom prst="rect">
+            <a:avLst/>
           </a:prstGeom>
           <a:solidFill>
             <a:srgbClr val="F8FAFC"/>
@@ -6116,7 +6333,6 @@
           <a:ln>
             <a:noFill/>
           </a:ln>
-          <a:effectLst/>
         </p:spPr>
         <p:style>
           <a:lnRef idx="1">
@@ -6142,27 +6358,96 @@
       </p:sp>
       <p:sp>
         <p:nvSpPr>
-          <p:cNvPr id="3" name="Rounded Rectangle 2"/>
+          <p:cNvPr id="3" name="TextBox 2"/>
+          <p:cNvSpPr txBox="1"/>
+          <p:nvPr/>
+        </p:nvSpPr>
+        <p:spPr>
+          <a:xfrm>
+            <a:off x="548640" y="320040"/>
+            <a:ext cx="11064240" cy="256032"/>
+          </a:xfrm>
+          <a:prstGeom prst="rect">
+            <a:avLst/>
+          </a:prstGeom>
+          <a:noFill/>
+        </p:spPr>
+        <p:txBody>
+          <a:bodyPr wrap="square" lIns="0" tIns="0" rIns="0" bIns="0">
+            <a:spAutoFit/>
+          </a:bodyPr>
+          <a:lstStyle/>
+          <a:p>
+            <a:r>
+              <a:rPr sz="1050" b="1">
+                <a:solidFill>
+                  <a:srgbClr val="E87722"/>
+                </a:solidFill>
+                <a:latin typeface="Segoe UI"/>
+              </a:rPr>
+              <a:t>04 · RESULTADOS DEL PROCESAMIENTO EN BATCH (PARTE 1)</a:t>
+            </a:r>
+          </a:p>
+        </p:txBody>
+      </p:sp>
+      <p:sp>
+        <p:nvSpPr>
+          <p:cNvPr id="4" name="TextBox 3"/>
+          <p:cNvSpPr txBox="1"/>
+          <p:nvPr/>
+        </p:nvSpPr>
+        <p:spPr>
+          <a:xfrm>
+            <a:off x="548640" y="548640"/>
+            <a:ext cx="11091672" cy="438912"/>
+          </a:xfrm>
+          <a:prstGeom prst="rect">
+            <a:avLst/>
+          </a:prstGeom>
+          <a:noFill/>
+        </p:spPr>
+        <p:txBody>
+          <a:bodyPr wrap="square" lIns="0" tIns="0" rIns="0" bIns="0">
+            <a:spAutoFit/>
+          </a:bodyPr>
+          <a:lstStyle/>
+          <a:p>
+            <a:r>
+              <a:rPr sz="2100" b="1">
+                <a:solidFill>
+                  <a:srgbClr val="002855"/>
+                </a:solidFill>
+                <a:latin typeface="Segoe UI"/>
+              </a:rPr>
+              <a:t>Concentración de Material Particulado por Departamento y Estaciones Críticas</a:t>
+            </a:r>
+          </a:p>
+        </p:txBody>
+      </p:sp>
+      <p:sp>
+        <p:nvSpPr>
+          <p:cNvPr id="5" name="Rounded Rectangle 4"/>
           <p:cNvSpPr/>
           <p:nvPr/>
         </p:nvSpPr>
         <p:spPr>
           <a:xfrm>
-            <a:off x="3400425" y="1285875"/>
-            <a:ext cx="2600325" cy="1362075"/>
+            <a:off x="548640" y="1188720"/>
+            <a:ext cx="5413248" cy="5303520"/>
           </a:xfrm>
           <a:prstGeom prst="roundRect">
             <a:avLst>
-              <a:gd name="adj" fmla="val 8391"/>
+              <a:gd name="adj" fmla="val 3000"/>
             </a:avLst>
           </a:prstGeom>
           <a:solidFill>
-            <a:srgbClr val="F8FAFC"/>
+            <a:srgbClr val="FFFFFF"/>
           </a:solidFill>
-          <a:ln>
-            <a:noFill/>
+          <a:ln w="12700">
+            <a:solidFill>
+              <a:srgbClr val="CBD5E1"/>
+            </a:solidFill>
           </a:ln>
-          <a:effectLst/>
         </p:spPr>
         <p:style>
           <a:lnRef idx="1">
@@ -6188,202 +6473,14 @@
       </p:sp>
       <p:sp>
         <p:nvSpPr>
-          <p:cNvPr id="4" name="Rounded Rectangle 3"/>
-          <p:cNvSpPr/>
-          <p:nvPr/>
-        </p:nvSpPr>
-        <p:spPr>
-          <a:xfrm>
-            <a:off x="6191250" y="1285875"/>
-            <a:ext cx="2600325" cy="1362075"/>
-          </a:xfrm>
-          <a:prstGeom prst="roundRect">
-            <a:avLst>
-              <a:gd name="adj" fmla="val 8391"/>
-            </a:avLst>
-          </a:prstGeom>
-          <a:solidFill>
-            <a:srgbClr val="F8FAFC"/>
-          </a:solidFill>
-          <a:ln>
-            <a:noFill/>
-          </a:ln>
-          <a:effectLst/>
-        </p:spPr>
-        <p:style>
-          <a:lnRef idx="1">
-            <a:schemeClr val="accent1"/>
-          </a:lnRef>
-          <a:fillRef idx="3">
-            <a:schemeClr val="accent1"/>
-          </a:fillRef>
-          <a:effectRef idx="2">
-            <a:schemeClr val="accent1"/>
-          </a:effectRef>
-          <a:fontRef idx="minor">
-            <a:schemeClr val="lt1"/>
-          </a:fontRef>
-        </p:style>
-        <p:txBody>
-          <a:bodyPr rtlCol="0" anchor="ctr"/>
-          <a:lstStyle/>
-          <a:p>
-            <a:pPr algn="ctr"/>
-          </a:p>
-        </p:txBody>
-      </p:sp>
-      <p:sp>
-        <p:nvSpPr>
-          <p:cNvPr id="5" name="Rounded Rectangle 4"/>
-          <p:cNvSpPr/>
-          <p:nvPr/>
-        </p:nvSpPr>
-        <p:spPr>
-          <a:xfrm>
-            <a:off x="8982075" y="1285875"/>
-            <a:ext cx="2600325" cy="1362075"/>
-          </a:xfrm>
-          <a:prstGeom prst="roundRect">
-            <a:avLst>
-              <a:gd name="adj" fmla="val 8391"/>
-            </a:avLst>
-          </a:prstGeom>
-          <a:solidFill>
-            <a:srgbClr val="F8FAFC"/>
-          </a:solidFill>
-          <a:ln>
-            <a:noFill/>
-          </a:ln>
-          <a:effectLst/>
-        </p:spPr>
-        <p:style>
-          <a:lnRef idx="1">
-            <a:schemeClr val="accent1"/>
-          </a:lnRef>
-          <a:fillRef idx="3">
-            <a:schemeClr val="accent1"/>
-          </a:fillRef>
-          <a:effectRef idx="2">
-            <a:schemeClr val="accent1"/>
-          </a:effectRef>
-          <a:fontRef idx="minor">
-            <a:schemeClr val="lt1"/>
-          </a:fontRef>
-        </p:style>
-        <p:txBody>
-          <a:bodyPr rtlCol="0" anchor="ctr"/>
-          <a:lstStyle/>
-          <a:p>
-            <a:pPr algn="ctr"/>
-          </a:p>
-        </p:txBody>
-      </p:sp>
-      <p:sp>
-        <p:nvSpPr>
-          <p:cNvPr id="6" name="Rounded Rectangle 5"/>
-          <p:cNvSpPr/>
-          <p:nvPr/>
-        </p:nvSpPr>
-        <p:spPr>
-          <a:xfrm>
-            <a:off x="609600" y="3800475"/>
-            <a:ext cx="5372100" cy="1676400"/>
-          </a:xfrm>
-          <a:prstGeom prst="roundRect">
-            <a:avLst>
-              <a:gd name="adj" fmla="val 6818"/>
-            </a:avLst>
-          </a:prstGeom>
-          <a:solidFill>
-            <a:srgbClr val="F8FAFC"/>
-          </a:solidFill>
-          <a:ln w="19050">
-            <a:solidFill>
-              <a:srgbClr val="94A3B8"/>
-            </a:solidFill>
-          </a:ln>
-          <a:effectLst/>
-        </p:spPr>
-        <p:style>
-          <a:lnRef idx="1">
-            <a:schemeClr val="accent1"/>
-          </a:lnRef>
-          <a:fillRef idx="3">
-            <a:schemeClr val="accent1"/>
-          </a:fillRef>
-          <a:effectRef idx="2">
-            <a:schemeClr val="accent1"/>
-          </a:effectRef>
-          <a:fontRef idx="minor">
-            <a:schemeClr val="lt1"/>
-          </a:fontRef>
-        </p:style>
-        <p:txBody>
-          <a:bodyPr rtlCol="0" anchor="ctr"/>
-          <a:lstStyle/>
-          <a:p>
-            <a:pPr algn="ctr"/>
-          </a:p>
-        </p:txBody>
-      </p:sp>
-      <p:sp>
-        <p:nvSpPr>
-          <p:cNvPr id="7" name="Rounded Rectangle 6"/>
-          <p:cNvSpPr/>
-          <p:nvPr/>
-        </p:nvSpPr>
-        <p:spPr>
-          <a:xfrm>
-            <a:off x="6210300" y="3800475"/>
-            <a:ext cx="5372100" cy="1676400"/>
-          </a:xfrm>
-          <a:prstGeom prst="roundRect">
-            <a:avLst>
-              <a:gd name="adj" fmla="val 6818"/>
-            </a:avLst>
-          </a:prstGeom>
-          <a:solidFill>
-            <a:srgbClr val="F8FAFC"/>
-          </a:solidFill>
-          <a:ln w="19050">
-            <a:solidFill>
-              <a:srgbClr val="94A3B8"/>
-            </a:solidFill>
-          </a:ln>
-          <a:effectLst/>
-        </p:spPr>
-        <p:style>
-          <a:lnRef idx="1">
-            <a:schemeClr val="accent1"/>
-          </a:lnRef>
-          <a:fillRef idx="3">
-            <a:schemeClr val="accent1"/>
-          </a:fillRef>
-          <a:effectRef idx="2">
-            <a:schemeClr val="accent1"/>
-          </a:effectRef>
-          <a:fontRef idx="minor">
-            <a:schemeClr val="lt1"/>
-          </a:fontRef>
-        </p:style>
-        <p:txBody>
-          <a:bodyPr rtlCol="0" anchor="ctr"/>
-          <a:lstStyle/>
-          <a:p>
-            <a:pPr algn="ctr"/>
-          </a:p>
-        </p:txBody>
-      </p:sp>
-      <p:sp>
-        <p:nvSpPr>
-          <p:cNvPr id="8" name="TextBox 7"/>
+          <p:cNvPr id="6" name="TextBox 5"/>
           <p:cNvSpPr txBox="1"/>
           <p:nvPr/>
         </p:nvSpPr>
         <p:spPr>
           <a:xfrm>
-            <a:off x="609600" y="457200"/>
-            <a:ext cx="11582400" cy="171450"/>
+            <a:off x="777240" y="1298448"/>
+            <a:ext cx="4956048" cy="960120"/>
           </a:xfrm>
           <a:prstGeom prst="rect">
             <a:avLst/>
@@ -6391,530 +6488,42 @@
           <a:noFill/>
         </p:spPr>
         <p:txBody>
-          <a:bodyPr wrap="none" lIns="0" rIns="0" tIns="0" bIns="0" anchor="t">
+          <a:bodyPr wrap="square">
             <a:spAutoFit/>
           </a:bodyPr>
           <a:lstStyle/>
           <a:p>
-            <a:pPr algn="l"/>
-            <a:r>
-              <a:rPr b="1" sz="1050" i="0" u="none">
-                <a:solidFill>
-                  <a:srgbClr val="D87014"/>
-                </a:solidFill>
-                <a:latin typeface="DM Sans"/>
-              </a:rPr>
-              <a:t>04 · HALLAZGOS ESTADÍSTICOS Y AMBIENTALES</a:t>
-            </a:r>
-          </a:p>
-        </p:txBody>
-      </p:sp>
-      <p:sp>
-        <p:nvSpPr>
-          <p:cNvPr id="9" name="TextBox 8"/>
-          <p:cNvSpPr txBox="1"/>
-          <p:nvPr/>
-        </p:nvSpPr>
-        <p:spPr>
-          <a:xfrm>
-            <a:off x="609600" y="685800"/>
-            <a:ext cx="11582400" cy="409575"/>
-          </a:xfrm>
-          <a:prstGeom prst="rect">
-            <a:avLst/>
-          </a:prstGeom>
-          <a:noFill/>
-        </p:spPr>
-        <p:txBody>
-          <a:bodyPr wrap="none" lIns="0" rIns="0" tIns="0" bIns="0" anchor="t">
-            <a:spAutoFit/>
-          </a:bodyPr>
-          <a:lstStyle/>
-          <a:p>
-            <a:pPr algn="l"/>
-            <a:r>
-              <a:rPr b="1" sz="2550" i="0" u="none">
+            <a:r>
+              <a:rPr sz="1400" b="1">
                 <a:solidFill>
                   <a:srgbClr val="002855"/>
                 </a:solidFill>
-                <a:latin typeface="Space Grotesk"/>
-              </a:rPr>
-              <a:t>Análisis Exploratorio (EDA) y Correlación Climática</a:t>
-            </a:r>
-          </a:p>
-        </p:txBody>
-      </p:sp>
-      <p:sp>
-        <p:nvSpPr>
-          <p:cNvPr id="10" name="TextBox 9"/>
-          <p:cNvSpPr txBox="1"/>
-          <p:nvPr/>
-        </p:nvSpPr>
-        <p:spPr>
-          <a:xfrm>
-            <a:off x="838200" y="1457325"/>
-            <a:ext cx="2678906" cy="523875"/>
-          </a:xfrm>
-          <a:prstGeom prst="rect">
-            <a:avLst/>
-          </a:prstGeom>
-          <a:noFill/>
-        </p:spPr>
-        <p:txBody>
-          <a:bodyPr wrap="none" lIns="0" rIns="0" tIns="0" bIns="0" anchor="t">
-            <a:spAutoFit/>
-          </a:bodyPr>
-          <a:lstStyle/>
-          <a:p>
-            <a:pPr algn="l"/>
-            <a:r>
-              <a:rPr b="1" sz="3150" i="0" u="none">
-                <a:solidFill>
-                  <a:srgbClr val="002855"/>
-                </a:solidFill>
-                <a:latin typeface="DM Sans"/>
-              </a:rPr>
-              <a:t>70.6%</a:t>
-            </a:r>
-          </a:p>
-        </p:txBody>
-      </p:sp>
-      <p:sp>
-        <p:nvSpPr>
-          <p:cNvPr id="11" name="TextBox 10"/>
-          <p:cNvSpPr txBox="1"/>
-          <p:nvPr/>
-        </p:nvSpPr>
-        <p:spPr>
-          <a:xfrm>
-            <a:off x="838200" y="2019300"/>
-            <a:ext cx="2678906" cy="228600"/>
-          </a:xfrm>
-          <a:prstGeom prst="rect">
-            <a:avLst/>
-          </a:prstGeom>
-          <a:noFill/>
-        </p:spPr>
-        <p:txBody>
-          <a:bodyPr wrap="none" lIns="0" rIns="0" tIns="0" bIns="0" anchor="t">
-            <a:spAutoFit/>
-          </a:bodyPr>
-          <a:lstStyle/>
-          <a:p>
-            <a:pPr algn="l"/>
-            <a:r>
-              <a:rPr b="1" sz="1350" i="0" u="none">
-                <a:solidFill>
-                  <a:srgbClr val="334155"/>
-                </a:solidFill>
-                <a:latin typeface="DM Sans"/>
-              </a:rPr>
-              <a:t>ICA Buena</a:t>
-            </a:r>
-          </a:p>
-        </p:txBody>
-      </p:sp>
-      <p:sp>
-        <p:nvSpPr>
-          <p:cNvPr id="12" name="TextBox 11"/>
-          <p:cNvSpPr txBox="1"/>
-          <p:nvPr/>
-        </p:nvSpPr>
-        <p:spPr>
-          <a:xfrm>
-            <a:off x="3629025" y="1457325"/>
-            <a:ext cx="2678906" cy="523875"/>
-          </a:xfrm>
-          <a:prstGeom prst="rect">
-            <a:avLst/>
-          </a:prstGeom>
-          <a:noFill/>
-        </p:spPr>
-        <p:txBody>
-          <a:bodyPr wrap="none" lIns="0" rIns="0" tIns="0" bIns="0" anchor="t">
-            <a:spAutoFit/>
-          </a:bodyPr>
-          <a:lstStyle/>
-          <a:p>
-            <a:pPr algn="l"/>
-            <a:r>
-              <a:rPr b="1" sz="3150" i="0" u="none">
-                <a:solidFill>
-                  <a:srgbClr val="002855"/>
-                </a:solidFill>
-                <a:latin typeface="DM Sans"/>
-              </a:rPr>
-              <a:t>26.3%</a:t>
-            </a:r>
-          </a:p>
-        </p:txBody>
-      </p:sp>
-      <p:sp>
-        <p:nvSpPr>
-          <p:cNvPr id="13" name="TextBox 12"/>
-          <p:cNvSpPr txBox="1"/>
-          <p:nvPr/>
-        </p:nvSpPr>
-        <p:spPr>
-          <a:xfrm>
-            <a:off x="3629025" y="2019300"/>
-            <a:ext cx="2678906" cy="228600"/>
-          </a:xfrm>
-          <a:prstGeom prst="rect">
-            <a:avLst/>
-          </a:prstGeom>
-          <a:noFill/>
-        </p:spPr>
-        <p:txBody>
-          <a:bodyPr wrap="none" lIns="0" rIns="0" tIns="0" bIns="0" anchor="t">
-            <a:spAutoFit/>
-          </a:bodyPr>
-          <a:lstStyle/>
-          <a:p>
-            <a:pPr algn="l"/>
-            <a:r>
-              <a:rPr b="1" sz="1350" i="0" u="none">
-                <a:solidFill>
-                  <a:srgbClr val="334155"/>
-                </a:solidFill>
-                <a:latin typeface="DM Sans"/>
-              </a:rPr>
-              <a:t>ICA Aceptable</a:t>
-            </a:r>
-          </a:p>
-        </p:txBody>
-      </p:sp>
-      <p:sp>
-        <p:nvSpPr>
-          <p:cNvPr id="14" name="TextBox 13"/>
-          <p:cNvSpPr txBox="1"/>
-          <p:nvPr/>
-        </p:nvSpPr>
-        <p:spPr>
-          <a:xfrm>
-            <a:off x="6419850" y="1457325"/>
-            <a:ext cx="2678906" cy="523875"/>
-          </a:xfrm>
-          <a:prstGeom prst="rect">
-            <a:avLst/>
-          </a:prstGeom>
-          <a:noFill/>
-        </p:spPr>
-        <p:txBody>
-          <a:bodyPr wrap="none" lIns="0" rIns="0" tIns="0" bIns="0" anchor="t">
-            <a:spAutoFit/>
-          </a:bodyPr>
-          <a:lstStyle/>
-          <a:p>
-            <a:pPr algn="l"/>
-            <a:r>
-              <a:rPr b="1" sz="3150" i="0" u="none">
-                <a:solidFill>
-                  <a:srgbClr val="D87014"/>
-                </a:solidFill>
-                <a:latin typeface="DM Sans"/>
-              </a:rPr>
-              <a:t>2.9%</a:t>
-            </a:r>
-          </a:p>
-        </p:txBody>
-      </p:sp>
-      <p:sp>
-        <p:nvSpPr>
-          <p:cNvPr id="15" name="TextBox 14"/>
-          <p:cNvSpPr txBox="1"/>
-          <p:nvPr/>
-        </p:nvSpPr>
-        <p:spPr>
-          <a:xfrm>
-            <a:off x="6419850" y="2019300"/>
-            <a:ext cx="2238375" cy="457200"/>
-          </a:xfrm>
-          <a:prstGeom prst="rect">
-            <a:avLst/>
-          </a:prstGeom>
-          <a:noFill/>
-        </p:spPr>
-        <p:txBody>
-          <a:bodyPr wrap="square" lIns="0" rIns="0" tIns="0" bIns="0" anchor="t">
-            <a:spAutoFit/>
-          </a:bodyPr>
-          <a:lstStyle/>
-          <a:p>
-            <a:pPr algn="l"/>
-            <a:r>
-              <a:rPr b="1" sz="1350" i="0" u="none">
-                <a:solidFill>
-                  <a:srgbClr val="334155"/>
-                </a:solidFill>
-                <a:latin typeface="DM Sans"/>
-              </a:rPr>
-              <a:t>Dañina a Grupos Sensibles</a:t>
-            </a:r>
-          </a:p>
-        </p:txBody>
-      </p:sp>
-      <p:sp>
-        <p:nvSpPr>
-          <p:cNvPr id="16" name="TextBox 15"/>
-          <p:cNvSpPr txBox="1"/>
-          <p:nvPr/>
-        </p:nvSpPr>
-        <p:spPr>
-          <a:xfrm>
-            <a:off x="9210675" y="1457325"/>
-            <a:ext cx="2678906" cy="523875"/>
-          </a:xfrm>
-          <a:prstGeom prst="rect">
-            <a:avLst/>
-          </a:prstGeom>
-          <a:noFill/>
-        </p:spPr>
-        <p:txBody>
-          <a:bodyPr wrap="none" lIns="0" rIns="0" tIns="0" bIns="0" anchor="t">
-            <a:spAutoFit/>
-          </a:bodyPr>
-          <a:lstStyle/>
-          <a:p>
-            <a:pPr algn="l"/>
-            <a:r>
-              <a:rPr b="1" sz="3150" i="0" u="none">
-                <a:solidFill>
-                  <a:srgbClr val="B91C1C"/>
-                </a:solidFill>
-                <a:latin typeface="DM Sans"/>
-              </a:rPr>
-              <a:t>0.1%</a:t>
-            </a:r>
-          </a:p>
-        </p:txBody>
-      </p:sp>
-      <p:sp>
-        <p:nvSpPr>
-          <p:cNvPr id="17" name="TextBox 16"/>
-          <p:cNvSpPr txBox="1"/>
-          <p:nvPr/>
-        </p:nvSpPr>
-        <p:spPr>
-          <a:xfrm>
-            <a:off x="9210675" y="2019300"/>
-            <a:ext cx="2678906" cy="228600"/>
-          </a:xfrm>
-          <a:prstGeom prst="rect">
-            <a:avLst/>
-          </a:prstGeom>
-          <a:noFill/>
-        </p:spPr>
-        <p:txBody>
-          <a:bodyPr wrap="none" lIns="0" rIns="0" tIns="0" bIns="0" anchor="t">
-            <a:spAutoFit/>
-          </a:bodyPr>
-          <a:lstStyle/>
-          <a:p>
-            <a:pPr algn="l"/>
-            <a:r>
-              <a:rPr b="1" sz="1350" i="0" u="none">
-                <a:solidFill>
-                  <a:srgbClr val="334155"/>
-                </a:solidFill>
-                <a:latin typeface="DM Sans"/>
-              </a:rPr>
-              <a:t>ICA Dañina</a:t>
-            </a:r>
-          </a:p>
-        </p:txBody>
-      </p:sp>
-      <p:sp>
-        <p:nvSpPr>
-          <p:cNvPr id="18" name="TextBox 17"/>
-          <p:cNvSpPr txBox="1"/>
-          <p:nvPr/>
-        </p:nvSpPr>
-        <p:spPr>
-          <a:xfrm>
-            <a:off x="895350" y="4086225"/>
-            <a:ext cx="6000750" cy="190500"/>
-          </a:xfrm>
-          <a:prstGeom prst="rect">
-            <a:avLst/>
-          </a:prstGeom>
-          <a:noFill/>
-        </p:spPr>
-        <p:txBody>
-          <a:bodyPr wrap="none" lIns="0" rIns="0" tIns="0" bIns="0" anchor="t">
-            <a:spAutoFit/>
-          </a:bodyPr>
-          <a:lstStyle/>
-          <a:p/>
-        </p:txBody>
-      </p:sp>
-      <p:sp>
-        <p:nvSpPr>
-          <p:cNvPr id="19" name="TextBox 18"/>
-          <p:cNvSpPr txBox="1"/>
-          <p:nvPr/>
-        </p:nvSpPr>
-        <p:spPr>
-          <a:xfrm>
-            <a:off x="895350" y="4371975"/>
-            <a:ext cx="6300787" cy="266700"/>
-          </a:xfrm>
-          <a:prstGeom prst="rect">
-            <a:avLst/>
-          </a:prstGeom>
-          <a:noFill/>
-        </p:spPr>
-        <p:txBody>
-          <a:bodyPr wrap="none" lIns="0" rIns="0" tIns="0" bIns="0" anchor="t">
-            <a:spAutoFit/>
-          </a:bodyPr>
-          <a:lstStyle/>
-          <a:p>
-            <a:pPr algn="l"/>
-            <a:r>
-              <a:rPr b="1" sz="1650" i="0" u="none">
-                <a:solidFill>
-                  <a:srgbClr val="002855"/>
-                </a:solidFill>
-                <a:latin typeface="Space Grotesk"/>
-              </a:rPr>
-              <a:t>Comportamiento Nacional del Índice ICA</a:t>
-            </a:r>
-          </a:p>
-        </p:txBody>
-      </p:sp>
-      <p:sp>
-        <p:nvSpPr>
-          <p:cNvPr id="20" name="TextBox 19"/>
-          <p:cNvSpPr txBox="1"/>
-          <p:nvPr/>
-        </p:nvSpPr>
-        <p:spPr>
-          <a:xfrm>
-            <a:off x="895350" y="4733925"/>
-            <a:ext cx="4895850" cy="457200"/>
-          </a:xfrm>
-          <a:prstGeom prst="rect">
-            <a:avLst/>
-          </a:prstGeom>
-          <a:noFill/>
-        </p:spPr>
-        <p:txBody>
-          <a:bodyPr wrap="square" lIns="0" rIns="0" tIns="0" bIns="0" anchor="t">
-            <a:spAutoFit/>
-          </a:bodyPr>
-          <a:lstStyle/>
-          <a:p>
-            <a:pPr algn="l"/>
-            <a:r>
-              <a:rPr b="0" sz="1350" i="0" u="none">
-                <a:solidFill>
-                  <a:srgbClr val="334155"/>
-                </a:solidFill>
-                <a:latin typeface="DM Sans"/>
-              </a:rPr>
-              <a:t>Predominio de calidad favorable (96.9% acumulada entre Buena y Aceptable) con alertas focalizadas del 3.0%.</a:t>
-            </a:r>
-          </a:p>
-        </p:txBody>
-      </p:sp>
-      <p:sp>
-        <p:nvSpPr>
-          <p:cNvPr id="21" name="TextBox 20"/>
-          <p:cNvSpPr txBox="1"/>
-          <p:nvPr/>
-        </p:nvSpPr>
-        <p:spPr>
-          <a:xfrm>
-            <a:off x="6496050" y="4086225"/>
-            <a:ext cx="5695950" cy="190500"/>
-          </a:xfrm>
-          <a:prstGeom prst="rect">
-            <a:avLst/>
-          </a:prstGeom>
-          <a:noFill/>
-        </p:spPr>
-        <p:txBody>
-          <a:bodyPr wrap="none" lIns="0" rIns="0" tIns="0" bIns="0" anchor="t">
-            <a:spAutoFit/>
-          </a:bodyPr>
-          <a:lstStyle/>
-          <a:p/>
-        </p:txBody>
-      </p:sp>
-      <p:sp>
-        <p:nvSpPr>
-          <p:cNvPr id="22" name="TextBox 21"/>
-          <p:cNvSpPr txBox="1"/>
-          <p:nvPr/>
-        </p:nvSpPr>
-        <p:spPr>
-          <a:xfrm>
-            <a:off x="6496050" y="4371975"/>
-            <a:ext cx="5695950" cy="266700"/>
-          </a:xfrm>
-          <a:prstGeom prst="rect">
-            <a:avLst/>
-          </a:prstGeom>
-          <a:noFill/>
-        </p:spPr>
-        <p:txBody>
-          <a:bodyPr wrap="none" lIns="0" rIns="0" tIns="0" bIns="0" anchor="t">
-            <a:spAutoFit/>
-          </a:bodyPr>
-          <a:lstStyle/>
-          <a:p>
-            <a:pPr algn="l"/>
-            <a:r>
-              <a:rPr b="1" sz="1650" i="0" u="none">
-                <a:solidFill>
-                  <a:srgbClr val="002855"/>
-                </a:solidFill>
-                <a:latin typeface="Space Grotesk"/>
-              </a:rPr>
-              <a:t>Inversión Térmica Comprobada Empíricamente</a:t>
-            </a:r>
-          </a:p>
-        </p:txBody>
-      </p:sp>
-      <p:sp>
-        <p:nvSpPr>
-          <p:cNvPr id="23" name="TextBox 22"/>
-          <p:cNvSpPr txBox="1"/>
-          <p:nvPr/>
-        </p:nvSpPr>
-        <p:spPr>
-          <a:xfrm>
-            <a:off x="6496050" y="4733925"/>
-            <a:ext cx="4895850" cy="457200"/>
-          </a:xfrm>
-          <a:prstGeom prst="rect">
-            <a:avLst/>
-          </a:prstGeom>
-          <a:noFill/>
-        </p:spPr>
-        <p:txBody>
-          <a:bodyPr wrap="square" lIns="0" rIns="0" tIns="0" bIns="0" anchor="t">
-            <a:spAutoFit/>
-          </a:bodyPr>
-          <a:lstStyle/>
-          <a:p>
-            <a:pPr algn="l"/>
-            <a:r>
-              <a:rPr b="0" sz="1350" i="0" u="none">
-                <a:solidFill>
-                  <a:srgbClr val="334155"/>
-                </a:solidFill>
-                <a:latin typeface="DM Sans"/>
-              </a:rPr>
-              <a:t>Bajas temperaturas combinadas con humedad relativa superior al 70% encapsulan los picos críticos de PM2.5.</a:t>
+                <a:latin typeface="Segoe UI"/>
+              </a:rPr>
+              <a:t>Figura 1. Comparativo Departamental de PM10 y PM2.5</a:t>
+            </a:r>
+          </a:p>
+          <a:p>
+            <a:pPr>
+              <a:spcBef>
+                <a:spcPts val="300"/>
+              </a:spcBef>
+            </a:pPr>
+            <a:r>
+              <a:rPr sz="1080">
+                <a:solidFill>
+                  <a:srgbClr val="475569"/>
+                </a:solidFill>
+                <a:latin typeface="Segoe UI"/>
+              </a:rPr>
+              <a:t>Santander (25.49 µg/m³) y Atlántico (25.12 µg/m³) registran las medias más altas de PM2.5, mientras que PM10 promedia 48.23 µg/m³ a nivel nacional.</a:t>
             </a:r>
           </a:p>
         </p:txBody>
       </p:sp>
       <p:pic>
         <p:nvPicPr>
-          <p:cNvPr id="24" name="Picture 23" descr="figura2_distribucion_ica.png"/>
+          <p:cNvPr id="7" name="Picture 6" descr="figura1_pm_departamentos.png"/>
           <p:cNvPicPr>
             <a:picLocks noChangeAspect="1"/>
           </p:cNvPicPr>
@@ -6928,17 +6537,114 @@
         </p:blipFill>
         <p:spPr>
           <a:xfrm>
-            <a:off x="1691640" y="2926080"/>
-            <a:ext cx="3200400" cy="3200400"/>
+            <a:off x="685800" y="3012948"/>
+            <a:ext cx="5138928" cy="2569464"/>
           </a:xfrm>
           <a:prstGeom prst="rect">
             <a:avLst/>
           </a:prstGeom>
         </p:spPr>
       </p:pic>
+      <p:sp>
+        <p:nvSpPr>
+          <p:cNvPr id="8" name="Rounded Rectangle 7"/>
+          <p:cNvSpPr/>
+          <p:nvPr/>
+        </p:nvSpPr>
+        <p:spPr>
+          <a:xfrm>
+            <a:off x="6227064" y="1188720"/>
+            <a:ext cx="5413248" cy="5303520"/>
+          </a:xfrm>
+          <a:prstGeom prst="roundRect">
+            <a:avLst>
+              <a:gd name="adj" fmla="val 3000"/>
+            </a:avLst>
+          </a:prstGeom>
+          <a:solidFill>
+            <a:srgbClr val="FFFFFF"/>
+          </a:solidFill>
+          <a:ln w="12700">
+            <a:solidFill>
+              <a:srgbClr val="CBD5E1"/>
+            </a:solidFill>
+          </a:ln>
+        </p:spPr>
+        <p:style>
+          <a:lnRef idx="1">
+            <a:schemeClr val="accent1"/>
+          </a:lnRef>
+          <a:fillRef idx="3">
+            <a:schemeClr val="accent1"/>
+          </a:fillRef>
+          <a:effectRef idx="2">
+            <a:schemeClr val="accent1"/>
+          </a:effectRef>
+          <a:fontRef idx="minor">
+            <a:schemeClr val="lt1"/>
+          </a:fontRef>
+        </p:style>
+        <p:txBody>
+          <a:bodyPr rtlCol="0" anchor="ctr"/>
+          <a:lstStyle/>
+          <a:p>
+            <a:pPr algn="ctr"/>
+          </a:p>
+        </p:txBody>
+      </p:sp>
+      <p:sp>
+        <p:nvSpPr>
+          <p:cNvPr id="9" name="TextBox 8"/>
+          <p:cNvSpPr txBox="1"/>
+          <p:nvPr/>
+        </p:nvSpPr>
+        <p:spPr>
+          <a:xfrm>
+            <a:off x="6455664" y="1298448"/>
+            <a:ext cx="4956048" cy="960120"/>
+          </a:xfrm>
+          <a:prstGeom prst="rect">
+            <a:avLst/>
+          </a:prstGeom>
+          <a:noFill/>
+        </p:spPr>
+        <p:txBody>
+          <a:bodyPr wrap="square">
+            <a:spAutoFit/>
+          </a:bodyPr>
+          <a:lstStyle/>
+          <a:p>
+            <a:r>
+              <a:rPr sz="1400" b="1">
+                <a:solidFill>
+                  <a:srgbClr val="002855"/>
+                </a:solidFill>
+                <a:latin typeface="Segoe UI"/>
+              </a:rPr>
+              <a:t>Figura 3. Top 7 Estaciones de Monitoreo más Críticas (PM2.5)</a:t>
+            </a:r>
+          </a:p>
+          <a:p>
+            <a:pPr>
+              <a:spcBef>
+                <a:spcPts val="300"/>
+              </a:spcBef>
+            </a:pPr>
+            <a:r>
+              <a:rPr sz="1080">
+                <a:solidFill>
+                  <a:srgbClr val="475569"/>
+                </a:solidFill>
+                <a:latin typeface="Segoe UI"/>
+              </a:rPr>
+              <a:t>Centro Histórico (Barranquilla, 25.69 µg/m³ con picos de 66.33 µg/m³) y Centro Bucaramanga (25.66 µg/m³) lideran la criticidad por tráfico pesado.</a:t>
+            </a:r>
+          </a:p>
+        </p:txBody>
+      </p:sp>
       <p:pic>
         <p:nvPicPr>
-          <p:cNvPr id="25" name="Picture 24" descr="figura4_dispersion_clima_contaminacion.png"/>
+          <p:cNvPr id="10" name="Picture 9" descr="figura3_top_estaciones_criticas.png"/>
           <p:cNvPicPr>
             <a:picLocks noChangeAspect="1"/>
           </p:cNvPicPr>
@@ -6952,8 +6658,8 @@
         </p:blipFill>
         <p:spPr>
           <a:xfrm>
-            <a:off x="6309360" y="2926080"/>
-            <a:ext cx="5212080" cy="3200400"/>
+            <a:off x="6364224" y="3129741"/>
+            <a:ext cx="5138928" cy="2335876"/>
           </a:xfrm>
           <a:prstGeom prst="rect">
             <a:avLst/>
@@ -6971,14 +6677,6 @@
 <file path=ppt/slides/slide6.xml><?xml version="1.0" encoding="utf-8"?>
 <p:sld xmlns:a="http://schemas.openxmlformats.org/drawingml/2006/main" xmlns:p="http://schemas.openxmlformats.org/presentationml/2006/main" xmlns:r="http://schemas.openxmlformats.org/officeDocument/2006/relationships">
   <p:cSld>
-    <p:bg>
-      <p:bgPr>
-        <a:solidFill>
-          <a:srgbClr val="FFFFFF"/>
-        </a:solidFill>
-        <a:effectLst/>
-      </p:bgPr>
-    </p:bg>
     <p:spTree>
       <p:nvGrpSpPr>
         <p:cNvPr id="1" name=""/>
@@ -6988,65 +6686,17 @@
       <p:grpSpPr/>
       <p:sp>
         <p:nvSpPr>
-          <p:cNvPr id="2" name="Rounded Rectangle 1"/>
+          <p:cNvPr id="2" name="Rectangle 1"/>
           <p:cNvSpPr/>
           <p:nvPr/>
         </p:nvSpPr>
         <p:spPr>
           <a:xfrm>
-            <a:off x="609600" y="5038725"/>
-            <a:ext cx="10972800" cy="1362075"/>
-          </a:xfrm>
-          <a:prstGeom prst="roundRect">
-            <a:avLst>
-              <a:gd name="adj" fmla="val 9790"/>
-            </a:avLst>
-          </a:prstGeom>
-          <a:solidFill>
-            <a:srgbClr val="002855"/>
-          </a:solidFill>
-          <a:ln>
-            <a:noFill/>
-          </a:ln>
-          <a:effectLst/>
-        </p:spPr>
-        <p:style>
-          <a:lnRef idx="1">
-            <a:schemeClr val="accent1"/>
-          </a:lnRef>
-          <a:fillRef idx="3">
-            <a:schemeClr val="accent1"/>
-          </a:fillRef>
-          <a:effectRef idx="2">
-            <a:schemeClr val="accent1"/>
-          </a:effectRef>
-          <a:fontRef idx="minor">
-            <a:schemeClr val="lt1"/>
-          </a:fontRef>
-        </p:style>
-        <p:txBody>
-          <a:bodyPr rtlCol="0" anchor="ctr"/>
-          <a:lstStyle/>
-          <a:p>
-            <a:pPr algn="ctr"/>
-          </a:p>
-        </p:txBody>
-      </p:sp>
-      <p:sp>
-        <p:nvSpPr>
-          <p:cNvPr id="3" name="Rounded Rectangle 2"/>
-          <p:cNvSpPr/>
-          <p:nvPr/>
-        </p:nvSpPr>
-        <p:spPr>
-          <a:xfrm>
-            <a:off x="609600" y="1323975"/>
-            <a:ext cx="3319462" cy="1800225"/>
-          </a:xfrm>
-          <a:prstGeom prst="roundRect">
-            <a:avLst>
-              <a:gd name="adj" fmla="val 6349"/>
-            </a:avLst>
+            <a:off x="0" y="0"/>
+            <a:ext cx="12191695" cy="6858000"/>
+          </a:xfrm>
+          <a:prstGeom prst="rect">
+            <a:avLst/>
           </a:prstGeom>
           <a:solidFill>
             <a:srgbClr val="F8FAFC"/>
@@ -7054,7 +6704,6 @@
           <a:ln>
             <a:noFill/>
           </a:ln>
-          <a:effectLst/>
         </p:spPr>
         <p:style>
           <a:lnRef idx="1">
@@ -7080,27 +6729,96 @@
       </p:sp>
       <p:sp>
         <p:nvSpPr>
-          <p:cNvPr id="4" name="Rounded Rectangle 3"/>
+          <p:cNvPr id="3" name="TextBox 2"/>
+          <p:cNvSpPr txBox="1"/>
+          <p:nvPr/>
+        </p:nvSpPr>
+        <p:spPr>
+          <a:xfrm>
+            <a:off x="548640" y="320040"/>
+            <a:ext cx="11064240" cy="256032"/>
+          </a:xfrm>
+          <a:prstGeom prst="rect">
+            <a:avLst/>
+          </a:prstGeom>
+          <a:noFill/>
+        </p:spPr>
+        <p:txBody>
+          <a:bodyPr wrap="square" lIns="0" tIns="0" rIns="0" bIns="0">
+            <a:spAutoFit/>
+          </a:bodyPr>
+          <a:lstStyle/>
+          <a:p>
+            <a:r>
+              <a:rPr sz="1050" b="1">
+                <a:solidFill>
+                  <a:srgbClr val="E87722"/>
+                </a:solidFill>
+                <a:latin typeface="Segoe UI"/>
+              </a:rPr>
+              <a:t>05 · RESULTADOS DEL PROCESAMIENTO EN BATCH (PARTE 2)</a:t>
+            </a:r>
+          </a:p>
+        </p:txBody>
+      </p:sp>
+      <p:sp>
+        <p:nvSpPr>
+          <p:cNvPr id="4" name="TextBox 3"/>
+          <p:cNvSpPr txBox="1"/>
+          <p:nvPr/>
+        </p:nvSpPr>
+        <p:spPr>
+          <a:xfrm>
+            <a:off x="548640" y="548640"/>
+            <a:ext cx="11091672" cy="438912"/>
+          </a:xfrm>
+          <a:prstGeom prst="rect">
+            <a:avLst/>
+          </a:prstGeom>
+          <a:noFill/>
+        </p:spPr>
+        <p:txBody>
+          <a:bodyPr wrap="square" lIns="0" tIns="0" rIns="0" bIns="0">
+            <a:spAutoFit/>
+          </a:bodyPr>
+          <a:lstStyle/>
+          <a:p>
+            <a:r>
+              <a:rPr sz="2100" b="1">
+                <a:solidFill>
+                  <a:srgbClr val="002855"/>
+                </a:solidFill>
+                <a:latin typeface="Segoe UI"/>
+              </a:rPr>
+              <a:t>Distribución del Índice de Calidad del Aire (ICA) y Correlación Climática</a:t>
+            </a:r>
+          </a:p>
+        </p:txBody>
+      </p:sp>
+      <p:sp>
+        <p:nvSpPr>
+          <p:cNvPr id="5" name="Rounded Rectangle 4"/>
           <p:cNvSpPr/>
           <p:nvPr/>
         </p:nvSpPr>
         <p:spPr>
           <a:xfrm>
-            <a:off x="4157662" y="1323975"/>
-            <a:ext cx="3319462" cy="1800225"/>
+            <a:off x="548640" y="1143000"/>
+            <a:ext cx="2651760" cy="932688"/>
           </a:xfrm>
           <a:prstGeom prst="roundRect">
             <a:avLst>
-              <a:gd name="adj" fmla="val 6349"/>
+              <a:gd name="adj" fmla="val 3000"/>
             </a:avLst>
           </a:prstGeom>
           <a:solidFill>
-            <a:srgbClr val="F8FAFC"/>
+            <a:srgbClr val="FFFFFF"/>
           </a:solidFill>
-          <a:ln>
-            <a:noFill/>
+          <a:ln w="12700">
+            <a:solidFill>
+              <a:srgbClr val="CBD5E1"/>
+            </a:solidFill>
           </a:ln>
-          <a:effectLst/>
         </p:spPr>
         <p:style>
           <a:lnRef idx="1">
@@ -7126,27 +6844,73 @@
       </p:sp>
       <p:sp>
         <p:nvSpPr>
-          <p:cNvPr id="5" name="Rounded Rectangle 4"/>
+          <p:cNvPr id="6" name="TextBox 5"/>
+          <p:cNvSpPr txBox="1"/>
+          <p:nvPr/>
+        </p:nvSpPr>
+        <p:spPr>
+          <a:xfrm>
+            <a:off x="713232" y="1188720"/>
+            <a:ext cx="2322576" cy="822960"/>
+          </a:xfrm>
+          <a:prstGeom prst="rect">
+            <a:avLst/>
+          </a:prstGeom>
+          <a:noFill/>
+        </p:spPr>
+        <p:txBody>
+          <a:bodyPr wrap="square">
+            <a:spAutoFit/>
+          </a:bodyPr>
+          <a:lstStyle/>
+          <a:p>
+            <a:r>
+              <a:rPr sz="2400" b="1">
+                <a:solidFill>
+                  <a:srgbClr val="16A34A"/>
+                </a:solidFill>
+                <a:latin typeface="Segoe UI"/>
+              </a:rPr>
+              <a:t>70.6%</a:t>
+            </a:r>
+          </a:p>
+          <a:p>
+            <a:r>
+              <a:rPr sz="1050" b="1">
+                <a:solidFill>
+                  <a:srgbClr val="475569"/>
+                </a:solidFill>
+                <a:latin typeface="Segoe UI"/>
+              </a:rPr>
+              <a:t>ICA Buena (41.739 reg.)</a:t>
+            </a:r>
+          </a:p>
+        </p:txBody>
+      </p:sp>
+      <p:sp>
+        <p:nvSpPr>
+          <p:cNvPr id="7" name="Rounded Rectangle 6"/>
           <p:cNvSpPr/>
           <p:nvPr/>
         </p:nvSpPr>
         <p:spPr>
           <a:xfrm>
-            <a:off x="7705725" y="1323975"/>
-            <a:ext cx="3876675" cy="1800225"/>
+            <a:off x="3364992" y="1143000"/>
+            <a:ext cx="2651760" cy="932688"/>
           </a:xfrm>
           <a:prstGeom prst="roundRect">
             <a:avLst>
-              <a:gd name="adj" fmla="val 6349"/>
+              <a:gd name="adj" fmla="val 3000"/>
             </a:avLst>
           </a:prstGeom>
           <a:solidFill>
-            <a:srgbClr val="F8FAFC"/>
+            <a:srgbClr val="FFFFFF"/>
           </a:solidFill>
-          <a:ln>
-            <a:noFill/>
+          <a:ln w="12700">
+            <a:solidFill>
+              <a:srgbClr val="CBD5E1"/>
+            </a:solidFill>
           </a:ln>
-          <a:effectLst/>
         </p:spPr>
         <p:style>
           <a:lnRef idx="1">
@@ -7172,14 +6936,14 @@
       </p:sp>
       <p:sp>
         <p:nvSpPr>
-          <p:cNvPr id="6" name="TextBox 5"/>
+          <p:cNvPr id="8" name="TextBox 7"/>
           <p:cNvSpPr txBox="1"/>
           <p:nvPr/>
         </p:nvSpPr>
         <p:spPr>
           <a:xfrm>
-            <a:off x="609600" y="457200"/>
-            <a:ext cx="11582400" cy="171450"/>
+            <a:off x="3529584" y="1188720"/>
+            <a:ext cx="2322576" cy="822960"/>
           </a:xfrm>
           <a:prstGeom prst="rect">
             <a:avLst/>
@@ -7187,34 +6951,91 @@
           <a:noFill/>
         </p:spPr>
         <p:txBody>
-          <a:bodyPr wrap="none" lIns="0" rIns="0" tIns="0" bIns="0" anchor="t">
+          <a:bodyPr wrap="square">
             <a:spAutoFit/>
           </a:bodyPr>
           <a:lstStyle/>
           <a:p>
-            <a:pPr algn="l"/>
-            <a:r>
-              <a:rPr b="1" sz="1050" i="0" u="none">
-                <a:solidFill>
-                  <a:srgbClr val="D87014"/>
-                </a:solidFill>
-                <a:latin typeface="DM Sans"/>
-              </a:rPr>
-              <a:t>05 · ARQUITECTURA EN TIEMPO REAL (ANEXO 3)</a:t>
-            </a:r>
-          </a:p>
-        </p:txBody>
-      </p:sp>
-      <p:sp>
-        <p:nvSpPr>
-          <p:cNvPr id="7" name="TextBox 6"/>
+            <a:r>
+              <a:rPr sz="2400" b="1">
+                <a:solidFill>
+                  <a:srgbClr val="002855"/>
+                </a:solidFill>
+                <a:latin typeface="Segoe UI"/>
+              </a:rPr>
+              <a:t>26.3%</a:t>
+            </a:r>
+          </a:p>
+          <a:p>
+            <a:r>
+              <a:rPr sz="1050" b="1">
+                <a:solidFill>
+                  <a:srgbClr val="475569"/>
+                </a:solidFill>
+                <a:latin typeface="Segoe UI"/>
+              </a:rPr>
+              <a:t>ICA Aceptable (15.561 reg.)</a:t>
+            </a:r>
+          </a:p>
+        </p:txBody>
+      </p:sp>
+      <p:sp>
+        <p:nvSpPr>
+          <p:cNvPr id="9" name="Rounded Rectangle 8"/>
+          <p:cNvSpPr/>
+          <p:nvPr/>
+        </p:nvSpPr>
+        <p:spPr>
+          <a:xfrm>
+            <a:off x="6181344" y="1143000"/>
+            <a:ext cx="2651760" cy="932688"/>
+          </a:xfrm>
+          <a:prstGeom prst="roundRect">
+            <a:avLst>
+              <a:gd name="adj" fmla="val 3000"/>
+            </a:avLst>
+          </a:prstGeom>
+          <a:solidFill>
+            <a:srgbClr val="FFFFFF"/>
+          </a:solidFill>
+          <a:ln w="12700">
+            <a:solidFill>
+              <a:srgbClr val="CBD5E1"/>
+            </a:solidFill>
+          </a:ln>
+        </p:spPr>
+        <p:style>
+          <a:lnRef idx="1">
+            <a:schemeClr val="accent1"/>
+          </a:lnRef>
+          <a:fillRef idx="3">
+            <a:schemeClr val="accent1"/>
+          </a:fillRef>
+          <a:effectRef idx="2">
+            <a:schemeClr val="accent1"/>
+          </a:effectRef>
+          <a:fontRef idx="minor">
+            <a:schemeClr val="lt1"/>
+          </a:fontRef>
+        </p:style>
+        <p:txBody>
+          <a:bodyPr rtlCol="0" anchor="ctr"/>
+          <a:lstStyle/>
+          <a:p>
+            <a:pPr algn="ctr"/>
+          </a:p>
+        </p:txBody>
+      </p:sp>
+      <p:sp>
+        <p:nvSpPr>
+          <p:cNvPr id="10" name="TextBox 9"/>
           <p:cNvSpPr txBox="1"/>
           <p:nvPr/>
         </p:nvSpPr>
         <p:spPr>
           <a:xfrm>
-            <a:off x="609600" y="685800"/>
-            <a:ext cx="11582400" cy="409575"/>
+            <a:off x="6345936" y="1188720"/>
+            <a:ext cx="2322576" cy="822960"/>
           </a:xfrm>
           <a:prstGeom prst="rect">
             <a:avLst/>
@@ -7222,34 +7043,91 @@
           <a:noFill/>
         </p:spPr>
         <p:txBody>
-          <a:bodyPr wrap="none" lIns="0" rIns="0" tIns="0" bIns="0" anchor="t">
+          <a:bodyPr wrap="square">
             <a:spAutoFit/>
           </a:bodyPr>
           <a:lstStyle/>
           <a:p>
-            <a:pPr algn="l"/>
-            <a:r>
-              <a:rPr b="1" sz="2550" i="0" u="none">
-                <a:solidFill>
-                  <a:srgbClr val="002855"/>
-                </a:solidFill>
-                <a:latin typeface="Space Grotesk"/>
-              </a:rPr>
-              <a:t>Procesamiento Streaming con Apache Kafka y Spark</a:t>
-            </a:r>
-          </a:p>
-        </p:txBody>
-      </p:sp>
-      <p:sp>
-        <p:nvSpPr>
-          <p:cNvPr id="8" name="TextBox 7"/>
+            <a:r>
+              <a:rPr sz="2400" b="1">
+                <a:solidFill>
+                  <a:srgbClr val="E87722"/>
+                </a:solidFill>
+                <a:latin typeface="Segoe UI"/>
+              </a:rPr>
+              <a:t>2.9%</a:t>
+            </a:r>
+          </a:p>
+          <a:p>
+            <a:r>
+              <a:rPr sz="1050" b="1">
+                <a:solidFill>
+                  <a:srgbClr val="475569"/>
+                </a:solidFill>
+                <a:latin typeface="Segoe UI"/>
+              </a:rPr>
+              <a:t>Dañina Grupos Sensibles (1.696)</a:t>
+            </a:r>
+          </a:p>
+        </p:txBody>
+      </p:sp>
+      <p:sp>
+        <p:nvSpPr>
+          <p:cNvPr id="11" name="Rounded Rectangle 10"/>
+          <p:cNvSpPr/>
+          <p:nvPr/>
+        </p:nvSpPr>
+        <p:spPr>
+          <a:xfrm>
+            <a:off x="8997696" y="1143000"/>
+            <a:ext cx="2651760" cy="932688"/>
+          </a:xfrm>
+          <a:prstGeom prst="roundRect">
+            <a:avLst>
+              <a:gd name="adj" fmla="val 3000"/>
+            </a:avLst>
+          </a:prstGeom>
+          <a:solidFill>
+            <a:srgbClr val="FFFFFF"/>
+          </a:solidFill>
+          <a:ln w="12700">
+            <a:solidFill>
+              <a:srgbClr val="CBD5E1"/>
+            </a:solidFill>
+          </a:ln>
+        </p:spPr>
+        <p:style>
+          <a:lnRef idx="1">
+            <a:schemeClr val="accent1"/>
+          </a:lnRef>
+          <a:fillRef idx="3">
+            <a:schemeClr val="accent1"/>
+          </a:fillRef>
+          <a:effectRef idx="2">
+            <a:schemeClr val="accent1"/>
+          </a:effectRef>
+          <a:fontRef idx="minor">
+            <a:schemeClr val="lt1"/>
+          </a:fontRef>
+        </p:style>
+        <p:txBody>
+          <a:bodyPr rtlCol="0" anchor="ctr"/>
+          <a:lstStyle/>
+          <a:p>
+            <a:pPr algn="ctr"/>
+          </a:p>
+        </p:txBody>
+      </p:sp>
+      <p:sp>
+        <p:nvSpPr>
+          <p:cNvPr id="12" name="TextBox 11"/>
           <p:cNvSpPr txBox="1"/>
           <p:nvPr/>
         </p:nvSpPr>
         <p:spPr>
           <a:xfrm>
-            <a:off x="876300" y="1590675"/>
-            <a:ext cx="3482578" cy="171450"/>
+            <a:off x="9162288" y="1188720"/>
+            <a:ext cx="2322576" cy="822960"/>
           </a:xfrm>
           <a:prstGeom prst="rect">
             <a:avLst/>
@@ -7257,481 +7135,84 @@
           <a:noFill/>
         </p:spPr>
         <p:txBody>
-          <a:bodyPr wrap="none" lIns="0" rIns="0" tIns="0" bIns="0" anchor="t">
+          <a:bodyPr wrap="square">
             <a:spAutoFit/>
           </a:bodyPr>
           <a:lstStyle/>
           <a:p>
-            <a:pPr algn="l"/>
-            <a:r>
-              <a:rPr b="1" sz="1050" i="0" u="none">
-                <a:solidFill>
-                  <a:srgbClr val="D87014"/>
-                </a:solidFill>
-                <a:latin typeface="DM Sans"/>
-              </a:rPr>
-              <a:t>1 · PRODUCTOR IOT</a:t>
-            </a:r>
-          </a:p>
-        </p:txBody>
-      </p:sp>
-      <p:sp>
-        <p:nvSpPr>
-          <p:cNvPr id="9" name="TextBox 8"/>
-          <p:cNvSpPr txBox="1"/>
-          <p:nvPr/>
-        </p:nvSpPr>
-        <p:spPr>
-          <a:xfrm>
-            <a:off x="876300" y="1819275"/>
-            <a:ext cx="3656707" cy="257175"/>
-          </a:xfrm>
-          <a:prstGeom prst="rect">
-            <a:avLst/>
-          </a:prstGeom>
-          <a:noFill/>
-        </p:spPr>
-        <p:txBody>
-          <a:bodyPr wrap="none" lIns="0" rIns="0" tIns="0" bIns="0" anchor="t">
-            <a:spAutoFit/>
-          </a:bodyPr>
-          <a:lstStyle/>
-          <a:p>
-            <a:pPr algn="l"/>
-            <a:r>
-              <a:rPr b="1" sz="1575" i="0" u="none">
-                <a:solidFill>
-                  <a:srgbClr val="002855"/>
-                </a:solidFill>
-                <a:latin typeface="Space Grotesk"/>
-              </a:rPr>
-              <a:t>kafka_producer.py</a:t>
-            </a:r>
-          </a:p>
-        </p:txBody>
-      </p:sp>
-      <p:sp>
-        <p:nvSpPr>
-          <p:cNvPr id="10" name="TextBox 9"/>
-          <p:cNvSpPr txBox="1"/>
-          <p:nvPr/>
-        </p:nvSpPr>
-        <p:spPr>
-          <a:xfrm>
-            <a:off x="876300" y="2171700"/>
-            <a:ext cx="2881312" cy="685800"/>
-          </a:xfrm>
-          <a:prstGeom prst="rect">
-            <a:avLst/>
-          </a:prstGeom>
-          <a:noFill/>
-        </p:spPr>
-        <p:txBody>
-          <a:bodyPr wrap="square" lIns="0" rIns="0" tIns="0" bIns="0" anchor="t">
-            <a:spAutoFit/>
-          </a:bodyPr>
-          <a:lstStyle/>
-          <a:p>
-            <a:pPr algn="l"/>
-            <a:r>
-              <a:rPr b="0" sz="1350" i="0" u="none">
-                <a:solidFill>
-                  <a:srgbClr val="334155"/>
-                </a:solidFill>
-                <a:latin typeface="DM Sans"/>
-              </a:rPr>
-              <a:t>Emisión continua segundo a segundo de telemetría sintética en JSON.</a:t>
-            </a:r>
-          </a:p>
-        </p:txBody>
-      </p:sp>
-      <p:sp>
-        <p:nvSpPr>
-          <p:cNvPr id="11" name="TextBox 10"/>
-          <p:cNvSpPr txBox="1"/>
-          <p:nvPr/>
-        </p:nvSpPr>
-        <p:spPr>
-          <a:xfrm>
-            <a:off x="4424362" y="1590675"/>
-            <a:ext cx="3482578" cy="171450"/>
-          </a:xfrm>
-          <a:prstGeom prst="rect">
-            <a:avLst/>
-          </a:prstGeom>
-          <a:noFill/>
-        </p:spPr>
-        <p:txBody>
-          <a:bodyPr wrap="none" lIns="0" rIns="0" tIns="0" bIns="0" anchor="t">
-            <a:spAutoFit/>
-          </a:bodyPr>
-          <a:lstStyle/>
-          <a:p>
-            <a:pPr algn="l"/>
-            <a:r>
-              <a:rPr b="1" sz="1050" i="0" u="none">
-                <a:solidFill>
-                  <a:srgbClr val="D87014"/>
-                </a:solidFill>
-                <a:latin typeface="DM Sans"/>
-              </a:rPr>
-              <a:t>2 · BROKER DISTRIBUIDO</a:t>
-            </a:r>
-          </a:p>
-        </p:txBody>
-      </p:sp>
-      <p:sp>
-        <p:nvSpPr>
-          <p:cNvPr id="12" name="TextBox 11"/>
-          <p:cNvSpPr txBox="1"/>
-          <p:nvPr/>
-        </p:nvSpPr>
-        <p:spPr>
-          <a:xfrm>
-            <a:off x="4424362" y="1819275"/>
-            <a:ext cx="3656707" cy="257175"/>
-          </a:xfrm>
-          <a:prstGeom prst="rect">
-            <a:avLst/>
-          </a:prstGeom>
-          <a:noFill/>
-        </p:spPr>
-        <p:txBody>
-          <a:bodyPr wrap="none" lIns="0" rIns="0" tIns="0" bIns="0" anchor="t">
-            <a:spAutoFit/>
-          </a:bodyPr>
-          <a:lstStyle/>
-          <a:p>
-            <a:pPr algn="l"/>
-            <a:r>
-              <a:rPr b="1" sz="1575" i="0" u="none">
-                <a:solidFill>
-                  <a:srgbClr val="002855"/>
-                </a:solidFill>
-                <a:latin typeface="Space Grotesk"/>
-              </a:rPr>
-              <a:t>Cluster Kafka + ZooKeeper</a:t>
-            </a:r>
-          </a:p>
-        </p:txBody>
-      </p:sp>
-      <p:sp>
-        <p:nvSpPr>
-          <p:cNvPr id="13" name="TextBox 12"/>
-          <p:cNvSpPr txBox="1"/>
-          <p:nvPr/>
-        </p:nvSpPr>
-        <p:spPr>
-          <a:xfrm>
-            <a:off x="4424362" y="2171700"/>
-            <a:ext cx="2881312" cy="685800"/>
-          </a:xfrm>
-          <a:prstGeom prst="rect">
-            <a:avLst/>
-          </a:prstGeom>
-          <a:noFill/>
-        </p:spPr>
-        <p:txBody>
-          <a:bodyPr wrap="square" lIns="0" rIns="0" tIns="0" bIns="0" anchor="t">
-            <a:spAutoFit/>
-          </a:bodyPr>
-          <a:lstStyle/>
-          <a:p>
-            <a:pPr algn="l"/>
-            <a:r>
-              <a:rPr b="0" sz="1350" i="0" u="none">
-                <a:solidFill>
-                  <a:srgbClr val="334155"/>
-                </a:solidFill>
-                <a:latin typeface="DM Sans"/>
-              </a:rPr>
-              <a:t>Topic particionado </a:t>
-            </a:r>
-            <a:r>
-              <a:rPr b="0" sz="1350" i="0" u="none">
-                <a:solidFill>
-                  <a:srgbClr val="334155"/>
-                </a:solidFill>
-                <a:latin typeface="DM Sans"/>
-              </a:rPr>
-              <a:t>sensor_data</a:t>
-            </a:r>
-            <a:r>
-              <a:rPr b="0" sz="1350" i="0" u="none">
-                <a:solidFill>
-                  <a:srgbClr val="334155"/>
-                </a:solidFill>
-                <a:latin typeface="DM Sans"/>
-              </a:rPr>
-              <a:t> activo en Linux sobre </a:t>
-            </a:r>
-            <a:r>
-              <a:rPr b="0" sz="1350" i="0" u="none">
-                <a:solidFill>
-                  <a:srgbClr val="334155"/>
-                </a:solidFill>
-                <a:latin typeface="DM Sans"/>
-              </a:rPr>
-              <a:t>localhost:9092</a:t>
-            </a:r>
-            <a:r>
-              <a:rPr b="0" sz="1350" i="0" u="none">
-                <a:solidFill>
-                  <a:srgbClr val="334155"/>
-                </a:solidFill>
-                <a:latin typeface="DM Sans"/>
-              </a:rPr>
-              <a:t>.</a:t>
-            </a:r>
-          </a:p>
-        </p:txBody>
-      </p:sp>
-      <p:sp>
-        <p:nvSpPr>
-          <p:cNvPr id="14" name="TextBox 13"/>
-          <p:cNvSpPr txBox="1"/>
-          <p:nvPr/>
-        </p:nvSpPr>
-        <p:spPr>
-          <a:xfrm>
-            <a:off x="7972425" y="1590675"/>
-            <a:ext cx="4179093" cy="171450"/>
-          </a:xfrm>
-          <a:prstGeom prst="rect">
-            <a:avLst/>
-          </a:prstGeom>
-          <a:noFill/>
-        </p:spPr>
-        <p:txBody>
-          <a:bodyPr wrap="none" lIns="0" rIns="0" tIns="0" bIns="0" anchor="t">
-            <a:spAutoFit/>
-          </a:bodyPr>
-          <a:lstStyle/>
-          <a:p>
-            <a:pPr algn="l"/>
-            <a:r>
-              <a:rPr b="1" sz="1050" i="0" u="none">
-                <a:solidFill>
-                  <a:srgbClr val="D87014"/>
-                </a:solidFill>
-                <a:latin typeface="DM Sans"/>
-              </a:rPr>
-              <a:t>3 · STRUCTURED STREAMING</a:t>
-            </a:r>
-          </a:p>
-        </p:txBody>
-      </p:sp>
-      <p:sp>
-        <p:nvSpPr>
-          <p:cNvPr id="15" name="TextBox 14"/>
-          <p:cNvSpPr txBox="1"/>
-          <p:nvPr/>
-        </p:nvSpPr>
-        <p:spPr>
-          <a:xfrm>
-            <a:off x="7972425" y="1819275"/>
-            <a:ext cx="4219575" cy="257175"/>
-          </a:xfrm>
-          <a:prstGeom prst="rect">
-            <a:avLst/>
-          </a:prstGeom>
-          <a:noFill/>
-        </p:spPr>
-        <p:txBody>
-          <a:bodyPr wrap="none" lIns="0" rIns="0" tIns="0" bIns="0" anchor="t">
-            <a:spAutoFit/>
-          </a:bodyPr>
-          <a:lstStyle/>
-          <a:p>
-            <a:pPr algn="l"/>
-            <a:r>
-              <a:rPr b="1" sz="1575" i="0" u="none">
-                <a:solidFill>
-                  <a:srgbClr val="002855"/>
-                </a:solidFill>
-                <a:latin typeface="Space Grotesk"/>
-              </a:rPr>
-              <a:t>spark_streaming_consumer.py</a:t>
-            </a:r>
-          </a:p>
-        </p:txBody>
-      </p:sp>
-      <p:sp>
-        <p:nvSpPr>
-          <p:cNvPr id="16" name="TextBox 15"/>
-          <p:cNvSpPr txBox="1"/>
-          <p:nvPr/>
-        </p:nvSpPr>
-        <p:spPr>
-          <a:xfrm>
-            <a:off x="7972425" y="2171700"/>
-            <a:ext cx="3438525" cy="685800"/>
-          </a:xfrm>
-          <a:prstGeom prst="rect">
-            <a:avLst/>
-          </a:prstGeom>
-          <a:noFill/>
-        </p:spPr>
-        <p:txBody>
-          <a:bodyPr wrap="square" lIns="0" rIns="0" tIns="0" bIns="0" anchor="t">
-            <a:spAutoFit/>
-          </a:bodyPr>
-          <a:lstStyle/>
-          <a:p>
-            <a:pPr algn="l"/>
-            <a:r>
-              <a:rPr b="0" sz="1350" i="0" u="none">
-                <a:solidFill>
-                  <a:srgbClr val="334155"/>
-                </a:solidFill>
-                <a:latin typeface="DM Sans"/>
-              </a:rPr>
-              <a:t>Agregación en ventanas de 1 minuto con </a:t>
-            </a:r>
-            <a:r>
-              <a:rPr b="0" sz="1350" i="0" u="none">
-                <a:solidFill>
-                  <a:srgbClr val="334155"/>
-                </a:solidFill>
-                <a:latin typeface="DM Sans"/>
-              </a:rPr>
-              <a:t>groupBy(window(...), 'sensor_id')</a:t>
-            </a:r>
-            <a:r>
-              <a:rPr b="0" sz="1350" i="0" u="none">
-                <a:solidFill>
-                  <a:srgbClr val="334155"/>
-                </a:solidFill>
-                <a:latin typeface="DM Sans"/>
-              </a:rPr>
-              <a:t>.</a:t>
-            </a:r>
-          </a:p>
-        </p:txBody>
-      </p:sp>
-      <p:sp>
-        <p:nvSpPr>
-          <p:cNvPr id="17" name="TextBox 16"/>
-          <p:cNvSpPr txBox="1"/>
-          <p:nvPr/>
-        </p:nvSpPr>
-        <p:spPr>
-          <a:xfrm>
-            <a:off x="952500" y="5305425"/>
-            <a:ext cx="9906000" cy="171450"/>
-          </a:xfrm>
-          <a:prstGeom prst="rect">
-            <a:avLst/>
-          </a:prstGeom>
-          <a:noFill/>
-        </p:spPr>
-        <p:txBody>
-          <a:bodyPr wrap="none" lIns="0" rIns="0" tIns="0" bIns="0" anchor="t">
-            <a:spAutoFit/>
-          </a:bodyPr>
-          <a:lstStyle/>
-          <a:p/>
-        </p:txBody>
-      </p:sp>
-      <p:sp>
-        <p:nvSpPr>
-          <p:cNvPr id="18" name="TextBox 17"/>
-          <p:cNvSpPr txBox="1"/>
-          <p:nvPr/>
-        </p:nvSpPr>
-        <p:spPr>
-          <a:xfrm>
-            <a:off x="952500" y="5534025"/>
-            <a:ext cx="10401300" cy="295275"/>
-          </a:xfrm>
-          <a:prstGeom prst="rect">
-            <a:avLst/>
-          </a:prstGeom>
-          <a:noFill/>
-        </p:spPr>
-        <p:txBody>
-          <a:bodyPr wrap="none" lIns="0" rIns="0" tIns="0" bIns="0" anchor="t">
-            <a:spAutoFit/>
-          </a:bodyPr>
-          <a:lstStyle/>
-          <a:p/>
-        </p:txBody>
-      </p:sp>
-      <p:sp>
-        <p:nvSpPr>
-          <p:cNvPr id="19" name="TextBox 18"/>
-          <p:cNvSpPr txBox="1"/>
-          <p:nvPr/>
-        </p:nvSpPr>
-        <p:spPr>
-          <a:xfrm>
-            <a:off x="952500" y="5905500"/>
-            <a:ext cx="9906000" cy="228600"/>
-          </a:xfrm>
-          <a:prstGeom prst="rect">
-            <a:avLst/>
-          </a:prstGeom>
-          <a:noFill/>
-        </p:spPr>
-        <p:txBody>
-          <a:bodyPr wrap="none" lIns="0" rIns="0" tIns="0" bIns="0" anchor="t">
-            <a:spAutoFit/>
-          </a:bodyPr>
-          <a:lstStyle/>
-          <a:p/>
-        </p:txBody>
-      </p:sp>
-      <p:sp>
-        <p:nvSpPr>
-          <p:cNvPr id="20" name="TextBox 19"/>
-          <p:cNvSpPr txBox="1"/>
-          <p:nvPr/>
-        </p:nvSpPr>
-        <p:spPr>
-          <a:xfrm>
-            <a:off x="9953625" y="5395912"/>
-            <a:ext cx="1285875" cy="447675"/>
-          </a:xfrm>
-          <a:prstGeom prst="rect">
-            <a:avLst/>
-          </a:prstGeom>
-          <a:noFill/>
-        </p:spPr>
-        <p:txBody>
-          <a:bodyPr wrap="none" lIns="0" rIns="0" tIns="0" bIns="0" anchor="t">
-            <a:spAutoFit/>
-          </a:bodyPr>
-          <a:lstStyle/>
-          <a:p/>
-        </p:txBody>
-      </p:sp>
-      <p:sp>
-        <p:nvSpPr>
-          <p:cNvPr id="21" name="TextBox 20"/>
-          <p:cNvSpPr txBox="1"/>
-          <p:nvPr/>
-        </p:nvSpPr>
-        <p:spPr>
-          <a:xfrm>
-            <a:off x="9953625" y="5843587"/>
-            <a:ext cx="1285875" cy="200025"/>
-          </a:xfrm>
-          <a:prstGeom prst="rect">
-            <a:avLst/>
-          </a:prstGeom>
-          <a:noFill/>
-        </p:spPr>
-        <p:txBody>
-          <a:bodyPr wrap="none" lIns="0" rIns="0" tIns="0" bIns="0" anchor="t">
-            <a:spAutoFit/>
-          </a:bodyPr>
-          <a:lstStyle/>
-          <a:p/>
+            <a:r>
+              <a:rPr sz="2400" b="1">
+                <a:solidFill>
+                  <a:srgbClr val="DC2626"/>
+                </a:solidFill>
+                <a:latin typeface="Segoe UI"/>
+              </a:rPr>
+              <a:t>0.1%</a:t>
+            </a:r>
+          </a:p>
+          <a:p>
+            <a:r>
+              <a:rPr sz="1050" b="1">
+                <a:solidFill>
+                  <a:srgbClr val="475569"/>
+                </a:solidFill>
+                <a:latin typeface="Segoe UI"/>
+              </a:rPr>
+              <a:t>ICA Dañina Crítica (57 reg.)</a:t>
+            </a:r>
+          </a:p>
+        </p:txBody>
+      </p:sp>
+      <p:sp>
+        <p:nvSpPr>
+          <p:cNvPr id="13" name="Rounded Rectangle 12"/>
+          <p:cNvSpPr/>
+          <p:nvPr/>
+        </p:nvSpPr>
+        <p:spPr>
+          <a:xfrm>
+            <a:off x="548640" y="2212848"/>
+            <a:ext cx="5413248" cy="4297680"/>
+          </a:xfrm>
+          <a:prstGeom prst="roundRect">
+            <a:avLst>
+              <a:gd name="adj" fmla="val 3000"/>
+            </a:avLst>
+          </a:prstGeom>
+          <a:solidFill>
+            <a:srgbClr val="FFFFFF"/>
+          </a:solidFill>
+          <a:ln w="12700">
+            <a:solidFill>
+              <a:srgbClr val="CBD5E1"/>
+            </a:solidFill>
+          </a:ln>
+        </p:spPr>
+        <p:style>
+          <a:lnRef idx="1">
+            <a:schemeClr val="accent1"/>
+          </a:lnRef>
+          <a:fillRef idx="3">
+            <a:schemeClr val="accent1"/>
+          </a:fillRef>
+          <a:effectRef idx="2">
+            <a:schemeClr val="accent1"/>
+          </a:effectRef>
+          <a:fontRef idx="minor">
+            <a:schemeClr val="lt1"/>
+          </a:fontRef>
+        </p:style>
+        <p:txBody>
+          <a:bodyPr rtlCol="0" anchor="ctr"/>
+          <a:lstStyle/>
+          <a:p>
+            <a:pPr algn="ctr"/>
+          </a:p>
         </p:txBody>
       </p:sp>
       <p:pic>
         <p:nvPicPr>
-          <p:cNvPr id="22" name="Picture 21" descr="figura5_streaming_kafka_spark.png"/>
+          <p:cNvPr id="14" name="Picture 13" descr="figura2_distribucion_ica.png"/>
           <p:cNvPicPr>
             <a:picLocks noChangeAspect="1"/>
           </p:cNvPicPr>
@@ -7745,14 +7226,171 @@
         </p:blipFill>
         <p:spPr>
           <a:xfrm>
-            <a:off x="612648" y="3291840"/>
-            <a:ext cx="10972800" cy="3291840"/>
+            <a:off x="685800" y="2509174"/>
+            <a:ext cx="5138928" cy="2891210"/>
           </a:xfrm>
           <a:prstGeom prst="rect">
             <a:avLst/>
           </a:prstGeom>
         </p:spPr>
       </p:pic>
+      <p:sp>
+        <p:nvSpPr>
+          <p:cNvPr id="15" name="TextBox 14"/>
+          <p:cNvSpPr txBox="1"/>
+          <p:nvPr/>
+        </p:nvSpPr>
+        <p:spPr>
+          <a:xfrm>
+            <a:off x="731520" y="5687568"/>
+            <a:ext cx="5047488" cy="731520"/>
+          </a:xfrm>
+          <a:prstGeom prst="rect">
+            <a:avLst/>
+          </a:prstGeom>
+          <a:noFill/>
+        </p:spPr>
+        <p:txBody>
+          <a:bodyPr wrap="square">
+            <a:spAutoFit/>
+          </a:bodyPr>
+          <a:lstStyle/>
+          <a:p>
+            <a:r>
+              <a:rPr sz="1100" b="1">
+                <a:solidFill>
+                  <a:srgbClr val="002855"/>
+                </a:solidFill>
+                <a:latin typeface="Segoe UI"/>
+              </a:rPr>
+              <a:t>Comportamiento Nacional ICA: </a:t>
+            </a:r>
+            <a:r>
+              <a:rPr sz="1050">
+                <a:solidFill>
+                  <a:srgbClr val="0F172A"/>
+                </a:solidFill>
+                <a:latin typeface="Segoe UI"/>
+              </a:rPr>
+              <a:t>El 96.97% de las mediciones se ubica en rangos seguros (Buena/Aceptable), pero existe un 2.97% de episodios críticos que requieren alerta temprana.</a:t>
+            </a:r>
+          </a:p>
+        </p:txBody>
+      </p:sp>
+      <p:sp>
+        <p:nvSpPr>
+          <p:cNvPr id="16" name="Rounded Rectangle 15"/>
+          <p:cNvSpPr/>
+          <p:nvPr/>
+        </p:nvSpPr>
+        <p:spPr>
+          <a:xfrm>
+            <a:off x="6227064" y="2212848"/>
+            <a:ext cx="5413248" cy="4297680"/>
+          </a:xfrm>
+          <a:prstGeom prst="roundRect">
+            <a:avLst>
+              <a:gd name="adj" fmla="val 3000"/>
+            </a:avLst>
+          </a:prstGeom>
+          <a:solidFill>
+            <a:srgbClr val="FFFFFF"/>
+          </a:solidFill>
+          <a:ln w="12700">
+            <a:solidFill>
+              <a:srgbClr val="CBD5E1"/>
+            </a:solidFill>
+          </a:ln>
+        </p:spPr>
+        <p:style>
+          <a:lnRef idx="1">
+            <a:schemeClr val="accent1"/>
+          </a:lnRef>
+          <a:fillRef idx="3">
+            <a:schemeClr val="accent1"/>
+          </a:fillRef>
+          <a:effectRef idx="2">
+            <a:schemeClr val="accent1"/>
+          </a:effectRef>
+          <a:fontRef idx="minor">
+            <a:schemeClr val="lt1"/>
+          </a:fontRef>
+        </p:style>
+        <p:txBody>
+          <a:bodyPr rtlCol="0" anchor="ctr"/>
+          <a:lstStyle/>
+          <a:p>
+            <a:pPr algn="ctr"/>
+          </a:p>
+        </p:txBody>
+      </p:sp>
+      <p:pic>
+        <p:nvPicPr>
+          <p:cNvPr id="17" name="Picture 16" descr="figura4_dispersion_clima_contaminacion.png"/>
+          <p:cNvPicPr>
+            <a:picLocks noChangeAspect="1"/>
+          </p:cNvPicPr>
+          <p:nvPr/>
+        </p:nvPicPr>
+        <p:blipFill>
+          <a:blip r:embed="rId3"/>
+          <a:stretch>
+            <a:fillRect/>
+          </a:stretch>
+        </p:blipFill>
+        <p:spPr>
+          <a:xfrm>
+            <a:off x="6364224" y="2527300"/>
+            <a:ext cx="5138928" cy="2854960"/>
+          </a:xfrm>
+          <a:prstGeom prst="rect">
+            <a:avLst/>
+          </a:prstGeom>
+        </p:spPr>
+      </p:pic>
+      <p:sp>
+        <p:nvSpPr>
+          <p:cNvPr id="18" name="TextBox 17"/>
+          <p:cNvSpPr txBox="1"/>
+          <p:nvPr/>
+        </p:nvSpPr>
+        <p:spPr>
+          <a:xfrm>
+            <a:off x="6409944" y="5687568"/>
+            <a:ext cx="5047488" cy="731520"/>
+          </a:xfrm>
+          <a:prstGeom prst="rect">
+            <a:avLst/>
+          </a:prstGeom>
+          <a:noFill/>
+        </p:spPr>
+        <p:txBody>
+          <a:bodyPr wrap="square">
+            <a:spAutoFit/>
+          </a:bodyPr>
+          <a:lstStyle/>
+          <a:p>
+            <a:r>
+              <a:rPr sz="1100" b="1">
+                <a:solidFill>
+                  <a:srgbClr val="E87722"/>
+                </a:solidFill>
+                <a:latin typeface="Segoe UI"/>
+              </a:rPr>
+              <a:t>Efecto de Inversión Térmica: </a:t>
+            </a:r>
+            <a:r>
+              <a:rPr sz="1050">
+                <a:solidFill>
+                  <a:srgbClr val="0F172A"/>
+                </a:solidFill>
+                <a:latin typeface="Segoe UI"/>
+              </a:rPr>
+              <a:t>Temperaturas bajas (12–18 °C) combinadas con alta humedad relativa (&gt;75%) encapsulan los contaminantes y disparan los picos de PM2.5.</a:t>
+            </a:r>
+          </a:p>
+        </p:txBody>
+      </p:sp>
     </p:spTree>
   </p:cSld>
   <p:clrMapOvr>
@@ -7764,14 +7402,6 @@
 <file path=ppt/slides/slide7.xml><?xml version="1.0" encoding="utf-8"?>
 <p:sld xmlns:a="http://schemas.openxmlformats.org/drawingml/2006/main" xmlns:p="http://schemas.openxmlformats.org/presentationml/2006/main" xmlns:r="http://schemas.openxmlformats.org/officeDocument/2006/relationships">
   <p:cSld>
-    <p:bg>
-      <p:bgPr>
-        <a:solidFill>
-          <a:srgbClr val="002855"/>
-        </a:solidFill>
-        <a:effectLst/>
-      </p:bgPr>
-    </p:bg>
     <p:spTree>
       <p:nvGrpSpPr>
         <p:cNvPr id="1" name=""/>
@@ -7781,27 +7411,24 @@
       <p:grpSpPr/>
       <p:sp>
         <p:nvSpPr>
-          <p:cNvPr id="2" name="Rounded Rectangle 1"/>
+          <p:cNvPr id="2" name="Rectangle 1"/>
           <p:cNvSpPr/>
           <p:nvPr/>
         </p:nvSpPr>
         <p:spPr>
           <a:xfrm>
-            <a:off x="609600" y="4953000"/>
-            <a:ext cx="10972800" cy="1447800"/>
-          </a:xfrm>
-          <a:prstGeom prst="roundRect">
-            <a:avLst>
-              <a:gd name="adj" fmla="val 9210"/>
-            </a:avLst>
+            <a:off x="0" y="0"/>
+            <a:ext cx="12191695" cy="6858000"/>
+          </a:xfrm>
+          <a:prstGeom prst="rect">
+            <a:avLst/>
           </a:prstGeom>
           <a:solidFill>
-            <a:srgbClr val="FFFFFF"/>
+            <a:srgbClr val="F8FAFC"/>
           </a:solidFill>
           <a:ln>
             <a:noFill/>
           </a:ln>
-          <a:effectLst/>
         </p:spPr>
         <p:style>
           <a:lnRef idx="1">
@@ -7827,27 +7454,94 @@
       </p:sp>
       <p:sp>
         <p:nvSpPr>
-          <p:cNvPr id="3" name="Rounded Rectangle 2"/>
+          <p:cNvPr id="3" name="TextBox 2"/>
+          <p:cNvSpPr txBox="1"/>
+          <p:nvPr/>
+        </p:nvSpPr>
+        <p:spPr>
+          <a:xfrm>
+            <a:off x="548640" y="320040"/>
+            <a:ext cx="11064240" cy="256032"/>
+          </a:xfrm>
+          <a:prstGeom prst="rect">
+            <a:avLst/>
+          </a:prstGeom>
+          <a:noFill/>
+        </p:spPr>
+        <p:txBody>
+          <a:bodyPr wrap="square" lIns="0" tIns="0" rIns="0" bIns="0">
+            <a:spAutoFit/>
+          </a:bodyPr>
+          <a:lstStyle/>
+          <a:p>
+            <a:r>
+              <a:rPr sz="1050" b="1">
+                <a:solidFill>
+                  <a:srgbClr val="E87722"/>
+                </a:solidFill>
+                <a:latin typeface="Segoe UI"/>
+              </a:rPr>
+              <a:t>06 · PROCESAMIENTO EN TIEMPO REAL (ANEXO 3 – PARTE 1)</a:t>
+            </a:r>
+          </a:p>
+        </p:txBody>
+      </p:sp>
+      <p:sp>
+        <p:nvSpPr>
+          <p:cNvPr id="4" name="TextBox 3"/>
+          <p:cNvSpPr txBox="1"/>
+          <p:nvPr/>
+        </p:nvSpPr>
+        <p:spPr>
+          <a:xfrm>
+            <a:off x="548640" y="548640"/>
+            <a:ext cx="11091672" cy="438912"/>
+          </a:xfrm>
+          <a:prstGeom prst="rect">
+            <a:avLst/>
+          </a:prstGeom>
+          <a:noFill/>
+        </p:spPr>
+        <p:txBody>
+          <a:bodyPr wrap="square" lIns="0" tIns="0" rIns="0" bIns="0">
+            <a:spAutoFit/>
+          </a:bodyPr>
+          <a:lstStyle/>
+          <a:p>
+            <a:r>
+              <a:rPr sz="2100" b="1">
+                <a:solidFill>
+                  <a:srgbClr val="002855"/>
+                </a:solidFill>
+                <a:latin typeface="Segoe UI"/>
+              </a:rPr>
+              <a:t>Configuración del Clúster Kafka, Creación del Topic y Scripts en Python</a:t>
+            </a:r>
+          </a:p>
+        </p:txBody>
+      </p:sp>
+      <p:sp>
+        <p:nvSpPr>
+          <p:cNvPr id="5" name="Rounded Rectangle 4"/>
           <p:cNvSpPr/>
           <p:nvPr/>
         </p:nvSpPr>
         <p:spPr>
           <a:xfrm>
-            <a:off x="609600" y="2243137"/>
-            <a:ext cx="3505200" cy="1562100"/>
+            <a:off x="548640" y="1143000"/>
+            <a:ext cx="3575304" cy="896112"/>
           </a:xfrm>
           <a:prstGeom prst="roundRect">
             <a:avLst>
-              <a:gd name="adj" fmla="val 7317"/>
+              <a:gd name="adj" fmla="val 3000"/>
             </a:avLst>
           </a:prstGeom>
           <a:solidFill>
-            <a:srgbClr val="0F3460"/>
+            <a:srgbClr val="002855"/>
           </a:solidFill>
           <a:ln>
             <a:noFill/>
           </a:ln>
-          <a:effectLst/>
         </p:spPr>
         <p:style>
           <a:lnRef idx="1">
@@ -7873,27 +7567,76 @@
       </p:sp>
       <p:sp>
         <p:nvSpPr>
-          <p:cNvPr id="4" name="Rounded Rectangle 3"/>
+          <p:cNvPr id="6" name="TextBox 5"/>
+          <p:cNvSpPr txBox="1"/>
+          <p:nvPr/>
+        </p:nvSpPr>
+        <p:spPr>
+          <a:xfrm>
+            <a:off x="694944" y="1207008"/>
+            <a:ext cx="3273552" cy="768096"/>
+          </a:xfrm>
+          <a:prstGeom prst="rect">
+            <a:avLst/>
+          </a:prstGeom>
+          <a:noFill/>
+        </p:spPr>
+        <p:txBody>
+          <a:bodyPr wrap="square">
+            <a:spAutoFit/>
+          </a:bodyPr>
+          <a:lstStyle/>
+          <a:p>
+            <a:r>
+              <a:rPr sz="1050" b="1">
+                <a:solidFill>
+                  <a:srgbClr val="F2A900"/>
+                </a:solidFill>
+                <a:latin typeface="Segoe UI"/>
+              </a:rPr>
+              <a:t>1 · CLÚSTER ZOOKEEPER + KAFKA</a:t>
+            </a:r>
+          </a:p>
+          <a:p>
+            <a:pPr>
+              <a:spcBef>
+                <a:spcPts val="200"/>
+              </a:spcBef>
+            </a:pPr>
+            <a:r>
+              <a:rPr sz="980">
+                <a:solidFill>
+                  <a:srgbClr val="FFFFFF"/>
+                </a:solidFill>
+                <a:latin typeface="Segoe UI"/>
+              </a:rPr>
+              <a:t>Inicio de demonios en /opt/Kafka y creación del topic 'sensor_data' en localhost:9092.</a:t>
+            </a:r>
+          </a:p>
+        </p:txBody>
+      </p:sp>
+      <p:sp>
+        <p:nvSpPr>
+          <p:cNvPr id="7" name="Rounded Rectangle 6"/>
           <p:cNvSpPr/>
           <p:nvPr/>
         </p:nvSpPr>
         <p:spPr>
           <a:xfrm>
-            <a:off x="4343400" y="2243137"/>
-            <a:ext cx="3505200" cy="1562100"/>
+            <a:off x="4306824" y="1143000"/>
+            <a:ext cx="3575304" cy="896112"/>
           </a:xfrm>
           <a:prstGeom prst="roundRect">
             <a:avLst>
-              <a:gd name="adj" fmla="val 7317"/>
+              <a:gd name="adj" fmla="val 3000"/>
             </a:avLst>
           </a:prstGeom>
           <a:solidFill>
-            <a:srgbClr val="0F3460"/>
+            <a:srgbClr val="002855"/>
           </a:solidFill>
           <a:ln>
             <a:noFill/>
           </a:ln>
-          <a:effectLst/>
         </p:spPr>
         <p:style>
           <a:lnRef idx="1">
@@ -7919,27 +7662,76 @@
       </p:sp>
       <p:sp>
         <p:nvSpPr>
-          <p:cNvPr id="5" name="Rounded Rectangle 4"/>
+          <p:cNvPr id="8" name="TextBox 7"/>
+          <p:cNvSpPr txBox="1"/>
+          <p:nvPr/>
+        </p:nvSpPr>
+        <p:spPr>
+          <a:xfrm>
+            <a:off x="4453128" y="1207008"/>
+            <a:ext cx="3273552" cy="768096"/>
+          </a:xfrm>
+          <a:prstGeom prst="rect">
+            <a:avLst/>
+          </a:prstGeom>
+          <a:noFill/>
+        </p:spPr>
+        <p:txBody>
+          <a:bodyPr wrap="square">
+            <a:spAutoFit/>
+          </a:bodyPr>
+          <a:lstStyle/>
+          <a:p>
+            <a:r>
+              <a:rPr sz="1050" b="1">
+                <a:solidFill>
+                  <a:srgbClr val="F2A900"/>
+                </a:solidFill>
+                <a:latin typeface="Segoe UI"/>
+              </a:rPr>
+              <a:t>2 · PRODUCTOR (kafka_producer.py)</a:t>
+            </a:r>
+          </a:p>
+          <a:p>
+            <a:pPr>
+              <a:spcBef>
+                <a:spcPts val="200"/>
+              </a:spcBef>
+            </a:pPr>
+            <a:r>
+              <a:rPr sz="980">
+                <a:solidFill>
+                  <a:srgbClr val="FFFFFF"/>
+                </a:solidFill>
+                <a:latin typeface="Segoe UI"/>
+              </a:rPr>
+              <a:t>Simulador telemétrico IoT que serializa lecturas JSON (sensor_id, temp, humidity, timestamp) cada 1s.</a:t>
+            </a:r>
+          </a:p>
+        </p:txBody>
+      </p:sp>
+      <p:sp>
+        <p:nvSpPr>
+          <p:cNvPr id="9" name="Rounded Rectangle 8"/>
           <p:cNvSpPr/>
           <p:nvPr/>
         </p:nvSpPr>
         <p:spPr>
           <a:xfrm>
-            <a:off x="8077200" y="2243137"/>
-            <a:ext cx="3505200" cy="1562100"/>
+            <a:off x="8065008" y="1143000"/>
+            <a:ext cx="3575304" cy="896112"/>
           </a:xfrm>
           <a:prstGeom prst="roundRect">
             <a:avLst>
-              <a:gd name="adj" fmla="val 7317"/>
+              <a:gd name="adj" fmla="val 3000"/>
             </a:avLst>
           </a:prstGeom>
           <a:solidFill>
-            <a:srgbClr val="0F3460"/>
+            <a:srgbClr val="002855"/>
           </a:solidFill>
           <a:ln>
             <a:noFill/>
           </a:ln>
-          <a:effectLst/>
         </p:spPr>
         <p:style>
           <a:lnRef idx="1">
@@ -7963,9 +7755,106 @@
           </a:p>
         </p:txBody>
       </p:sp>
+      <p:sp>
+        <p:nvSpPr>
+          <p:cNvPr id="10" name="TextBox 9"/>
+          <p:cNvSpPr txBox="1"/>
+          <p:nvPr/>
+        </p:nvSpPr>
+        <p:spPr>
+          <a:xfrm>
+            <a:off x="8211312" y="1207008"/>
+            <a:ext cx="3273552" cy="768096"/>
+          </a:xfrm>
+          <a:prstGeom prst="rect">
+            <a:avLst/>
+          </a:prstGeom>
+          <a:noFill/>
+        </p:spPr>
+        <p:txBody>
+          <a:bodyPr wrap="square">
+            <a:spAutoFit/>
+          </a:bodyPr>
+          <a:lstStyle/>
+          <a:p>
+            <a:r>
+              <a:rPr sz="1050" b="1">
+                <a:solidFill>
+                  <a:srgbClr val="F2A900"/>
+                </a:solidFill>
+                <a:latin typeface="Segoe UI"/>
+              </a:rPr>
+              <a:t>3 · CONSUMIDOR (spark_streaming_consumer.py)</a:t>
+            </a:r>
+          </a:p>
+          <a:p>
+            <a:pPr>
+              <a:spcBef>
+                <a:spcPts val="200"/>
+              </a:spcBef>
+            </a:pPr>
+            <a:r>
+              <a:rPr sz="980">
+                <a:solidFill>
+                  <a:srgbClr val="FFFFFF"/>
+                </a:solidFill>
+                <a:latin typeface="Segoe UI"/>
+              </a:rPr>
+              <a:t>Structured Streaming que suscribe a 'sensor_data' y calcula promedios en ventanas de 1 minuto.</a:t>
+            </a:r>
+          </a:p>
+        </p:txBody>
+      </p:sp>
+      <p:sp>
+        <p:nvSpPr>
+          <p:cNvPr id="11" name="Rounded Rectangle 10"/>
+          <p:cNvSpPr/>
+          <p:nvPr/>
+        </p:nvSpPr>
+        <p:spPr>
+          <a:xfrm>
+            <a:off x="548640" y="2148840"/>
+            <a:ext cx="11091672" cy="4389120"/>
+          </a:xfrm>
+          <a:prstGeom prst="roundRect">
+            <a:avLst>
+              <a:gd name="adj" fmla="val 3000"/>
+            </a:avLst>
+          </a:prstGeom>
+          <a:solidFill>
+            <a:srgbClr val="FFFFFF"/>
+          </a:solidFill>
+          <a:ln w="12700">
+            <a:solidFill>
+              <a:srgbClr val="CBD5E1"/>
+            </a:solidFill>
+          </a:ln>
+        </p:spPr>
+        <p:style>
+          <a:lnRef idx="1">
+            <a:schemeClr val="accent1"/>
+          </a:lnRef>
+          <a:fillRef idx="3">
+            <a:schemeClr val="accent1"/>
+          </a:fillRef>
+          <a:effectRef idx="2">
+            <a:schemeClr val="accent1"/>
+          </a:effectRef>
+          <a:fontRef idx="minor">
+            <a:schemeClr val="lt1"/>
+          </a:fontRef>
+        </p:style>
+        <p:txBody>
+          <a:bodyPr rtlCol="0" anchor="ctr"/>
+          <a:lstStyle/>
+          <a:p>
+            <a:pPr algn="ctr"/>
+          </a:p>
+        </p:txBody>
+      </p:sp>
       <p:pic>
         <p:nvPicPr>
-          <p:cNvPr id="6" name="Picture 5" descr="image.png"/>
+          <p:cNvPr id="12" name="Picture 11" descr="captura_kafka_instalacion_y_codigo.png"/>
           <p:cNvPicPr>
             <a:picLocks noChangeAspect="1"/>
           </p:cNvPicPr>
@@ -7979,17 +7868,740 @@
         </p:blipFill>
         <p:spPr>
           <a:xfrm>
-            <a:off x="914400" y="5200650"/>
-            <a:ext cx="133350" cy="133350"/>
+            <a:off x="2197124" y="2212848"/>
+            <a:ext cx="7794702" cy="4261104"/>
           </a:xfrm>
           <a:prstGeom prst="rect">
             <a:avLst/>
           </a:prstGeom>
         </p:spPr>
       </p:pic>
+    </p:spTree>
+  </p:cSld>
+  <p:clrMapOvr>
+    <a:masterClrMapping/>
+  </p:clrMapOvr>
+</p:sld>
+</file>
+
+<file path=ppt/slides/slide8.xml><?xml version="1.0" encoding="utf-8"?>
+<p:sld xmlns:a="http://schemas.openxmlformats.org/drawingml/2006/main" xmlns:p="http://schemas.openxmlformats.org/presentationml/2006/main" xmlns:r="http://schemas.openxmlformats.org/officeDocument/2006/relationships">
+  <p:cSld>
+    <p:spTree>
+      <p:nvGrpSpPr>
+        <p:cNvPr id="1" name=""/>
+        <p:cNvGrpSpPr/>
+        <p:nvPr/>
+      </p:nvGrpSpPr>
+      <p:grpSpPr/>
+      <p:sp>
+        <p:nvSpPr>
+          <p:cNvPr id="2" name="Rectangle 1"/>
+          <p:cNvSpPr/>
+          <p:nvPr/>
+        </p:nvSpPr>
+        <p:spPr>
+          <a:xfrm>
+            <a:off x="0" y="0"/>
+            <a:ext cx="12191695" cy="6858000"/>
+          </a:xfrm>
+          <a:prstGeom prst="rect">
+            <a:avLst/>
+          </a:prstGeom>
+          <a:solidFill>
+            <a:srgbClr val="F8FAFC"/>
+          </a:solidFill>
+          <a:ln>
+            <a:noFill/>
+          </a:ln>
+        </p:spPr>
+        <p:style>
+          <a:lnRef idx="1">
+            <a:schemeClr val="accent1"/>
+          </a:lnRef>
+          <a:fillRef idx="3">
+            <a:schemeClr val="accent1"/>
+          </a:fillRef>
+          <a:effectRef idx="2">
+            <a:schemeClr val="accent1"/>
+          </a:effectRef>
+          <a:fontRef idx="minor">
+            <a:schemeClr val="lt1"/>
+          </a:fontRef>
+        </p:style>
+        <p:txBody>
+          <a:bodyPr rtlCol="0" anchor="ctr"/>
+          <a:lstStyle/>
+          <a:p>
+            <a:pPr algn="ctr"/>
+          </a:p>
+        </p:txBody>
+      </p:sp>
+      <p:sp>
+        <p:nvSpPr>
+          <p:cNvPr id="3" name="TextBox 2"/>
+          <p:cNvSpPr txBox="1"/>
+          <p:nvPr/>
+        </p:nvSpPr>
+        <p:spPr>
+          <a:xfrm>
+            <a:off x="548640" y="320040"/>
+            <a:ext cx="11064240" cy="256032"/>
+          </a:xfrm>
+          <a:prstGeom prst="rect">
+            <a:avLst/>
+          </a:prstGeom>
+          <a:noFill/>
+        </p:spPr>
+        <p:txBody>
+          <a:bodyPr wrap="square" lIns="0" tIns="0" rIns="0" bIns="0">
+            <a:spAutoFit/>
+          </a:bodyPr>
+          <a:lstStyle/>
+          <a:p>
+            <a:r>
+              <a:rPr sz="1050" b="1">
+                <a:solidFill>
+                  <a:srgbClr val="E87722"/>
+                </a:solidFill>
+                <a:latin typeface="Segoe UI"/>
+              </a:rPr>
+              <a:t>07 · PROCESAMIENTO EN TIEMPO REAL (ANEXO 3 – PARTE 2)</a:t>
+            </a:r>
+          </a:p>
+        </p:txBody>
+      </p:sp>
+      <p:sp>
+        <p:nvSpPr>
+          <p:cNvPr id="4" name="TextBox 3"/>
+          <p:cNvSpPr txBox="1"/>
+          <p:nvPr/>
+        </p:nvSpPr>
+        <p:spPr>
+          <a:xfrm>
+            <a:off x="548640" y="548640"/>
+            <a:ext cx="11091672" cy="438912"/>
+          </a:xfrm>
+          <a:prstGeom prst="rect">
+            <a:avLst/>
+          </a:prstGeom>
+          <a:noFill/>
+        </p:spPr>
+        <p:txBody>
+          <a:bodyPr wrap="square" lIns="0" tIns="0" rIns="0" bIns="0">
+            <a:spAutoFit/>
+          </a:bodyPr>
+          <a:lstStyle/>
+          <a:p>
+            <a:r>
+              <a:rPr sz="2100" b="1">
+                <a:solidFill>
+                  <a:srgbClr val="002855"/>
+                </a:solidFill>
+                <a:latin typeface="Segoe UI"/>
+              </a:rPr>
+              <a:t>Ejecución Concurrente en Consola: Productor Kafka y Consumidor Spark Streaming</a:t>
+            </a:r>
+          </a:p>
+        </p:txBody>
+      </p:sp>
+      <p:sp>
+        <p:nvSpPr>
+          <p:cNvPr id="5" name="Rounded Rectangle 4"/>
+          <p:cNvSpPr/>
+          <p:nvPr/>
+        </p:nvSpPr>
+        <p:spPr>
+          <a:xfrm>
+            <a:off x="548640" y="1115568"/>
+            <a:ext cx="5413248" cy="896112"/>
+          </a:xfrm>
+          <a:prstGeom prst="roundRect">
+            <a:avLst>
+              <a:gd name="adj" fmla="val 3000"/>
+            </a:avLst>
+          </a:prstGeom>
+          <a:solidFill>
+            <a:srgbClr val="002855"/>
+          </a:solidFill>
+          <a:ln>
+            <a:noFill/>
+          </a:ln>
+        </p:spPr>
+        <p:style>
+          <a:lnRef idx="1">
+            <a:schemeClr val="accent1"/>
+          </a:lnRef>
+          <a:fillRef idx="3">
+            <a:schemeClr val="accent1"/>
+          </a:fillRef>
+          <a:effectRef idx="2">
+            <a:schemeClr val="accent1"/>
+          </a:effectRef>
+          <a:fontRef idx="minor">
+            <a:schemeClr val="lt1"/>
+          </a:fontRef>
+        </p:style>
+        <p:txBody>
+          <a:bodyPr rtlCol="0" anchor="ctr"/>
+          <a:lstStyle/>
+          <a:p>
+            <a:pPr algn="ctr"/>
+          </a:p>
+        </p:txBody>
+      </p:sp>
+      <p:sp>
+        <p:nvSpPr>
+          <p:cNvPr id="6" name="TextBox 5"/>
+          <p:cNvSpPr txBox="1"/>
+          <p:nvPr/>
+        </p:nvSpPr>
+        <p:spPr>
+          <a:xfrm>
+            <a:off x="713232" y="1170432"/>
+            <a:ext cx="5084064" cy="777240"/>
+          </a:xfrm>
+          <a:prstGeom prst="rect">
+            <a:avLst/>
+          </a:prstGeom>
+          <a:noFill/>
+        </p:spPr>
+        <p:txBody>
+          <a:bodyPr wrap="square">
+            <a:spAutoFit/>
+          </a:bodyPr>
+          <a:lstStyle/>
+          <a:p>
+            <a:r>
+              <a:rPr sz="1050" b="1">
+                <a:solidFill>
+                  <a:srgbClr val="F2A900"/>
+                </a:solidFill>
+                <a:latin typeface="Segoe UI"/>
+              </a:rPr>
+              <a:t>TERMINAL 1 · PRODUCTOR KAFKA (python3 kafka_producer.py)</a:t>
+            </a:r>
+          </a:p>
+          <a:p>
+            <a:pPr>
+              <a:spcBef>
+                <a:spcPts val="200"/>
+              </a:spcBef>
+            </a:pPr>
+            <a:r>
+              <a:rPr sz="980">
+                <a:solidFill>
+                  <a:srgbClr val="FFFFFF"/>
+                </a:solidFill>
+                <a:latin typeface="Segoe UI"/>
+              </a:rPr>
+              <a:t>Genera y transmite en bucle continuo (1 evento/seg) lecturas telemétricas simuladas en formato JSON hacia el topic 'sensor_data' en localhost:9092.</a:t>
+            </a:r>
+          </a:p>
+        </p:txBody>
+      </p:sp>
+      <p:sp>
+        <p:nvSpPr>
+          <p:cNvPr id="7" name="Rounded Rectangle 6"/>
+          <p:cNvSpPr/>
+          <p:nvPr/>
+        </p:nvSpPr>
+        <p:spPr>
+          <a:xfrm>
+            <a:off x="6227064" y="1115568"/>
+            <a:ext cx="5413248" cy="896112"/>
+          </a:xfrm>
+          <a:prstGeom prst="roundRect">
+            <a:avLst>
+              <a:gd name="adj" fmla="val 3000"/>
+            </a:avLst>
+          </a:prstGeom>
+          <a:solidFill>
+            <a:srgbClr val="002855"/>
+          </a:solidFill>
+          <a:ln>
+            <a:noFill/>
+          </a:ln>
+        </p:spPr>
+        <p:style>
+          <a:lnRef idx="1">
+            <a:schemeClr val="accent1"/>
+          </a:lnRef>
+          <a:fillRef idx="3">
+            <a:schemeClr val="accent1"/>
+          </a:fillRef>
+          <a:effectRef idx="2">
+            <a:schemeClr val="accent1"/>
+          </a:effectRef>
+          <a:fontRef idx="minor">
+            <a:schemeClr val="lt1"/>
+          </a:fontRef>
+        </p:style>
+        <p:txBody>
+          <a:bodyPr rtlCol="0" anchor="ctr"/>
+          <a:lstStyle/>
+          <a:p>
+            <a:pPr algn="ctr"/>
+          </a:p>
+        </p:txBody>
+      </p:sp>
+      <p:sp>
+        <p:nvSpPr>
+          <p:cNvPr id="8" name="TextBox 7"/>
+          <p:cNvSpPr txBox="1"/>
+          <p:nvPr/>
+        </p:nvSpPr>
+        <p:spPr>
+          <a:xfrm>
+            <a:off x="6391655" y="1170432"/>
+            <a:ext cx="5084064" cy="777240"/>
+          </a:xfrm>
+          <a:prstGeom prst="rect">
+            <a:avLst/>
+          </a:prstGeom>
+          <a:noFill/>
+        </p:spPr>
+        <p:txBody>
+          <a:bodyPr wrap="square">
+            <a:spAutoFit/>
+          </a:bodyPr>
+          <a:lstStyle/>
+          <a:p>
+            <a:r>
+              <a:rPr sz="1050" b="1">
+                <a:solidFill>
+                  <a:srgbClr val="F2A900"/>
+                </a:solidFill>
+                <a:latin typeface="Segoe UI"/>
+              </a:rPr>
+              <a:t>TERMINAL 2 · CONSUMIDOR SPARK (spark-submit spark_streaming_consumer.py)</a:t>
+            </a:r>
+          </a:p>
+          <a:p>
+            <a:pPr>
+              <a:spcBef>
+                <a:spcPts val="200"/>
+              </a:spcBef>
+            </a:pPr>
+            <a:r>
+              <a:rPr sz="980">
+                <a:solidFill>
+                  <a:srgbClr val="FFFFFF"/>
+                </a:solidFill>
+                <a:latin typeface="Segoe UI"/>
+              </a:rPr>
+              <a:t>Ejecuta el conector spark-sql-kafka-0-10_2.13:4.2.1, deserializa el JSON y consolida micro-batches (Batch 0, 6, 7) con promedios por ventana de 1 minuto.</a:t>
+            </a:r>
+          </a:p>
+        </p:txBody>
+      </p:sp>
+      <p:sp>
+        <p:nvSpPr>
+          <p:cNvPr id="9" name="Rounded Rectangle 8"/>
+          <p:cNvSpPr/>
+          <p:nvPr/>
+        </p:nvSpPr>
+        <p:spPr>
+          <a:xfrm>
+            <a:off x="548640" y="2121408"/>
+            <a:ext cx="11091672" cy="4416552"/>
+          </a:xfrm>
+          <a:prstGeom prst="roundRect">
+            <a:avLst>
+              <a:gd name="adj" fmla="val 3000"/>
+            </a:avLst>
+          </a:prstGeom>
+          <a:solidFill>
+            <a:srgbClr val="FFFFFF"/>
+          </a:solidFill>
+          <a:ln w="12700">
+            <a:solidFill>
+              <a:srgbClr val="CBD5E1"/>
+            </a:solidFill>
+          </a:ln>
+        </p:spPr>
+        <p:style>
+          <a:lnRef idx="1">
+            <a:schemeClr val="accent1"/>
+          </a:lnRef>
+          <a:fillRef idx="3">
+            <a:schemeClr val="accent1"/>
+          </a:fillRef>
+          <a:effectRef idx="2">
+            <a:schemeClr val="accent1"/>
+          </a:effectRef>
+          <a:fontRef idx="minor">
+            <a:schemeClr val="lt1"/>
+          </a:fontRef>
+        </p:style>
+        <p:txBody>
+          <a:bodyPr rtlCol="0" anchor="ctr"/>
+          <a:lstStyle/>
+          <a:p>
+            <a:pPr algn="ctr"/>
+          </a:p>
+        </p:txBody>
+      </p:sp>
       <p:pic>
         <p:nvPicPr>
-          <p:cNvPr id="7" name="Picture 6" descr="image.png"/>
+          <p:cNvPr id="10" name="Picture 9" descr="captura_streaming_terminales_reales.png"/>
+          <p:cNvPicPr>
+            <a:picLocks noChangeAspect="1"/>
+          </p:cNvPicPr>
+          <p:nvPr/>
+        </p:nvPicPr>
+        <p:blipFill>
+          <a:blip r:embed="rId2"/>
+          <a:stretch>
+            <a:fillRect/>
+          </a:stretch>
+        </p:blipFill>
+        <p:spPr>
+          <a:xfrm>
+            <a:off x="2172034" y="2185416"/>
+            <a:ext cx="7844882" cy="4288536"/>
+          </a:xfrm>
+          <a:prstGeom prst="rect">
+            <a:avLst/>
+          </a:prstGeom>
+        </p:spPr>
+      </p:pic>
+    </p:spTree>
+  </p:cSld>
+  <p:clrMapOvr>
+    <a:masterClrMapping/>
+  </p:clrMapOvr>
+</p:sld>
+</file>
+
+<file path=ppt/slides/slide9.xml><?xml version="1.0" encoding="utf-8"?>
+<p:sld xmlns:a="http://schemas.openxmlformats.org/drawingml/2006/main" xmlns:p="http://schemas.openxmlformats.org/presentationml/2006/main" xmlns:r="http://schemas.openxmlformats.org/officeDocument/2006/relationships">
+  <p:cSld>
+    <p:spTree>
+      <p:nvGrpSpPr>
+        <p:cNvPr id="1" name=""/>
+        <p:cNvGrpSpPr/>
+        <p:nvPr/>
+      </p:nvGrpSpPr>
+      <p:grpSpPr/>
+      <p:sp>
+        <p:nvSpPr>
+          <p:cNvPr id="2" name="Rectangle 1"/>
+          <p:cNvSpPr/>
+          <p:nvPr/>
+        </p:nvSpPr>
+        <p:spPr>
+          <a:xfrm>
+            <a:off x="0" y="0"/>
+            <a:ext cx="12191695" cy="6858000"/>
+          </a:xfrm>
+          <a:prstGeom prst="rect">
+            <a:avLst/>
+          </a:prstGeom>
+          <a:solidFill>
+            <a:srgbClr val="F8FAFC"/>
+          </a:solidFill>
+          <a:ln>
+            <a:noFill/>
+          </a:ln>
+        </p:spPr>
+        <p:style>
+          <a:lnRef idx="1">
+            <a:schemeClr val="accent1"/>
+          </a:lnRef>
+          <a:fillRef idx="3">
+            <a:schemeClr val="accent1"/>
+          </a:fillRef>
+          <a:effectRef idx="2">
+            <a:schemeClr val="accent1"/>
+          </a:effectRef>
+          <a:fontRef idx="minor">
+            <a:schemeClr val="lt1"/>
+          </a:fontRef>
+        </p:style>
+        <p:txBody>
+          <a:bodyPr rtlCol="0" anchor="ctr"/>
+          <a:lstStyle/>
+          <a:p>
+            <a:pPr algn="ctr"/>
+          </a:p>
+        </p:txBody>
+      </p:sp>
+      <p:sp>
+        <p:nvSpPr>
+          <p:cNvPr id="3" name="TextBox 2"/>
+          <p:cNvSpPr txBox="1"/>
+          <p:nvPr/>
+        </p:nvSpPr>
+        <p:spPr>
+          <a:xfrm>
+            <a:off x="548640" y="320040"/>
+            <a:ext cx="11064240" cy="256032"/>
+          </a:xfrm>
+          <a:prstGeom prst="rect">
+            <a:avLst/>
+          </a:prstGeom>
+          <a:noFill/>
+        </p:spPr>
+        <p:txBody>
+          <a:bodyPr wrap="square" lIns="0" tIns="0" rIns="0" bIns="0">
+            <a:spAutoFit/>
+          </a:bodyPr>
+          <a:lstStyle/>
+          <a:p>
+            <a:r>
+              <a:rPr sz="1050" b="1">
+                <a:solidFill>
+                  <a:srgbClr val="E87722"/>
+                </a:solidFill>
+                <a:latin typeface="Segoe UI"/>
+              </a:rPr>
+              <a:t>08 · MONITOREO DE CLÚSTER EN TIEMPO REAL (ANEXO 3 – PARTE 3)</a:t>
+            </a:r>
+          </a:p>
+        </p:txBody>
+      </p:sp>
+      <p:sp>
+        <p:nvSpPr>
+          <p:cNvPr id="4" name="TextBox 3"/>
+          <p:cNvSpPr txBox="1"/>
+          <p:nvPr/>
+        </p:nvSpPr>
+        <p:spPr>
+          <a:xfrm>
+            <a:off x="548640" y="548640"/>
+            <a:ext cx="11091672" cy="438912"/>
+          </a:xfrm>
+          <a:prstGeom prst="rect">
+            <a:avLst/>
+          </a:prstGeom>
+          <a:noFill/>
+        </p:spPr>
+        <p:txBody>
+          <a:bodyPr wrap="square" lIns="0" tIns="0" rIns="0" bIns="0">
+            <a:spAutoFit/>
+          </a:bodyPr>
+          <a:lstStyle/>
+          <a:p>
+            <a:r>
+              <a:rPr sz="2100" b="1">
+                <a:solidFill>
+                  <a:srgbClr val="002855"/>
+                </a:solidFill>
+                <a:latin typeface="Segoe UI"/>
+              </a:rPr>
+              <a:t>Auditoría de Jobs, Stages, Streaming y Executors en Spark Web UI (:4040)</a:t>
+            </a:r>
+          </a:p>
+        </p:txBody>
+      </p:sp>
+      <p:sp>
+        <p:nvSpPr>
+          <p:cNvPr id="5" name="Rounded Rectangle 4"/>
+          <p:cNvSpPr/>
+          <p:nvPr/>
+        </p:nvSpPr>
+        <p:spPr>
+          <a:xfrm>
+            <a:off x="548640" y="1143000"/>
+            <a:ext cx="5413248" cy="2633472"/>
+          </a:xfrm>
+          <a:prstGeom prst="roundRect">
+            <a:avLst>
+              <a:gd name="adj" fmla="val 3000"/>
+            </a:avLst>
+          </a:prstGeom>
+          <a:solidFill>
+            <a:srgbClr val="FFFFFF"/>
+          </a:solidFill>
+          <a:ln w="12700">
+            <a:solidFill>
+              <a:srgbClr val="CBD5E1"/>
+            </a:solidFill>
+          </a:ln>
+        </p:spPr>
+        <p:style>
+          <a:lnRef idx="1">
+            <a:schemeClr val="accent1"/>
+          </a:lnRef>
+          <a:fillRef idx="3">
+            <a:schemeClr val="accent1"/>
+          </a:fillRef>
+          <a:effectRef idx="2">
+            <a:schemeClr val="accent1"/>
+          </a:effectRef>
+          <a:fontRef idx="minor">
+            <a:schemeClr val="lt1"/>
+          </a:fontRef>
+        </p:style>
+        <p:txBody>
+          <a:bodyPr rtlCol="0" anchor="ctr"/>
+          <a:lstStyle/>
+          <a:p>
+            <a:pPr algn="ctr"/>
+          </a:p>
+        </p:txBody>
+      </p:sp>
+      <p:sp>
+        <p:nvSpPr>
+          <p:cNvPr id="6" name="TextBox 5"/>
+          <p:cNvSpPr txBox="1"/>
+          <p:nvPr/>
+        </p:nvSpPr>
+        <p:spPr>
+          <a:xfrm>
+            <a:off x="694944" y="1216152"/>
+            <a:ext cx="5120640" cy="457200"/>
+          </a:xfrm>
+          <a:prstGeom prst="rect">
+            <a:avLst/>
+          </a:prstGeom>
+          <a:noFill/>
+        </p:spPr>
+        <p:txBody>
+          <a:bodyPr wrap="square">
+            <a:spAutoFit/>
+          </a:bodyPr>
+          <a:lstStyle/>
+          <a:p>
+            <a:r>
+              <a:rPr sz="1050" b="1">
+                <a:solidFill>
+                  <a:srgbClr val="002855"/>
+                </a:solidFill>
+                <a:latin typeface="Segoe UI"/>
+              </a:rPr>
+              <a:t>1 · Pestaña Jobs (http://localhost:4040/jobs/) — </a:t>
+            </a:r>
+            <a:r>
+              <a:rPr sz="950">
+                <a:solidFill>
+                  <a:srgbClr val="475569"/>
+                </a:solidFill>
+                <a:latin typeface="Segoe UI"/>
+              </a:rPr>
+              <a:t>Micro-batches completados y activos (200/200 tareas en modo FIFO).</a:t>
+            </a:r>
+          </a:p>
+        </p:txBody>
+      </p:sp>
+      <p:pic>
+        <p:nvPicPr>
+          <p:cNvPr id="7" name="Picture 6" descr="spark_ui_jobs_crop.png"/>
+          <p:cNvPicPr>
+            <a:picLocks noChangeAspect="1"/>
+          </p:cNvPicPr>
+          <p:nvPr/>
+        </p:nvPicPr>
+        <p:blipFill>
+          <a:blip r:embed="rId2"/>
+          <a:stretch>
+            <a:fillRect/>
+          </a:stretch>
+        </p:blipFill>
+        <p:spPr>
+          <a:xfrm>
+            <a:off x="671668" y="1673352"/>
+            <a:ext cx="5167191" cy="2029968"/>
+          </a:xfrm>
+          <a:prstGeom prst="rect">
+            <a:avLst/>
+          </a:prstGeom>
+        </p:spPr>
+      </p:pic>
+      <p:sp>
+        <p:nvSpPr>
+          <p:cNvPr id="8" name="Rounded Rectangle 7"/>
+          <p:cNvSpPr/>
+          <p:nvPr/>
+        </p:nvSpPr>
+        <p:spPr>
+          <a:xfrm>
+            <a:off x="6227064" y="1143000"/>
+            <a:ext cx="5413248" cy="2633472"/>
+          </a:xfrm>
+          <a:prstGeom prst="roundRect">
+            <a:avLst>
+              <a:gd name="adj" fmla="val 3000"/>
+            </a:avLst>
+          </a:prstGeom>
+          <a:solidFill>
+            <a:srgbClr val="FFFFFF"/>
+          </a:solidFill>
+          <a:ln w="12700">
+            <a:solidFill>
+              <a:srgbClr val="CBD5E1"/>
+            </a:solidFill>
+          </a:ln>
+        </p:spPr>
+        <p:style>
+          <a:lnRef idx="1">
+            <a:schemeClr val="accent1"/>
+          </a:lnRef>
+          <a:fillRef idx="3">
+            <a:schemeClr val="accent1"/>
+          </a:fillRef>
+          <a:effectRef idx="2">
+            <a:schemeClr val="accent1"/>
+          </a:effectRef>
+          <a:fontRef idx="minor">
+            <a:schemeClr val="lt1"/>
+          </a:fontRef>
+        </p:style>
+        <p:txBody>
+          <a:bodyPr rtlCol="0" anchor="ctr"/>
+          <a:lstStyle/>
+          <a:p>
+            <a:pPr algn="ctr"/>
+          </a:p>
+        </p:txBody>
+      </p:sp>
+      <p:sp>
+        <p:nvSpPr>
+          <p:cNvPr id="9" name="TextBox 8"/>
+          <p:cNvSpPr txBox="1"/>
+          <p:nvPr/>
+        </p:nvSpPr>
+        <p:spPr>
+          <a:xfrm>
+            <a:off x="6373368" y="1216152"/>
+            <a:ext cx="5120640" cy="457200"/>
+          </a:xfrm>
+          <a:prstGeom prst="rect">
+            <a:avLst/>
+          </a:prstGeom>
+          <a:noFill/>
+        </p:spPr>
+        <p:txBody>
+          <a:bodyPr wrap="square">
+            <a:spAutoFit/>
+          </a:bodyPr>
+          <a:lstStyle/>
+          <a:p>
+            <a:r>
+              <a:rPr sz="1050" b="1">
+                <a:solidFill>
+                  <a:srgbClr val="002855"/>
+                </a:solidFill>
+                <a:latin typeface="Segoe UI"/>
+              </a:rPr>
+              <a:t>2 · Pestaña Stages (http://localhost:4040/stages/) — </a:t>
+            </a:r>
+            <a:r>
+              <a:rPr sz="950">
+                <a:solidFill>
+                  <a:srgbClr val="475569"/>
+                </a:solidFill>
+                <a:latin typeface="Segoe UI"/>
+              </a:rPr>
+              <a:t>Etapas del DAG, lecturas/escrituras de Shuffle (720 B) y tiempos.</a:t>
+            </a:r>
+          </a:p>
+        </p:txBody>
+      </p:sp>
+      <p:pic>
+        <p:nvPicPr>
+          <p:cNvPr id="10" name="Picture 9" descr="spark_ui_stages_crop.png"/>
           <p:cNvPicPr>
             <a:picLocks noChangeAspect="1"/>
           </p:cNvPicPr>
@@ -8003,8 +8615,8 @@
         </p:blipFill>
         <p:spPr>
           <a:xfrm>
-            <a:off x="914400" y="5753100"/>
-            <a:ext cx="152400" cy="133350"/>
+            <a:off x="6350092" y="1673352"/>
+            <a:ext cx="5167191" cy="2029968"/>
           </a:xfrm>
           <a:prstGeom prst="rect">
             <a:avLst/>
@@ -8013,14 +8625,61 @@
       </p:pic>
       <p:sp>
         <p:nvSpPr>
-          <p:cNvPr id="8" name="TextBox 7"/>
+          <p:cNvPr id="11" name="Rounded Rectangle 10"/>
+          <p:cNvSpPr/>
+          <p:nvPr/>
+        </p:nvSpPr>
+        <p:spPr>
+          <a:xfrm>
+            <a:off x="548640" y="3913632"/>
+            <a:ext cx="5413248" cy="2633472"/>
+          </a:xfrm>
+          <a:prstGeom prst="roundRect">
+            <a:avLst>
+              <a:gd name="adj" fmla="val 3000"/>
+            </a:avLst>
+          </a:prstGeom>
+          <a:solidFill>
+            <a:srgbClr val="FFFFFF"/>
+          </a:solidFill>
+          <a:ln w="12700">
+            <a:solidFill>
+              <a:srgbClr val="CBD5E1"/>
+            </a:solidFill>
+          </a:ln>
+        </p:spPr>
+        <p:style>
+          <a:lnRef idx="1">
+            <a:schemeClr val="accent1"/>
+          </a:lnRef>
+          <a:fillRef idx="3">
+            <a:schemeClr val="accent1"/>
+          </a:fillRef>
+          <a:effectRef idx="2">
+            <a:schemeClr val="accent1"/>
+          </a:effectRef>
+          <a:fontRef idx="minor">
+            <a:schemeClr val="lt1"/>
+          </a:fontRef>
+        </p:style>
+        <p:txBody>
+          <a:bodyPr rtlCol="0" anchor="ctr"/>
+          <a:lstStyle/>
+          <a:p>
+            <a:pPr algn="ctr"/>
+          </a:p>
+        </p:txBody>
+      </p:sp>
+      <p:sp>
+        <p:nvSpPr>
+          <p:cNvPr id="12" name="TextBox 11"/>
           <p:cNvSpPr txBox="1"/>
           <p:nvPr/>
         </p:nvSpPr>
         <p:spPr>
           <a:xfrm>
-            <a:off x="609600" y="457200"/>
-            <a:ext cx="11582400" cy="171450"/>
+            <a:off x="694944" y="3986784"/>
+            <a:ext cx="5120640" cy="457200"/>
           </a:xfrm>
           <a:prstGeom prst="rect">
             <a:avLst/>
@@ -8028,472 +8687,170 @@
           <a:noFill/>
         </p:spPr>
         <p:txBody>
-          <a:bodyPr wrap="none" lIns="0" rIns="0" tIns="0" bIns="0" anchor="t">
+          <a:bodyPr wrap="square">
             <a:spAutoFit/>
           </a:bodyPr>
           <a:lstStyle/>
           <a:p>
-            <a:pPr algn="l"/>
-            <a:r>
-              <a:rPr b="1" sz="1050" i="0" u="none">
-                <a:solidFill>
-                  <a:srgbClr val="D87014"/>
-                </a:solidFill>
-                <a:latin typeface="DM Sans"/>
-              </a:rPr>
-              <a:t>06 · CIERRE, ENTREGABLES Y SUSTENTACIÓN</a:t>
-            </a:r>
-          </a:p>
-        </p:txBody>
-      </p:sp>
-      <p:sp>
-        <p:nvSpPr>
-          <p:cNvPr id="9" name="TextBox 8"/>
-          <p:cNvSpPr txBox="1"/>
-          <p:nvPr/>
-        </p:nvSpPr>
-        <p:spPr>
-          <a:xfrm>
-            <a:off x="609600" y="685800"/>
-            <a:ext cx="11582400" cy="409575"/>
+            <a:r>
+              <a:rPr sz="1050" b="1">
+                <a:solidFill>
+                  <a:srgbClr val="002855"/>
+                </a:solidFill>
+                <a:latin typeface="Segoe UI"/>
+              </a:rPr>
+              <a:t>3 · Pestaña Structured Streaming (/StreamingQuery/) — </a:t>
+            </a:r>
+            <a:r>
+              <a:rPr sz="950">
+                <a:solidFill>
+                  <a:srgbClr val="475569"/>
+                </a:solidFill>
+                <a:latin typeface="Segoe UI"/>
+              </a:rPr>
+              <a:t>Consulta RUNNING con tasa de entrada/proceso y último Batch.</a:t>
+            </a:r>
+          </a:p>
+        </p:txBody>
+      </p:sp>
+      <p:pic>
+        <p:nvPicPr>
+          <p:cNvPr id="13" name="Picture 12" descr="spark_ui_streaming_crop.png"/>
+          <p:cNvPicPr>
+            <a:picLocks noChangeAspect="1"/>
+          </p:cNvPicPr>
+          <p:nvPr/>
+        </p:nvPicPr>
+        <p:blipFill>
+          <a:blip r:embed="rId4"/>
+          <a:stretch>
+            <a:fillRect/>
+          </a:stretch>
+        </p:blipFill>
+        <p:spPr>
+          <a:xfrm>
+            <a:off x="671668" y="4443984"/>
+            <a:ext cx="5167191" cy="2029968"/>
           </a:xfrm>
           <a:prstGeom prst="rect">
             <a:avLst/>
           </a:prstGeom>
+        </p:spPr>
+      </p:pic>
+      <p:sp>
+        <p:nvSpPr>
+          <p:cNvPr id="14" name="Rounded Rectangle 13"/>
+          <p:cNvSpPr/>
+          <p:nvPr/>
+        </p:nvSpPr>
+        <p:spPr>
+          <a:xfrm>
+            <a:off x="6227064" y="3913632"/>
+            <a:ext cx="5413248" cy="2633472"/>
+          </a:xfrm>
+          <a:prstGeom prst="roundRect">
+            <a:avLst>
+              <a:gd name="adj" fmla="val 3000"/>
+            </a:avLst>
+          </a:prstGeom>
+          <a:solidFill>
+            <a:srgbClr val="FFFFFF"/>
+          </a:solidFill>
+          <a:ln w="12700">
+            <a:solidFill>
+              <a:srgbClr val="CBD5E1"/>
+            </a:solidFill>
+          </a:ln>
+        </p:spPr>
+        <p:style>
+          <a:lnRef idx="1">
+            <a:schemeClr val="accent1"/>
+          </a:lnRef>
+          <a:fillRef idx="3">
+            <a:schemeClr val="accent1"/>
+          </a:fillRef>
+          <a:effectRef idx="2">
+            <a:schemeClr val="accent1"/>
+          </a:effectRef>
+          <a:fontRef idx="minor">
+            <a:schemeClr val="lt1"/>
+          </a:fontRef>
+        </p:style>
+        <p:txBody>
+          <a:bodyPr rtlCol="0" anchor="ctr"/>
+          <a:lstStyle/>
+          <a:p>
+            <a:pPr algn="ctr"/>
+          </a:p>
+        </p:txBody>
+      </p:sp>
+      <p:sp>
+        <p:nvSpPr>
+          <p:cNvPr id="15" name="TextBox 14"/>
+          <p:cNvSpPr txBox="1"/>
+          <p:nvPr/>
+        </p:nvSpPr>
+        <p:spPr>
+          <a:xfrm>
+            <a:off x="6373368" y="3986784"/>
+            <a:ext cx="5120640" cy="457200"/>
+          </a:xfrm>
+          <a:prstGeom prst="rect">
+            <a:avLst/>
+          </a:prstGeom>
           <a:noFill/>
         </p:spPr>
         <p:txBody>
-          <a:bodyPr wrap="none" lIns="0" rIns="0" tIns="0" bIns="0" anchor="t">
+          <a:bodyPr wrap="square">
             <a:spAutoFit/>
           </a:bodyPr>
           <a:lstStyle/>
           <a:p>
-            <a:pPr algn="l"/>
-            <a:r>
-              <a:rPr b="1" sz="2550" i="0" u="none">
-                <a:solidFill>
-                  <a:srgbClr val="FFFFFF"/>
-                </a:solidFill>
-                <a:latin typeface="Space Grotesk"/>
-              </a:rPr>
-              <a:t>Recursos del Proyecto, Conclusiones y Video</a:t>
-            </a:r>
-          </a:p>
-        </p:txBody>
-      </p:sp>
-      <p:sp>
-        <p:nvSpPr>
-          <p:cNvPr id="10" name="TextBox 9"/>
-          <p:cNvSpPr txBox="1"/>
-          <p:nvPr/>
-        </p:nvSpPr>
-        <p:spPr>
-          <a:xfrm>
-            <a:off x="876300" y="2509837"/>
-            <a:ext cx="3900487" cy="247650"/>
+            <a:r>
+              <a:rPr sz="1050" b="1">
+                <a:solidFill>
+                  <a:srgbClr val="002855"/>
+                </a:solidFill>
+                <a:latin typeface="Segoe UI"/>
+              </a:rPr>
+              <a:t>4 · Pestaña Executors (http://localhost:4040/executors/) — </a:t>
+            </a:r>
+            <a:r>
+              <a:rPr sz="950">
+                <a:solidFill>
+                  <a:srgbClr val="475569"/>
+                </a:solidFill>
+                <a:latin typeface="Segoe UI"/>
+              </a:rPr>
+              <a:t>Métricas del Driver/Executor activo (18 núcleos, 803 tareas).</a:t>
+            </a:r>
+          </a:p>
+        </p:txBody>
+      </p:sp>
+      <p:pic>
+        <p:nvPicPr>
+          <p:cNvPr id="16" name="Picture 15" descr="spark_ui_executors_crop.png"/>
+          <p:cNvPicPr>
+            <a:picLocks noChangeAspect="1"/>
+          </p:cNvPicPr>
+          <p:nvPr/>
+        </p:nvPicPr>
+        <p:blipFill>
+          <a:blip r:embed="rId5"/>
+          <a:stretch>
+            <a:fillRect/>
+          </a:stretch>
+        </p:blipFill>
+        <p:spPr>
+          <a:xfrm>
+            <a:off x="6350092" y="4443984"/>
+            <a:ext cx="5167191" cy="2029968"/>
           </a:xfrm>
           <a:prstGeom prst="rect">
             <a:avLst/>
           </a:prstGeom>
-          <a:noFill/>
-        </p:spPr>
-        <p:txBody>
-          <a:bodyPr wrap="none" lIns="0" rIns="0" tIns="0" bIns="0" anchor="t">
-            <a:spAutoFit/>
-          </a:bodyPr>
-          <a:lstStyle/>
-          <a:p>
-            <a:pPr algn="l"/>
-            <a:r>
-              <a:rPr b="1" sz="1500" i="0" u="none">
-                <a:solidFill>
-                  <a:srgbClr val="D87014"/>
-                </a:solidFill>
-                <a:latin typeface="Space Grotesk"/>
-              </a:rPr>
-              <a:t>1 · Velocidad en Memoria RAM</a:t>
-            </a:r>
-          </a:p>
-        </p:txBody>
-      </p:sp>
-      <p:sp>
-        <p:nvSpPr>
-          <p:cNvPr id="11" name="TextBox 10"/>
-          <p:cNvSpPr txBox="1"/>
-          <p:nvPr/>
-        </p:nvSpPr>
-        <p:spPr>
-          <a:xfrm>
-            <a:off x="876300" y="2852737"/>
-            <a:ext cx="3067050" cy="685800"/>
-          </a:xfrm>
-          <a:prstGeom prst="rect">
-            <a:avLst/>
-          </a:prstGeom>
-          <a:noFill/>
-        </p:spPr>
-        <p:txBody>
-          <a:bodyPr wrap="square" lIns="0" rIns="0" tIns="0" bIns="0" anchor="t">
-            <a:spAutoFit/>
-          </a:bodyPr>
-          <a:lstStyle/>
-          <a:p>
-            <a:pPr algn="l"/>
-            <a:r>
-              <a:rPr b="0" sz="1350" i="0" u="none">
-                <a:solidFill>
-                  <a:srgbClr val="F1F5F9"/>
-                </a:solidFill>
-                <a:latin typeface="DM Sans"/>
-              </a:rPr>
-              <a:t>Apache Spark elimina los cuellos de botella por I/O en disco tradicionales de Hadoop.</a:t>
-            </a:r>
-          </a:p>
-        </p:txBody>
-      </p:sp>
-      <p:sp>
-        <p:nvSpPr>
-          <p:cNvPr id="12" name="TextBox 11"/>
-          <p:cNvSpPr txBox="1"/>
-          <p:nvPr/>
-        </p:nvSpPr>
-        <p:spPr>
-          <a:xfrm>
-            <a:off x="4610100" y="2509837"/>
-            <a:ext cx="3900487" cy="247650"/>
-          </a:xfrm>
-          <a:prstGeom prst="rect">
-            <a:avLst/>
-          </a:prstGeom>
-          <a:noFill/>
-        </p:spPr>
-        <p:txBody>
-          <a:bodyPr wrap="none" lIns="0" rIns="0" tIns="0" bIns="0" anchor="t">
-            <a:spAutoFit/>
-          </a:bodyPr>
-          <a:lstStyle/>
-          <a:p>
-            <a:pPr algn="l"/>
-            <a:r>
-              <a:rPr b="1" sz="1500" i="0" u="none">
-                <a:solidFill>
-                  <a:srgbClr val="D87014"/>
-                </a:solidFill>
-                <a:latin typeface="Space Grotesk"/>
-              </a:rPr>
-              <a:t>2 · Optimización Avanzada</a:t>
-            </a:r>
-          </a:p>
-        </p:txBody>
-      </p:sp>
-      <p:sp>
-        <p:nvSpPr>
-          <p:cNvPr id="13" name="TextBox 12"/>
-          <p:cNvSpPr txBox="1"/>
-          <p:nvPr/>
-        </p:nvSpPr>
-        <p:spPr>
-          <a:xfrm>
-            <a:off x="4610100" y="2852737"/>
-            <a:ext cx="3067050" cy="685800"/>
-          </a:xfrm>
-          <a:prstGeom prst="rect">
-            <a:avLst/>
-          </a:prstGeom>
-          <a:noFill/>
-        </p:spPr>
-        <p:txBody>
-          <a:bodyPr wrap="square" lIns="0" rIns="0" tIns="0" bIns="0" anchor="t">
-            <a:spAutoFit/>
-          </a:bodyPr>
-          <a:lstStyle/>
-          <a:p>
-            <a:pPr algn="l"/>
-            <a:r>
-              <a:rPr b="0" sz="1350" i="0" u="none">
-                <a:solidFill>
-                  <a:srgbClr val="F1F5F9"/>
-                </a:solidFill>
-                <a:latin typeface="DM Sans"/>
-              </a:rPr>
-              <a:t>Catalyst y Tungsten convierten a los DataFrames en la abstracción más eficiente y escalable.</a:t>
-            </a:r>
-          </a:p>
-        </p:txBody>
-      </p:sp>
-      <p:sp>
-        <p:nvSpPr>
-          <p:cNvPr id="14" name="TextBox 13"/>
-          <p:cNvSpPr txBox="1"/>
-          <p:nvPr/>
-        </p:nvSpPr>
-        <p:spPr>
-          <a:xfrm>
-            <a:off x="8343900" y="2509837"/>
-            <a:ext cx="3848100" cy="247650"/>
-          </a:xfrm>
-          <a:prstGeom prst="rect">
-            <a:avLst/>
-          </a:prstGeom>
-          <a:noFill/>
-        </p:spPr>
-        <p:txBody>
-          <a:bodyPr wrap="none" lIns="0" rIns="0" tIns="0" bIns="0" anchor="t">
-            <a:spAutoFit/>
-          </a:bodyPr>
-          <a:lstStyle/>
-          <a:p>
-            <a:pPr algn="l"/>
-            <a:r>
-              <a:rPr b="1" sz="1500" i="0" u="none">
-                <a:solidFill>
-                  <a:srgbClr val="D87014"/>
-                </a:solidFill>
-                <a:latin typeface="Space Grotesk"/>
-              </a:rPr>
-              <a:t>3 · Desacoplamiento Streaming</a:t>
-            </a:r>
-          </a:p>
-        </p:txBody>
-      </p:sp>
-      <p:sp>
-        <p:nvSpPr>
-          <p:cNvPr id="15" name="TextBox 14"/>
-          <p:cNvSpPr txBox="1"/>
-          <p:nvPr/>
-        </p:nvSpPr>
-        <p:spPr>
-          <a:xfrm>
-            <a:off x="8343900" y="2852737"/>
-            <a:ext cx="3067050" cy="685800"/>
-          </a:xfrm>
-          <a:prstGeom prst="rect">
-            <a:avLst/>
-          </a:prstGeom>
-          <a:noFill/>
-        </p:spPr>
-        <p:txBody>
-          <a:bodyPr wrap="square" lIns="0" rIns="0" tIns="0" bIns="0" anchor="t">
-            <a:spAutoFit/>
-          </a:bodyPr>
-          <a:lstStyle/>
-          <a:p>
-            <a:pPr algn="l"/>
-            <a:r>
-              <a:rPr b="0" sz="1350" i="0" u="none">
-                <a:solidFill>
-                  <a:srgbClr val="F1F5F9"/>
-                </a:solidFill>
-                <a:latin typeface="DM Sans"/>
-              </a:rPr>
-              <a:t>Apache Kafka amortigua ráfagas de telemetría IoT con alta elasticidad y tolerancia a fallos.</a:t>
-            </a:r>
-          </a:p>
-        </p:txBody>
-      </p:sp>
-      <p:sp>
-        <p:nvSpPr>
-          <p:cNvPr id="16" name="TextBox 15"/>
-          <p:cNvSpPr txBox="1"/>
-          <p:nvPr/>
-        </p:nvSpPr>
-        <p:spPr>
-          <a:xfrm>
-            <a:off x="914400" y="5181600"/>
-            <a:ext cx="8405812" cy="171450"/>
-          </a:xfrm>
-          <a:prstGeom prst="rect">
-            <a:avLst/>
-          </a:prstGeom>
-          <a:noFill/>
-        </p:spPr>
-        <p:txBody>
-          <a:bodyPr wrap="none" lIns="190500" rIns="0" tIns="0" bIns="0" anchor="t">
-            <a:spAutoFit/>
-          </a:bodyPr>
-          <a:lstStyle/>
-          <a:p>
-            <a:pPr algn="l"/>
-            <a:r>
-              <a:rPr b="1" sz="1050" i="0" u="none">
-                <a:solidFill>
-                  <a:srgbClr val="D87014"/>
-                </a:solidFill>
-                <a:latin typeface="DM Sans"/>
-              </a:rPr>
-              <a:t>REPOSITORIO OFICIAL DEL PROYECTO</a:t>
-            </a:r>
-          </a:p>
-        </p:txBody>
-      </p:sp>
-      <p:sp>
-        <p:nvSpPr>
-          <p:cNvPr id="17" name="TextBox 16"/>
-          <p:cNvSpPr txBox="1"/>
-          <p:nvPr/>
-        </p:nvSpPr>
-        <p:spPr>
-          <a:xfrm>
-            <a:off x="914400" y="5391150"/>
-            <a:ext cx="8405812" cy="228600"/>
-          </a:xfrm>
-          <a:prstGeom prst="rect">
-            <a:avLst/>
-          </a:prstGeom>
-          <a:noFill/>
-        </p:spPr>
-        <p:txBody>
-          <a:bodyPr wrap="none" lIns="0" rIns="0" tIns="0" bIns="0" anchor="t">
-            <a:spAutoFit/>
-          </a:bodyPr>
-          <a:lstStyle/>
-          <a:p>
-            <a:r>
-              <a:t>https://github.com/paulodelosrey/UNAD-BigData-Tarea3-Spark-Streaming</a:t>
-            </a:r>
-          </a:p>
-        </p:txBody>
-      </p:sp>
-      <p:sp>
-        <p:nvSpPr>
-          <p:cNvPr id="18" name="TextBox 17"/>
-          <p:cNvSpPr txBox="1"/>
-          <p:nvPr/>
-        </p:nvSpPr>
-        <p:spPr>
-          <a:xfrm>
-            <a:off x="914400" y="5734050"/>
-            <a:ext cx="8405812" cy="171450"/>
-          </a:xfrm>
-          <a:prstGeom prst="rect">
-            <a:avLst/>
-          </a:prstGeom>
-          <a:noFill/>
-        </p:spPr>
-        <p:txBody>
-          <a:bodyPr wrap="none" lIns="209550" rIns="0" tIns="0" bIns="0" anchor="t">
-            <a:spAutoFit/>
-          </a:bodyPr>
-          <a:lstStyle/>
-          <a:p>
-            <a:pPr algn="l"/>
-            <a:r>
-              <a:rPr b="1" sz="1050" i="0" u="none">
-                <a:solidFill>
-                  <a:srgbClr val="D87014"/>
-                </a:solidFill>
-                <a:latin typeface="DM Sans"/>
-              </a:rPr>
-              <a:t>ENLACE AL VIDEO DE SUSTENTACIÓN (MÁX. 5 MINUTOS)</a:t>
-            </a:r>
-          </a:p>
-        </p:txBody>
-      </p:sp>
-      <p:sp>
-        <p:nvSpPr>
-          <p:cNvPr id="19" name="TextBox 18"/>
-          <p:cNvSpPr txBox="1"/>
-          <p:nvPr/>
-        </p:nvSpPr>
-        <p:spPr>
-          <a:xfrm>
-            <a:off x="914400" y="5943600"/>
-            <a:ext cx="8405812" cy="228600"/>
-          </a:xfrm>
-          <a:prstGeom prst="rect">
-            <a:avLst/>
-          </a:prstGeom>
-          <a:noFill/>
-        </p:spPr>
-        <p:txBody>
-          <a:bodyPr wrap="none" lIns="0" rIns="0" tIns="0" bIns="0" anchor="t">
-            <a:spAutoFit/>
-          </a:bodyPr>
-          <a:lstStyle/>
-          <a:p>
-            <a:pPr algn="l"/>
-            <a:r>
-              <a:rPr b="1" sz="1350" i="0" u="none">
-                <a:solidFill>
-                  <a:srgbClr val="002855"/>
-                </a:solidFill>
-                <a:latin typeface="DM Sans"/>
-              </a:rPr>
-              <a:t>[Pegar enlace del video de máximo 5 minutos]</a:t>
-            </a:r>
-          </a:p>
-        </p:txBody>
-      </p:sp>
-      <p:sp>
-        <p:nvSpPr>
-          <p:cNvPr id="20" name="TextBox 19"/>
-          <p:cNvSpPr txBox="1"/>
-          <p:nvPr/>
-        </p:nvSpPr>
-        <p:spPr>
-          <a:xfrm>
-            <a:off x="8062912" y="5443537"/>
-            <a:ext cx="3214687" cy="228600"/>
-          </a:xfrm>
-          <a:prstGeom prst="rect">
-            <a:avLst/>
-          </a:prstGeom>
-          <a:noFill/>
-        </p:spPr>
-        <p:txBody>
-          <a:bodyPr wrap="none" lIns="0" rIns="0" tIns="0" bIns="0" anchor="t">
-            <a:spAutoFit/>
-          </a:bodyPr>
-          <a:lstStyle/>
-          <a:p>
-            <a:pPr algn="r"/>
-            <a:r>
-              <a:rPr b="1" sz="1350" i="0" u="none">
-                <a:solidFill>
-                  <a:srgbClr val="002855"/>
-                </a:solidFill>
-                <a:latin typeface="DM Sans"/>
-              </a:rPr>
-              <a:t>Paulo Andrés De los Reyes G.</a:t>
-            </a:r>
-          </a:p>
-        </p:txBody>
-      </p:sp>
-      <p:sp>
-        <p:nvSpPr>
-          <p:cNvPr id="21" name="TextBox 20"/>
-          <p:cNvSpPr txBox="1"/>
-          <p:nvPr/>
-        </p:nvSpPr>
-        <p:spPr>
-          <a:xfrm>
-            <a:off x="8062912" y="5710237"/>
-            <a:ext cx="3214687" cy="200025"/>
-          </a:xfrm>
-          <a:prstGeom prst="rect">
-            <a:avLst/>
-          </a:prstGeom>
-          <a:noFill/>
-        </p:spPr>
-        <p:txBody>
-          <a:bodyPr wrap="none" lIns="0" rIns="0" tIns="0" bIns="0" anchor="t">
-            <a:spAutoFit/>
-          </a:bodyPr>
-          <a:lstStyle/>
-          <a:p>
-            <a:pPr algn="r"/>
-            <a:r>
-              <a:rPr b="0" sz="1200" i="0" u="none">
-                <a:solidFill>
-                  <a:srgbClr val="475569"/>
-                </a:solidFill>
-                <a:latin typeface="DM Sans"/>
-              </a:rPr>
-              <a:t>UNAD · Ingeniería de Sistemas · 2026</a:t>
-            </a:r>
-          </a:p>
-        </p:txBody>
-      </p:sp>
+        </p:spPr>
+      </p:pic>
     </p:spTree>
   </p:cSld>
   <p:clrMapOvr>

--- a/presentacion/Sustentación Tarea 3 Big Data UNAD.pptx
+++ b/presentacion/Sustentación Tarea 3 Big Data UNAD.pptx
@@ -4256,13 +4256,13 @@
           </a:p>
           <a:p>
             <a:r>
-              <a:rPr sz="1300" b="1">
+              <a:rPr sz="1400" b="1">
                 <a:solidFill>
                   <a:srgbClr val="005691"/>
                 </a:solidFill>
                 <a:latin typeface="Segoe UI"/>
               </a:rPr>
-              <a:t>[Pegar aquí el enlace de YouTube / Loom / Drive tras finalizar la grabación]</a:t>
+              <a:t>https://youtu.be/lX0_CDMhhbg</a:t>
             </a:r>
           </a:p>
         </p:txBody>

--- a/presentacion/Sustentación Tarea 3 Big Data UNAD.pptx
+++ b/presentacion/Sustentación Tarea 3 Big Data UNAD.pptx
@@ -4256,13 +4256,13 @@
           </a:p>
           <a:p>
             <a:r>
-              <a:rPr sz="1400" b="1">
+              <a:rPr sz="1150" b="1">
                 <a:solidFill>
                   <a:srgbClr val="005691"/>
                 </a:solidFill>
                 <a:latin typeface="Segoe UI"/>
               </a:rPr>
-              <a:t>https://youtu.be/lX0_CDMhhbg</a:t>
+              <a:t>https://drive.google.com/file/d/1W-Wxs7EDEc5xnfTqt0UkKGFZ4y3kINNL/view?usp=sharing</a:t>
             </a:r>
           </a:p>
         </p:txBody>
